--- a/AYOMIKUN EDA.pptx
+++ b/AYOMIKUN EDA.pptx
@@ -6,59 +6,63 @@
   </p:sldMasterIdLst>
   <p:sldIdLst>
     <p:sldId id="256" r:id="rId2"/>
-    <p:sldId id="257" r:id="rId3"/>
-    <p:sldId id="258" r:id="rId4"/>
-    <p:sldId id="259" r:id="rId5"/>
-    <p:sldId id="260" r:id="rId6"/>
-    <p:sldId id="261" r:id="rId7"/>
-    <p:sldId id="262" r:id="rId8"/>
-    <p:sldId id="263" r:id="rId9"/>
-    <p:sldId id="264" r:id="rId10"/>
-    <p:sldId id="265" r:id="rId11"/>
-    <p:sldId id="266" r:id="rId12"/>
-    <p:sldId id="267" r:id="rId13"/>
-    <p:sldId id="268" r:id="rId14"/>
-    <p:sldId id="269" r:id="rId15"/>
-    <p:sldId id="270" r:id="rId16"/>
-    <p:sldId id="271" r:id="rId17"/>
-    <p:sldId id="272" r:id="rId18"/>
-    <p:sldId id="273" r:id="rId19"/>
-    <p:sldId id="274" r:id="rId20"/>
-    <p:sldId id="275" r:id="rId21"/>
-    <p:sldId id="276" r:id="rId22"/>
-    <p:sldId id="277" r:id="rId23"/>
-    <p:sldId id="278" r:id="rId24"/>
-    <p:sldId id="280" r:id="rId25"/>
-    <p:sldId id="281" r:id="rId26"/>
-    <p:sldId id="279" r:id="rId27"/>
-    <p:sldId id="282" r:id="rId28"/>
-    <p:sldId id="287" r:id="rId29"/>
-    <p:sldId id="288" r:id="rId30"/>
-    <p:sldId id="283" r:id="rId31"/>
-    <p:sldId id="284" r:id="rId32"/>
-    <p:sldId id="285" r:id="rId33"/>
-    <p:sldId id="286" r:id="rId34"/>
-    <p:sldId id="289" r:id="rId35"/>
-    <p:sldId id="290" r:id="rId36"/>
-    <p:sldId id="291" r:id="rId37"/>
-    <p:sldId id="292" r:id="rId38"/>
-    <p:sldId id="293" r:id="rId39"/>
-    <p:sldId id="294" r:id="rId40"/>
-    <p:sldId id="295" r:id="rId41"/>
-    <p:sldId id="296" r:id="rId42"/>
-    <p:sldId id="297" r:id="rId43"/>
-    <p:sldId id="301" r:id="rId44"/>
-    <p:sldId id="298" r:id="rId45"/>
-    <p:sldId id="299" r:id="rId46"/>
-    <p:sldId id="300" r:id="rId47"/>
-    <p:sldId id="302" r:id="rId48"/>
-    <p:sldId id="303" r:id="rId49"/>
-    <p:sldId id="304" r:id="rId50"/>
-    <p:sldId id="305" r:id="rId51"/>
-    <p:sldId id="306" r:id="rId52"/>
-    <p:sldId id="307" r:id="rId53"/>
-    <p:sldId id="308" r:id="rId54"/>
-    <p:sldId id="310" r:id="rId55"/>
+    <p:sldId id="312" r:id="rId3"/>
+    <p:sldId id="313" r:id="rId4"/>
+    <p:sldId id="257" r:id="rId5"/>
+    <p:sldId id="258" r:id="rId6"/>
+    <p:sldId id="259" r:id="rId7"/>
+    <p:sldId id="260" r:id="rId8"/>
+    <p:sldId id="314" r:id="rId9"/>
+    <p:sldId id="261" r:id="rId10"/>
+    <p:sldId id="262" r:id="rId11"/>
+    <p:sldId id="263" r:id="rId12"/>
+    <p:sldId id="264" r:id="rId13"/>
+    <p:sldId id="265" r:id="rId14"/>
+    <p:sldId id="266" r:id="rId15"/>
+    <p:sldId id="267" r:id="rId16"/>
+    <p:sldId id="268" r:id="rId17"/>
+    <p:sldId id="269" r:id="rId18"/>
+    <p:sldId id="270" r:id="rId19"/>
+    <p:sldId id="271" r:id="rId20"/>
+    <p:sldId id="272" r:id="rId21"/>
+    <p:sldId id="273" r:id="rId22"/>
+    <p:sldId id="274" r:id="rId23"/>
+    <p:sldId id="275" r:id="rId24"/>
+    <p:sldId id="276" r:id="rId25"/>
+    <p:sldId id="277" r:id="rId26"/>
+    <p:sldId id="278" r:id="rId27"/>
+    <p:sldId id="280" r:id="rId28"/>
+    <p:sldId id="281" r:id="rId29"/>
+    <p:sldId id="279" r:id="rId30"/>
+    <p:sldId id="282" r:id="rId31"/>
+    <p:sldId id="287" r:id="rId32"/>
+    <p:sldId id="288" r:id="rId33"/>
+    <p:sldId id="283" r:id="rId34"/>
+    <p:sldId id="284" r:id="rId35"/>
+    <p:sldId id="285" r:id="rId36"/>
+    <p:sldId id="286" r:id="rId37"/>
+    <p:sldId id="289" r:id="rId38"/>
+    <p:sldId id="290" r:id="rId39"/>
+    <p:sldId id="291" r:id="rId40"/>
+    <p:sldId id="292" r:id="rId41"/>
+    <p:sldId id="293" r:id="rId42"/>
+    <p:sldId id="294" r:id="rId43"/>
+    <p:sldId id="295" r:id="rId44"/>
+    <p:sldId id="296" r:id="rId45"/>
+    <p:sldId id="297" r:id="rId46"/>
+    <p:sldId id="301" r:id="rId47"/>
+    <p:sldId id="298" r:id="rId48"/>
+    <p:sldId id="299" r:id="rId49"/>
+    <p:sldId id="300" r:id="rId50"/>
+    <p:sldId id="302" r:id="rId51"/>
+    <p:sldId id="303" r:id="rId52"/>
+    <p:sldId id="304" r:id="rId53"/>
+    <p:sldId id="305" r:id="rId54"/>
+    <p:sldId id="307" r:id="rId55"/>
+    <p:sldId id="308" r:id="rId56"/>
+    <p:sldId id="306" r:id="rId57"/>
+    <p:sldId id="311" r:id="rId58"/>
+    <p:sldId id="310" r:id="rId59"/>
   </p:sldIdLst>
   <p:sldSz cx="12192000" cy="6858000"/>
   <p:notesSz cx="6858000" cy="9144000"/>
@@ -496,7 +500,7 @@
           <a:p>
             <a:fld id="{D6D111B7-D0BA-4F94-AA57-BC0CCBE54C47}" type="datetimeFigureOut">
               <a:rPr lang="en-US" smtClean="0"/>
-              <a:t>7/7/2026</a:t>
+              <a:t>7/8/2026</a:t>
             </a:fld>
             <a:endParaRPr lang="en-US"/>
           </a:p>
@@ -820,7 +824,7 @@
           <a:p>
             <a:fld id="{D6D111B7-D0BA-4F94-AA57-BC0CCBE54C47}" type="datetimeFigureOut">
               <a:rPr lang="en-US" smtClean="0"/>
-              <a:t>7/7/2026</a:t>
+              <a:t>7/8/2026</a:t>
             </a:fld>
             <a:endParaRPr lang="en-US"/>
           </a:p>
@@ -1068,7 +1072,7 @@
           <a:p>
             <a:fld id="{D6D111B7-D0BA-4F94-AA57-BC0CCBE54C47}" type="datetimeFigureOut">
               <a:rPr lang="en-US" smtClean="0"/>
-              <a:t>7/7/2026</a:t>
+              <a:t>7/8/2026</a:t>
             </a:fld>
             <a:endParaRPr lang="en-US"/>
           </a:p>
@@ -1407,7 +1411,7 @@
           <a:p>
             <a:fld id="{D6D111B7-D0BA-4F94-AA57-BC0CCBE54C47}" type="datetimeFigureOut">
               <a:rPr lang="en-US" smtClean="0"/>
-              <a:t>7/7/2026</a:t>
+              <a:t>7/8/2026</a:t>
             </a:fld>
             <a:endParaRPr lang="en-US"/>
           </a:p>
@@ -1754,7 +1758,7 @@
           <a:p>
             <a:fld id="{D6D111B7-D0BA-4F94-AA57-BC0CCBE54C47}" type="datetimeFigureOut">
               <a:rPr lang="en-US" smtClean="0"/>
-              <a:t>7/7/2026</a:t>
+              <a:t>7/8/2026</a:t>
             </a:fld>
             <a:endParaRPr lang="en-US"/>
           </a:p>
@@ -2128,7 +2132,7 @@
           <a:p>
             <a:fld id="{D6D111B7-D0BA-4F94-AA57-BC0CCBE54C47}" type="datetimeFigureOut">
               <a:rPr lang="en-US" smtClean="0"/>
-              <a:t>7/7/2026</a:t>
+              <a:t>7/8/2026</a:t>
             </a:fld>
             <a:endParaRPr lang="en-US"/>
           </a:p>
@@ -2598,7 +2602,7 @@
           <a:p>
             <a:fld id="{D6D111B7-D0BA-4F94-AA57-BC0CCBE54C47}" type="datetimeFigureOut">
               <a:rPr lang="en-US" smtClean="0"/>
-              <a:t>7/7/2026</a:t>
+              <a:t>7/8/2026</a:t>
             </a:fld>
             <a:endParaRPr lang="en-US"/>
           </a:p>
@@ -2803,7 +2807,7 @@
           <a:p>
             <a:fld id="{D6D111B7-D0BA-4F94-AA57-BC0CCBE54C47}" type="datetimeFigureOut">
               <a:rPr lang="en-US" smtClean="0"/>
-              <a:t>7/7/2026</a:t>
+              <a:t>7/8/2026</a:t>
             </a:fld>
             <a:endParaRPr lang="en-US"/>
           </a:p>
@@ -3014,7 +3018,7 @@
           <a:p>
             <a:fld id="{D6D111B7-D0BA-4F94-AA57-BC0CCBE54C47}" type="datetimeFigureOut">
               <a:rPr lang="en-US" smtClean="0"/>
-              <a:t>7/7/2026</a:t>
+              <a:t>7/8/2026</a:t>
             </a:fld>
             <a:endParaRPr lang="en-US"/>
           </a:p>
@@ -3246,7 +3250,7 @@
           <a:p>
             <a:fld id="{D6D111B7-D0BA-4F94-AA57-BC0CCBE54C47}" type="datetimeFigureOut">
               <a:rPr lang="en-US" smtClean="0"/>
-              <a:t>7/7/2026</a:t>
+              <a:t>7/8/2026</a:t>
             </a:fld>
             <a:endParaRPr lang="en-US"/>
           </a:p>
@@ -3494,7 +3498,7 @@
           <a:p>
             <a:fld id="{D6D111B7-D0BA-4F94-AA57-BC0CCBE54C47}" type="datetimeFigureOut">
               <a:rPr lang="en-US" smtClean="0"/>
-              <a:t>7/7/2026</a:t>
+              <a:t>7/8/2026</a:t>
             </a:fld>
             <a:endParaRPr lang="en-US"/>
           </a:p>
@@ -3792,7 +3796,7 @@
           <a:p>
             <a:fld id="{D6D111B7-D0BA-4F94-AA57-BC0CCBE54C47}" type="datetimeFigureOut">
               <a:rPr lang="en-US" smtClean="0"/>
-              <a:t>7/7/2026</a:t>
+              <a:t>7/8/2026</a:t>
             </a:fld>
             <a:endParaRPr lang="en-US"/>
           </a:p>
@@ -4186,7 +4190,7 @@
           <a:p>
             <a:fld id="{D6D111B7-D0BA-4F94-AA57-BC0CCBE54C47}" type="datetimeFigureOut">
               <a:rPr lang="en-US" smtClean="0"/>
-              <a:t>7/7/2026</a:t>
+              <a:t>7/8/2026</a:t>
             </a:fld>
             <a:endParaRPr lang="en-US"/>
           </a:p>
@@ -4335,7 +4339,7 @@
           <a:p>
             <a:fld id="{D6D111B7-D0BA-4F94-AA57-BC0CCBE54C47}" type="datetimeFigureOut">
               <a:rPr lang="en-US" smtClean="0"/>
-              <a:t>7/7/2026</a:t>
+              <a:t>7/8/2026</a:t>
             </a:fld>
             <a:endParaRPr lang="en-US"/>
           </a:p>
@@ -4461,7 +4465,7 @@
           <a:p>
             <a:fld id="{D6D111B7-D0BA-4F94-AA57-BC0CCBE54C47}" type="datetimeFigureOut">
               <a:rPr lang="en-US" smtClean="0"/>
-              <a:t>7/7/2026</a:t>
+              <a:t>7/8/2026</a:t>
             </a:fld>
             <a:endParaRPr lang="en-US"/>
           </a:p>
@@ -4716,7 +4720,7 @@
           <a:p>
             <a:fld id="{D6D111B7-D0BA-4F94-AA57-BC0CCBE54C47}" type="datetimeFigureOut">
               <a:rPr lang="en-US" smtClean="0"/>
-              <a:t>7/7/2026</a:t>
+              <a:t>7/8/2026</a:t>
             </a:fld>
             <a:endParaRPr lang="en-US"/>
           </a:p>
@@ -5031,7 +5035,7 @@
           <a:p>
             <a:fld id="{D6D111B7-D0BA-4F94-AA57-BC0CCBE54C47}" type="datetimeFigureOut">
               <a:rPr lang="en-US" smtClean="0"/>
-              <a:t>7/7/2026</a:t>
+              <a:t>7/8/2026</a:t>
             </a:fld>
             <a:endParaRPr lang="en-US"/>
           </a:p>
@@ -5388,7 +5392,7 @@
           <a:p>
             <a:fld id="{D6D111B7-D0BA-4F94-AA57-BC0CCBE54C47}" type="datetimeFigureOut">
               <a:rPr lang="en-US" smtClean="0"/>
-              <a:t>7/7/2026</a:t>
+              <a:t>7/8/2026</a:t>
             </a:fld>
             <a:endParaRPr lang="en-US"/>
           </a:p>
@@ -6069,6 +6073,399 @@
           <p:cNvPr id="2" name="Title 1">
             <a:extLst>
               <a:ext uri="{FF2B5EF4-FFF2-40B4-BE49-F238E27FC236}">
+                <a16:creationId xmlns:a16="http://schemas.microsoft.com/office/drawing/2014/main" id="{EC13A5F1-E263-CD97-29A2-94365AC3CC59}"/>
+              </a:ext>
+            </a:extLst>
+          </p:cNvPr>
+          <p:cNvSpPr>
+            <a:spLocks noGrp="1"/>
+          </p:cNvSpPr>
+          <p:nvPr>
+            <p:ph type="title"/>
+          </p:nvPr>
+        </p:nvSpPr>
+        <p:spPr/>
+        <p:txBody>
+          <a:bodyPr/>
+          <a:lstStyle/>
+          <a:p>
+            <a:r>
+              <a:rPr lang="en-US" dirty="0">
+                <a:latin typeface="Times New Roman" panose="02020603050405020304" pitchFamily="18" charset="0"/>
+                <a:cs typeface="Times New Roman" panose="02020603050405020304" pitchFamily="18" charset="0"/>
+              </a:rPr>
+              <a:t>Dataset</a:t>
+            </a:r>
+          </a:p>
+        </p:txBody>
+      </p:sp>
+      <p:pic>
+        <p:nvPicPr>
+          <p:cNvPr id="5" name="Content Placeholder 4">
+            <a:extLst>
+              <a:ext uri="{FF2B5EF4-FFF2-40B4-BE49-F238E27FC236}">
+                <a16:creationId xmlns:a16="http://schemas.microsoft.com/office/drawing/2014/main" id="{71FCE656-2D79-2ECE-D162-E1CA1B914E68}"/>
+              </a:ext>
+            </a:extLst>
+          </p:cNvPr>
+          <p:cNvPicPr>
+            <a:picLocks noGrp="1" noChangeAspect="1"/>
+          </p:cNvPicPr>
+          <p:nvPr>
+            <p:ph idx="1"/>
+          </p:nvPr>
+        </p:nvPicPr>
+        <p:blipFill>
+          <a:blip r:embed="rId2">
+            <a:extLst>
+              <a:ext uri="{28A0092B-C50C-407E-A947-70E740481C1C}">
+                <a14:useLocalDpi xmlns:a14="http://schemas.microsoft.com/office/drawing/2010/main" val="0"/>
+              </a:ext>
+            </a:extLst>
+          </a:blip>
+          <a:stretch>
+            <a:fillRect/>
+          </a:stretch>
+        </p:blipFill>
+        <p:spPr>
+          <a:xfrm>
+            <a:off x="1432751" y="2557463"/>
+            <a:ext cx="9326498" cy="3317875"/>
+          </a:xfrm>
+          <a:prstGeom prst="rect">
+            <a:avLst/>
+          </a:prstGeom>
+        </p:spPr>
+      </p:pic>
+    </p:spTree>
+    <p:extLst>
+      <p:ext uri="{BB962C8B-B14F-4D97-AF65-F5344CB8AC3E}">
+        <p14:creationId xmlns:p14="http://schemas.microsoft.com/office/powerpoint/2010/main" val="1503541351"/>
+      </p:ext>
+    </p:extLst>
+  </p:cSld>
+  <p:clrMapOvr>
+    <a:masterClrMapping/>
+  </p:clrMapOvr>
+</p:sld>
+</file>
+
+<file path=ppt/slides/slide11.xml><?xml version="1.0" encoding="utf-8"?>
+<p:sld xmlns:a="http://schemas.openxmlformats.org/drawingml/2006/main" xmlns:r="http://schemas.openxmlformats.org/officeDocument/2006/relationships" xmlns:p="http://schemas.openxmlformats.org/presentationml/2006/main">
+  <p:cSld>
+    <p:spTree>
+      <p:nvGrpSpPr>
+        <p:cNvPr id="1" name=""/>
+        <p:cNvGrpSpPr/>
+        <p:nvPr/>
+      </p:nvGrpSpPr>
+      <p:grpSpPr>
+        <a:xfrm>
+          <a:off x="0" y="0"/>
+          <a:ext cx="0" cy="0"/>
+          <a:chOff x="0" y="0"/>
+          <a:chExt cx="0" cy="0"/>
+        </a:xfrm>
+      </p:grpSpPr>
+      <p:sp>
+        <p:nvSpPr>
+          <p:cNvPr id="2" name="Title 1">
+            <a:extLst>
+              <a:ext uri="{FF2B5EF4-FFF2-40B4-BE49-F238E27FC236}">
+                <a16:creationId xmlns:a16="http://schemas.microsoft.com/office/drawing/2014/main" id="{41C80367-10E7-E58E-18AC-3BFAE43797FA}"/>
+              </a:ext>
+            </a:extLst>
+          </p:cNvPr>
+          <p:cNvSpPr>
+            <a:spLocks noGrp="1"/>
+          </p:cNvSpPr>
+          <p:nvPr>
+            <p:ph type="title"/>
+          </p:nvPr>
+        </p:nvSpPr>
+        <p:spPr/>
+        <p:txBody>
+          <a:bodyPr>
+            <a:normAutofit/>
+          </a:bodyPr>
+          <a:lstStyle/>
+          <a:p>
+            <a:r>
+              <a:rPr lang="en-US" dirty="0">
+                <a:latin typeface="Times New Roman" panose="02020603050405020304" pitchFamily="18" charset="0"/>
+                <a:cs typeface="Times New Roman" panose="02020603050405020304" pitchFamily="18" charset="0"/>
+              </a:rPr>
+              <a:t>Tools Used</a:t>
+            </a:r>
+          </a:p>
+        </p:txBody>
+      </p:sp>
+      <p:sp>
+        <p:nvSpPr>
+          <p:cNvPr id="3" name="Content Placeholder 2">
+            <a:extLst>
+              <a:ext uri="{FF2B5EF4-FFF2-40B4-BE49-F238E27FC236}">
+                <a16:creationId xmlns:a16="http://schemas.microsoft.com/office/drawing/2014/main" id="{405947B7-28ED-0D57-907A-F1146D8C6660}"/>
+              </a:ext>
+            </a:extLst>
+          </p:cNvPr>
+          <p:cNvSpPr>
+            <a:spLocks noGrp="1"/>
+          </p:cNvSpPr>
+          <p:nvPr>
+            <p:ph idx="1"/>
+          </p:nvPr>
+        </p:nvSpPr>
+        <p:spPr/>
+        <p:txBody>
+          <a:bodyPr>
+            <a:normAutofit/>
+          </a:bodyPr>
+          <a:lstStyle/>
+          <a:p>
+            <a:r>
+              <a:rPr lang="en-US" dirty="0">
+                <a:latin typeface="Times New Roman" panose="02020603050405020304" pitchFamily="18" charset="0"/>
+                <a:cs typeface="Times New Roman" panose="02020603050405020304" pitchFamily="18" charset="0"/>
+              </a:rPr>
+              <a:t>Python </a:t>
+            </a:r>
+          </a:p>
+          <a:p>
+            <a:r>
+              <a:rPr lang="en-US" dirty="0">
+                <a:latin typeface="Times New Roman" panose="02020603050405020304" pitchFamily="18" charset="0"/>
+                <a:cs typeface="Times New Roman" panose="02020603050405020304" pitchFamily="18" charset="0"/>
+              </a:rPr>
+              <a:t>Pandas </a:t>
+            </a:r>
+          </a:p>
+          <a:p>
+            <a:r>
+              <a:rPr lang="en-US" dirty="0">
+                <a:latin typeface="Times New Roman" panose="02020603050405020304" pitchFamily="18" charset="0"/>
+                <a:cs typeface="Times New Roman" panose="02020603050405020304" pitchFamily="18" charset="0"/>
+              </a:rPr>
+              <a:t>NumPy </a:t>
+            </a:r>
+          </a:p>
+          <a:p>
+            <a:r>
+              <a:rPr lang="en-US" dirty="0">
+                <a:latin typeface="Times New Roman" panose="02020603050405020304" pitchFamily="18" charset="0"/>
+                <a:cs typeface="Times New Roman" panose="02020603050405020304" pitchFamily="18" charset="0"/>
+              </a:rPr>
+              <a:t>Matplotlib </a:t>
+            </a:r>
+          </a:p>
+          <a:p>
+            <a:r>
+              <a:rPr lang="en-US" dirty="0">
+                <a:latin typeface="Times New Roman" panose="02020603050405020304" pitchFamily="18" charset="0"/>
+                <a:cs typeface="Times New Roman" panose="02020603050405020304" pitchFamily="18" charset="0"/>
+              </a:rPr>
+              <a:t>Seaborn </a:t>
+            </a:r>
+          </a:p>
+          <a:p>
+            <a:r>
+              <a:rPr lang="en-US" dirty="0">
+                <a:latin typeface="Times New Roman" panose="02020603050405020304" pitchFamily="18" charset="0"/>
+                <a:cs typeface="Times New Roman" panose="02020603050405020304" pitchFamily="18" charset="0"/>
+              </a:rPr>
+              <a:t>Jupyter Notebook</a:t>
+            </a:r>
+          </a:p>
+          <a:p>
+            <a:endParaRPr lang="en-US" dirty="0">
+              <a:latin typeface="Times New Roman" panose="02020603050405020304" pitchFamily="18" charset="0"/>
+              <a:cs typeface="Times New Roman" panose="02020603050405020304" pitchFamily="18" charset="0"/>
+            </a:endParaRPr>
+          </a:p>
+        </p:txBody>
+      </p:sp>
+    </p:spTree>
+    <p:extLst>
+      <p:ext uri="{BB962C8B-B14F-4D97-AF65-F5344CB8AC3E}">
+        <p14:creationId xmlns:p14="http://schemas.microsoft.com/office/powerpoint/2010/main" val="2376516149"/>
+      </p:ext>
+    </p:extLst>
+  </p:cSld>
+  <p:clrMapOvr>
+    <a:masterClrMapping/>
+  </p:clrMapOvr>
+</p:sld>
+</file>
+
+<file path=ppt/slides/slide12.xml><?xml version="1.0" encoding="utf-8"?>
+<p:sld xmlns:a="http://schemas.openxmlformats.org/drawingml/2006/main" xmlns:r="http://schemas.openxmlformats.org/officeDocument/2006/relationships" xmlns:p="http://schemas.openxmlformats.org/presentationml/2006/main">
+  <p:cSld>
+    <p:spTree>
+      <p:nvGrpSpPr>
+        <p:cNvPr id="1" name=""/>
+        <p:cNvGrpSpPr/>
+        <p:nvPr/>
+      </p:nvGrpSpPr>
+      <p:grpSpPr>
+        <a:xfrm>
+          <a:off x="0" y="0"/>
+          <a:ext cx="0" cy="0"/>
+          <a:chOff x="0" y="0"/>
+          <a:chExt cx="0" cy="0"/>
+        </a:xfrm>
+      </p:grpSpPr>
+      <p:sp>
+        <p:nvSpPr>
+          <p:cNvPr id="2" name="Title 1">
+            <a:extLst>
+              <a:ext uri="{FF2B5EF4-FFF2-40B4-BE49-F238E27FC236}">
+                <a16:creationId xmlns:a16="http://schemas.microsoft.com/office/drawing/2014/main" id="{0B02C1EB-940C-65EF-5E77-23FE615D3310}"/>
+              </a:ext>
+            </a:extLst>
+          </p:cNvPr>
+          <p:cNvSpPr>
+            <a:spLocks noGrp="1"/>
+          </p:cNvSpPr>
+          <p:nvPr>
+            <p:ph type="title"/>
+          </p:nvPr>
+        </p:nvSpPr>
+        <p:spPr/>
+        <p:txBody>
+          <a:bodyPr>
+            <a:normAutofit/>
+          </a:bodyPr>
+          <a:lstStyle/>
+          <a:p>
+            <a:r>
+              <a:rPr lang="en-US" dirty="0">
+                <a:latin typeface="Times New Roman" panose="02020603050405020304" pitchFamily="18" charset="0"/>
+                <a:cs typeface="Times New Roman" panose="02020603050405020304" pitchFamily="18" charset="0"/>
+              </a:rPr>
+              <a:t>Methodology</a:t>
+            </a:r>
+          </a:p>
+        </p:txBody>
+      </p:sp>
+      <p:sp>
+        <p:nvSpPr>
+          <p:cNvPr id="3" name="Content Placeholder 2">
+            <a:extLst>
+              <a:ext uri="{FF2B5EF4-FFF2-40B4-BE49-F238E27FC236}">
+                <a16:creationId xmlns:a16="http://schemas.microsoft.com/office/drawing/2014/main" id="{09954CD0-D925-5001-056C-B9F60FFD3677}"/>
+              </a:ext>
+            </a:extLst>
+          </p:cNvPr>
+          <p:cNvSpPr>
+            <a:spLocks noGrp="1"/>
+          </p:cNvSpPr>
+          <p:nvPr>
+            <p:ph idx="1"/>
+          </p:nvPr>
+        </p:nvSpPr>
+        <p:spPr/>
+        <p:txBody>
+          <a:bodyPr>
+            <a:normAutofit/>
+          </a:bodyPr>
+          <a:lstStyle/>
+          <a:p>
+            <a:r>
+              <a:rPr lang="en-US" dirty="0">
+                <a:latin typeface="Times New Roman" panose="02020603050405020304" pitchFamily="18" charset="0"/>
+                <a:cs typeface="Times New Roman" panose="02020603050405020304" pitchFamily="18" charset="0"/>
+              </a:rPr>
+              <a:t>Data Collection</a:t>
+            </a:r>
+          </a:p>
+          <a:p>
+            <a:r>
+              <a:rPr lang="en-US" dirty="0">
+                <a:latin typeface="Times New Roman" panose="02020603050405020304" pitchFamily="18" charset="0"/>
+                <a:cs typeface="Times New Roman" panose="02020603050405020304" pitchFamily="18" charset="0"/>
+              </a:rPr>
+              <a:t>Data Cleaning</a:t>
+            </a:r>
+          </a:p>
+          <a:p>
+            <a:r>
+              <a:rPr lang="en-US" dirty="0">
+                <a:latin typeface="Times New Roman" panose="02020603050405020304" pitchFamily="18" charset="0"/>
+                <a:cs typeface="Times New Roman" panose="02020603050405020304" pitchFamily="18" charset="0"/>
+              </a:rPr>
+              <a:t>Feature Engineering</a:t>
+            </a:r>
+          </a:p>
+          <a:p>
+            <a:r>
+              <a:rPr lang="en-US" dirty="0">
+                <a:latin typeface="Times New Roman" panose="02020603050405020304" pitchFamily="18" charset="0"/>
+                <a:cs typeface="Times New Roman" panose="02020603050405020304" pitchFamily="18" charset="0"/>
+              </a:rPr>
+              <a:t>Exploratory Data Analysis</a:t>
+            </a:r>
+          </a:p>
+          <a:p>
+            <a:r>
+              <a:rPr lang="en-US" dirty="0">
+                <a:latin typeface="Times New Roman" panose="02020603050405020304" pitchFamily="18" charset="0"/>
+                <a:cs typeface="Times New Roman" panose="02020603050405020304" pitchFamily="18" charset="0"/>
+              </a:rPr>
+              <a:t>Visualization</a:t>
+            </a:r>
+          </a:p>
+          <a:p>
+            <a:r>
+              <a:rPr lang="en-US" dirty="0">
+                <a:latin typeface="Times New Roman" panose="02020603050405020304" pitchFamily="18" charset="0"/>
+                <a:cs typeface="Times New Roman" panose="02020603050405020304" pitchFamily="18" charset="0"/>
+              </a:rPr>
+              <a:t>Interpretation</a:t>
+            </a:r>
+          </a:p>
+          <a:p>
+            <a:endParaRPr lang="en-US" dirty="0">
+              <a:latin typeface="Times New Roman" panose="02020603050405020304" pitchFamily="18" charset="0"/>
+              <a:cs typeface="Times New Roman" panose="02020603050405020304" pitchFamily="18" charset="0"/>
+            </a:endParaRPr>
+          </a:p>
+        </p:txBody>
+      </p:sp>
+    </p:spTree>
+    <p:extLst>
+      <p:ext uri="{BB962C8B-B14F-4D97-AF65-F5344CB8AC3E}">
+        <p14:creationId xmlns:p14="http://schemas.microsoft.com/office/powerpoint/2010/main" val="3567523146"/>
+      </p:ext>
+    </p:extLst>
+  </p:cSld>
+  <p:clrMapOvr>
+    <a:masterClrMapping/>
+  </p:clrMapOvr>
+</p:sld>
+</file>
+
+<file path=ppt/slides/slide13.xml><?xml version="1.0" encoding="utf-8"?>
+<p:sld xmlns:a="http://schemas.openxmlformats.org/drawingml/2006/main" xmlns:r="http://schemas.openxmlformats.org/officeDocument/2006/relationships" xmlns:p="http://schemas.openxmlformats.org/presentationml/2006/main">
+  <p:cSld>
+    <p:spTree>
+      <p:nvGrpSpPr>
+        <p:cNvPr id="1" name=""/>
+        <p:cNvGrpSpPr/>
+        <p:nvPr/>
+      </p:nvGrpSpPr>
+      <p:grpSpPr>
+        <a:xfrm>
+          <a:off x="0" y="0"/>
+          <a:ext cx="0" cy="0"/>
+          <a:chOff x="0" y="0"/>
+          <a:chExt cx="0" cy="0"/>
+        </a:xfrm>
+      </p:grpSpPr>
+      <p:sp>
+        <p:nvSpPr>
+          <p:cNvPr id="2" name="Title 1">
+            <a:extLst>
+              <a:ext uri="{FF2B5EF4-FFF2-40B4-BE49-F238E27FC236}">
                 <a16:creationId xmlns:a16="http://schemas.microsoft.com/office/drawing/2014/main" id="{69EB265B-0562-CE4B-B19B-8479CD0B2F1F}"/>
               </a:ext>
             </a:extLst>
@@ -6233,7 +6630,7 @@
 </p:sld>
 </file>
 
-<file path=ppt/slides/slide11.xml><?xml version="1.0" encoding="utf-8"?>
+<file path=ppt/slides/slide14.xml><?xml version="1.0" encoding="utf-8"?>
 <p:sld xmlns:a="http://schemas.openxmlformats.org/drawingml/2006/main" xmlns:r="http://schemas.openxmlformats.org/officeDocument/2006/relationships" xmlns:p="http://schemas.openxmlformats.org/presentationml/2006/main">
   <p:cSld>
     <p:spTree>
@@ -6301,7 +6698,7 @@
 </p:sld>
 </file>
 
-<file path=ppt/slides/slide12.xml><?xml version="1.0" encoding="utf-8"?>
+<file path=ppt/slides/slide15.xml><?xml version="1.0" encoding="utf-8"?>
 <p:sld xmlns:a="http://schemas.openxmlformats.org/drawingml/2006/main" xmlns:r="http://schemas.openxmlformats.org/officeDocument/2006/relationships" xmlns:p="http://schemas.openxmlformats.org/presentationml/2006/main">
   <p:cSld>
     <p:spTree>
@@ -6369,7 +6766,7 @@
 </p:sld>
 </file>
 
-<file path=ppt/slides/slide13.xml><?xml version="1.0" encoding="utf-8"?>
+<file path=ppt/slides/slide16.xml><?xml version="1.0" encoding="utf-8"?>
 <p:sld xmlns:a="http://schemas.openxmlformats.org/drawingml/2006/main" xmlns:r="http://schemas.openxmlformats.org/officeDocument/2006/relationships" xmlns:p="http://schemas.openxmlformats.org/presentationml/2006/main">
   <p:cSld>
     <p:spTree>
@@ -6514,7 +6911,7 @@
 </p:sld>
 </file>
 
-<file path=ppt/slides/slide14.xml><?xml version="1.0" encoding="utf-8"?>
+<file path=ppt/slides/slide17.xml><?xml version="1.0" encoding="utf-8"?>
 <p:sld xmlns:a="http://schemas.openxmlformats.org/drawingml/2006/main" xmlns:r="http://schemas.openxmlformats.org/officeDocument/2006/relationships" xmlns:p="http://schemas.openxmlformats.org/presentationml/2006/main">
   <p:cSld>
     <p:spTree>
@@ -6582,7 +6979,7 @@
 </p:sld>
 </file>
 
-<file path=ppt/slides/slide15.xml><?xml version="1.0" encoding="utf-8"?>
+<file path=ppt/slides/slide18.xml><?xml version="1.0" encoding="utf-8"?>
 <p:sld xmlns:a="http://schemas.openxmlformats.org/drawingml/2006/main" xmlns:r="http://schemas.openxmlformats.org/officeDocument/2006/relationships" xmlns:p="http://schemas.openxmlformats.org/presentationml/2006/main">
   <p:cSld>
     <p:spTree>
@@ -6754,7 +7151,7 @@
 </p:sld>
 </file>
 
-<file path=ppt/slides/slide16.xml><?xml version="1.0" encoding="utf-8"?>
+<file path=ppt/slides/slide19.xml><?xml version="1.0" encoding="utf-8"?>
 <p:sld xmlns:a="http://schemas.openxmlformats.org/drawingml/2006/main" xmlns:r="http://schemas.openxmlformats.org/officeDocument/2006/relationships" xmlns:p="http://schemas.openxmlformats.org/presentationml/2006/main">
   <p:cSld>
     <p:spTree>
@@ -6816,7 +7213,7 @@
 </p:sld>
 </file>
 
-<file path=ppt/slides/slide17.xml><?xml version="1.0" encoding="utf-8"?>
+<file path=ppt/slides/slide2.xml><?xml version="1.0" encoding="utf-8"?>
 <p:sld xmlns:a="http://schemas.openxmlformats.org/drawingml/2006/main" xmlns:r="http://schemas.openxmlformats.org/officeDocument/2006/relationships" xmlns:p="http://schemas.openxmlformats.org/presentationml/2006/main">
   <p:cSld>
     <p:spTree>
@@ -6838,6 +7235,142 @@
           <p:cNvPr id="2" name="Title 1">
             <a:extLst>
               <a:ext uri="{FF2B5EF4-FFF2-40B4-BE49-F238E27FC236}">
+                <a16:creationId xmlns:a16="http://schemas.microsoft.com/office/drawing/2014/main" id="{640BCE4E-634A-16C3-C68A-DBBC7245538F}"/>
+              </a:ext>
+            </a:extLst>
+          </p:cNvPr>
+          <p:cNvSpPr>
+            <a:spLocks noGrp="1"/>
+          </p:cNvSpPr>
+          <p:nvPr>
+            <p:ph type="title"/>
+          </p:nvPr>
+        </p:nvSpPr>
+        <p:spPr/>
+        <p:txBody>
+          <a:bodyPr/>
+          <a:lstStyle/>
+          <a:p>
+            <a:r>
+              <a:rPr lang="en-US" dirty="0">
+                <a:latin typeface="Times New Roman" panose="02020603050405020304" pitchFamily="18" charset="0"/>
+                <a:cs typeface="Times New Roman" panose="02020603050405020304" pitchFamily="18" charset="0"/>
+              </a:rPr>
+              <a:t>Table of Contents</a:t>
+            </a:r>
+          </a:p>
+        </p:txBody>
+      </p:sp>
+      <p:sp>
+        <p:nvSpPr>
+          <p:cNvPr id="3" name="Content Placeholder 2">
+            <a:extLst>
+              <a:ext uri="{FF2B5EF4-FFF2-40B4-BE49-F238E27FC236}">
+                <a16:creationId xmlns:a16="http://schemas.microsoft.com/office/drawing/2014/main" id="{E3176E9B-DEC5-44D0-B516-31D6291E04A4}"/>
+              </a:ext>
+            </a:extLst>
+          </p:cNvPr>
+          <p:cNvSpPr>
+            <a:spLocks noGrp="1"/>
+          </p:cNvSpPr>
+          <p:nvPr>
+            <p:ph idx="1"/>
+          </p:nvPr>
+        </p:nvSpPr>
+        <p:spPr/>
+        <p:txBody>
+          <a:bodyPr>
+            <a:normAutofit/>
+          </a:bodyPr>
+          <a:lstStyle/>
+          <a:p>
+            <a:r>
+              <a:rPr lang="en-US" dirty="0">
+                <a:latin typeface="Times New Roman" panose="02020603050405020304" pitchFamily="18" charset="0"/>
+                <a:cs typeface="Times New Roman" panose="02020603050405020304" pitchFamily="18" charset="0"/>
+              </a:rPr>
+              <a:t>Abstract</a:t>
+            </a:r>
+          </a:p>
+          <a:p>
+            <a:r>
+              <a:rPr lang="en-US" dirty="0">
+                <a:latin typeface="Times New Roman" panose="02020603050405020304" pitchFamily="18" charset="0"/>
+                <a:cs typeface="Times New Roman" panose="02020603050405020304" pitchFamily="18" charset="0"/>
+              </a:rPr>
+              <a:t>Introduction</a:t>
+            </a:r>
+          </a:p>
+          <a:p>
+            <a:r>
+              <a:rPr lang="en-US" dirty="0">
+                <a:latin typeface="Times New Roman" panose="02020603050405020304" pitchFamily="18" charset="0"/>
+                <a:cs typeface="Times New Roman" panose="02020603050405020304" pitchFamily="18" charset="0"/>
+              </a:rPr>
+              <a:t>Aim and Objectives</a:t>
+            </a:r>
+          </a:p>
+          <a:p>
+            <a:r>
+              <a:rPr lang="en-US" dirty="0">
+                <a:latin typeface="Times New Roman" panose="02020603050405020304" pitchFamily="18" charset="0"/>
+                <a:cs typeface="Times New Roman" panose="02020603050405020304" pitchFamily="18" charset="0"/>
+              </a:rPr>
+              <a:t>Literature Review</a:t>
+            </a:r>
+          </a:p>
+          <a:p>
+            <a:r>
+              <a:rPr lang="en-US" dirty="0">
+                <a:latin typeface="Times New Roman" panose="02020603050405020304" pitchFamily="18" charset="0"/>
+                <a:cs typeface="Times New Roman" panose="02020603050405020304" pitchFamily="18" charset="0"/>
+              </a:rPr>
+              <a:t>Methodology</a:t>
+            </a:r>
+          </a:p>
+          <a:p>
+            <a:endParaRPr lang="en-US" dirty="0">
+              <a:latin typeface="Times New Roman" panose="02020603050405020304" pitchFamily="18" charset="0"/>
+              <a:cs typeface="Times New Roman" panose="02020603050405020304" pitchFamily="18" charset="0"/>
+            </a:endParaRPr>
+          </a:p>
+        </p:txBody>
+      </p:sp>
+    </p:spTree>
+    <p:extLst>
+      <p:ext uri="{BB962C8B-B14F-4D97-AF65-F5344CB8AC3E}">
+        <p14:creationId xmlns:p14="http://schemas.microsoft.com/office/powerpoint/2010/main" val="4139863494"/>
+      </p:ext>
+    </p:extLst>
+  </p:cSld>
+  <p:clrMapOvr>
+    <a:masterClrMapping/>
+  </p:clrMapOvr>
+</p:sld>
+</file>
+
+<file path=ppt/slides/slide20.xml><?xml version="1.0" encoding="utf-8"?>
+<p:sld xmlns:a="http://schemas.openxmlformats.org/drawingml/2006/main" xmlns:r="http://schemas.openxmlformats.org/officeDocument/2006/relationships" xmlns:p="http://schemas.openxmlformats.org/presentationml/2006/main">
+  <p:cSld>
+    <p:spTree>
+      <p:nvGrpSpPr>
+        <p:cNvPr id="1" name=""/>
+        <p:cNvGrpSpPr/>
+        <p:nvPr/>
+      </p:nvGrpSpPr>
+      <p:grpSpPr>
+        <a:xfrm>
+          <a:off x="0" y="0"/>
+          <a:ext cx="0" cy="0"/>
+          <a:chOff x="0" y="0"/>
+          <a:chExt cx="0" cy="0"/>
+        </a:xfrm>
+      </p:grpSpPr>
+      <p:sp>
+        <p:nvSpPr>
+          <p:cNvPr id="2" name="Title 1">
+            <a:extLst>
+              <a:ext uri="{FF2B5EF4-FFF2-40B4-BE49-F238E27FC236}">
                 <a16:creationId xmlns:a16="http://schemas.microsoft.com/office/drawing/2014/main" id="{1FCB0A81-BE20-5761-153C-2F75C23F3C52}"/>
               </a:ext>
             </a:extLst>
@@ -6979,7 +7512,7 @@
 </p:sld>
 </file>
 
-<file path=ppt/slides/slide18.xml><?xml version="1.0" encoding="utf-8"?>
+<file path=ppt/slides/slide21.xml><?xml version="1.0" encoding="utf-8"?>
 <p:sld xmlns:a="http://schemas.openxmlformats.org/drawingml/2006/main" xmlns:r="http://schemas.openxmlformats.org/officeDocument/2006/relationships" xmlns:p="http://schemas.openxmlformats.org/presentationml/2006/main">
   <p:cSld>
     <p:spTree>
@@ -7041,7 +7574,7 @@
 </p:sld>
 </file>
 
-<file path=ppt/slides/slide19.xml><?xml version="1.0" encoding="utf-8"?>
+<file path=ppt/slides/slide22.xml><?xml version="1.0" encoding="utf-8"?>
 <p:sld xmlns:a="http://schemas.openxmlformats.org/drawingml/2006/main" xmlns:r="http://schemas.openxmlformats.org/officeDocument/2006/relationships" xmlns:p="http://schemas.openxmlformats.org/presentationml/2006/main">
   <p:cSld>
     <p:spTree>
@@ -7136,7 +7669,7 @@
 </p:sld>
 </file>
 
-<file path=ppt/slides/slide2.xml><?xml version="1.0" encoding="utf-8"?>
+<file path=ppt/slides/slide23.xml><?xml version="1.0" encoding="utf-8"?>
 <p:sld xmlns:a="http://schemas.openxmlformats.org/drawingml/2006/main" xmlns:r="http://schemas.openxmlformats.org/officeDocument/2006/relationships" xmlns:p="http://schemas.openxmlformats.org/presentationml/2006/main">
   <p:cSld>
     <p:spTree>
@@ -7158,138 +7691,6 @@
           <p:cNvPr id="2" name="Title 1">
             <a:extLst>
               <a:ext uri="{FF2B5EF4-FFF2-40B4-BE49-F238E27FC236}">
-                <a16:creationId xmlns:a16="http://schemas.microsoft.com/office/drawing/2014/main" id="{4165CBEB-5938-09F2-BC03-94731ABDB3C4}"/>
-              </a:ext>
-            </a:extLst>
-          </p:cNvPr>
-          <p:cNvSpPr>
-            <a:spLocks noGrp="1"/>
-          </p:cNvSpPr>
-          <p:nvPr>
-            <p:ph type="title"/>
-          </p:nvPr>
-        </p:nvSpPr>
-        <p:spPr/>
-        <p:txBody>
-          <a:bodyPr>
-            <a:normAutofit/>
-          </a:bodyPr>
-          <a:lstStyle/>
-          <a:p>
-            <a:r>
-              <a:rPr lang="en-US" dirty="0">
-                <a:latin typeface="Times New Roman" panose="02020603050405020304" pitchFamily="18" charset="0"/>
-                <a:cs typeface="Times New Roman" panose="02020603050405020304" pitchFamily="18" charset="0"/>
-              </a:rPr>
-              <a:t>ABSTRACT</a:t>
-            </a:r>
-          </a:p>
-        </p:txBody>
-      </p:sp>
-      <p:sp>
-        <p:nvSpPr>
-          <p:cNvPr id="3" name="Content Placeholder 2">
-            <a:extLst>
-              <a:ext uri="{FF2B5EF4-FFF2-40B4-BE49-F238E27FC236}">
-                <a16:creationId xmlns:a16="http://schemas.microsoft.com/office/drawing/2014/main" id="{B0F10586-C0A8-73F2-85BE-E3B41147920A}"/>
-              </a:ext>
-            </a:extLst>
-          </p:cNvPr>
-          <p:cNvSpPr>
-            <a:spLocks noGrp="1"/>
-          </p:cNvSpPr>
-          <p:nvPr>
-            <p:ph idx="1"/>
-          </p:nvPr>
-        </p:nvSpPr>
-        <p:spPr/>
-        <p:txBody>
-          <a:bodyPr>
-            <a:noAutofit/>
-          </a:bodyPr>
-          <a:lstStyle/>
-          <a:p>
-            <a:r>
-              <a:rPr lang="en-US" sz="1950" dirty="0">
-                <a:latin typeface="Times New Roman" panose="02020603050405020304" pitchFamily="18" charset="0"/>
-                <a:cs typeface="Times New Roman" panose="02020603050405020304" pitchFamily="18" charset="0"/>
-              </a:rPr>
-              <a:t>This study explores the Danish housing market using Exploratory Data Analysis (EDA) techniques in Python. </a:t>
-            </a:r>
-          </a:p>
-          <a:p>
-            <a:r>
-              <a:rPr lang="en-US" sz="1950" dirty="0">
-                <a:latin typeface="Times New Roman" panose="02020603050405020304" pitchFamily="18" charset="0"/>
-                <a:cs typeface="Times New Roman" panose="02020603050405020304" pitchFamily="18" charset="0"/>
-              </a:rPr>
-              <a:t>The dataset was cleaned, transformed, and analyzed to identify patterns in housing prices across different regions, property types, property ages, and construction periods. </a:t>
-            </a:r>
-          </a:p>
-          <a:p>
-            <a:r>
-              <a:rPr lang="en-US" sz="1950" dirty="0">
-                <a:latin typeface="Times New Roman" panose="02020603050405020304" pitchFamily="18" charset="0"/>
-                <a:cs typeface="Times New Roman" panose="02020603050405020304" pitchFamily="18" charset="0"/>
-              </a:rPr>
-              <a:t>Various statistical summaries and visualizations including bar charts, box plots, histograms, line plots, pie charts, and heatmaps were used to answer fifteen research questions. </a:t>
-            </a:r>
-          </a:p>
-          <a:p>
-            <a:r>
-              <a:rPr lang="en-US" sz="1950" dirty="0">
-                <a:latin typeface="Times New Roman" panose="02020603050405020304" pitchFamily="18" charset="0"/>
-                <a:cs typeface="Times New Roman" panose="02020603050405020304" pitchFamily="18" charset="0"/>
-              </a:rPr>
-              <a:t>The findings show that housing prices are significantly influenced by location, property type, property size, age, and construction decade. </a:t>
-            </a:r>
-          </a:p>
-          <a:p>
-            <a:r>
-              <a:rPr lang="en-US" sz="1950" dirty="0">
-                <a:latin typeface="Times New Roman" panose="02020603050405020304" pitchFamily="18" charset="0"/>
-                <a:cs typeface="Times New Roman" panose="02020603050405020304" pitchFamily="18" charset="0"/>
-              </a:rPr>
-              <a:t>The study demonstrates how data analytics can provide valuable insights for buyers, sellers, investors, and policymakers.</a:t>
-            </a:r>
-          </a:p>
-        </p:txBody>
-      </p:sp>
-    </p:spTree>
-    <p:extLst>
-      <p:ext uri="{BB962C8B-B14F-4D97-AF65-F5344CB8AC3E}">
-        <p14:creationId xmlns:p14="http://schemas.microsoft.com/office/powerpoint/2010/main" val="4074782667"/>
-      </p:ext>
-    </p:extLst>
-  </p:cSld>
-  <p:clrMapOvr>
-    <a:masterClrMapping/>
-  </p:clrMapOvr>
-</p:sld>
-</file>
-
-<file path=ppt/slides/slide20.xml><?xml version="1.0" encoding="utf-8"?>
-<p:sld xmlns:a="http://schemas.openxmlformats.org/drawingml/2006/main" xmlns:r="http://schemas.openxmlformats.org/officeDocument/2006/relationships" xmlns:p="http://schemas.openxmlformats.org/presentationml/2006/main">
-  <p:cSld>
-    <p:spTree>
-      <p:nvGrpSpPr>
-        <p:cNvPr id="1" name=""/>
-        <p:cNvGrpSpPr/>
-        <p:nvPr/>
-      </p:nvGrpSpPr>
-      <p:grpSpPr>
-        <a:xfrm>
-          <a:off x="0" y="0"/>
-          <a:ext cx="0" cy="0"/>
-          <a:chOff x="0" y="0"/>
-          <a:chExt cx="0" cy="0"/>
-        </a:xfrm>
-      </p:grpSpPr>
-      <p:sp>
-        <p:nvSpPr>
-          <p:cNvPr id="2" name="Title 1">
-            <a:extLst>
-              <a:ext uri="{FF2B5EF4-FFF2-40B4-BE49-F238E27FC236}">
                 <a16:creationId xmlns:a16="http://schemas.microsoft.com/office/drawing/2014/main" id="{BF434D79-7605-B69D-EC97-1AA297A15B06}"/>
               </a:ext>
             </a:extLst>
@@ -7414,7 +7815,7 @@
 </p:sld>
 </file>
 
-<file path=ppt/slides/slide21.xml><?xml version="1.0" encoding="utf-8"?>
+<file path=ppt/slides/slide24.xml><?xml version="1.0" encoding="utf-8"?>
 <p:sld xmlns:a="http://schemas.openxmlformats.org/drawingml/2006/main" xmlns:r="http://schemas.openxmlformats.org/officeDocument/2006/relationships" xmlns:p="http://schemas.openxmlformats.org/presentationml/2006/main">
   <p:cSld>
     <p:spTree>
@@ -7507,7 +7908,7 @@
 </p:sld>
 </file>
 
-<file path=ppt/slides/slide22.xml><?xml version="1.0" encoding="utf-8"?>
+<file path=ppt/slides/slide25.xml><?xml version="1.0" encoding="utf-8"?>
 <p:sld xmlns:a="http://schemas.openxmlformats.org/drawingml/2006/main" xmlns:r="http://schemas.openxmlformats.org/officeDocument/2006/relationships" xmlns:p="http://schemas.openxmlformats.org/presentationml/2006/main">
   <p:cSld>
     <p:spTree>
@@ -7671,7 +8072,7 @@
 </p:sld>
 </file>
 
-<file path=ppt/slides/slide23.xml><?xml version="1.0" encoding="utf-8"?>
+<file path=ppt/slides/slide26.xml><?xml version="1.0" encoding="utf-8"?>
 <p:sld xmlns:a="http://schemas.openxmlformats.org/drawingml/2006/main" xmlns:r="http://schemas.openxmlformats.org/officeDocument/2006/relationships" xmlns:p="http://schemas.openxmlformats.org/presentationml/2006/main">
   <p:cSld>
     <p:spTree>
@@ -7764,7 +8165,7 @@
 </p:sld>
 </file>
 
-<file path=ppt/slides/slide24.xml><?xml version="1.0" encoding="utf-8"?>
+<file path=ppt/slides/slide27.xml><?xml version="1.0" encoding="utf-8"?>
 <p:sld xmlns:a="http://schemas.openxmlformats.org/drawingml/2006/main" xmlns:r="http://schemas.openxmlformats.org/officeDocument/2006/relationships" xmlns:p="http://schemas.openxmlformats.org/presentationml/2006/main">
   <p:cSld>
     <p:spTree>
@@ -7911,7 +8312,7 @@
 </p:sld>
 </file>
 
-<file path=ppt/slides/slide25.xml><?xml version="1.0" encoding="utf-8"?>
+<file path=ppt/slides/slide28.xml><?xml version="1.0" encoding="utf-8"?>
 <p:sld xmlns:a="http://schemas.openxmlformats.org/drawingml/2006/main" xmlns:r="http://schemas.openxmlformats.org/officeDocument/2006/relationships" xmlns:p="http://schemas.openxmlformats.org/presentationml/2006/main">
   <p:cSld>
     <p:spTree>
@@ -7973,7 +8374,7 @@
 </p:sld>
 </file>
 
-<file path=ppt/slides/slide26.xml><?xml version="1.0" encoding="utf-8"?>
+<file path=ppt/slides/slide29.xml><?xml version="1.0" encoding="utf-8"?>
 <p:sld xmlns:a="http://schemas.openxmlformats.org/drawingml/2006/main" xmlns:r="http://schemas.openxmlformats.org/officeDocument/2006/relationships" xmlns:p="http://schemas.openxmlformats.org/presentationml/2006/main">
   <p:cSld>
     <p:spTree>
@@ -8119,7 +8520,139 @@
 </p:sld>
 </file>
 
-<file path=ppt/slides/slide27.xml><?xml version="1.0" encoding="utf-8"?>
+<file path=ppt/slides/slide3.xml><?xml version="1.0" encoding="utf-8"?>
+<p:sld xmlns:a="http://schemas.openxmlformats.org/drawingml/2006/main" xmlns:r="http://schemas.openxmlformats.org/officeDocument/2006/relationships" xmlns:p="http://schemas.openxmlformats.org/presentationml/2006/main">
+  <p:cSld>
+    <p:spTree>
+      <p:nvGrpSpPr>
+        <p:cNvPr id="1" name=""/>
+        <p:cNvGrpSpPr/>
+        <p:nvPr/>
+      </p:nvGrpSpPr>
+      <p:grpSpPr>
+        <a:xfrm>
+          <a:off x="0" y="0"/>
+          <a:ext cx="0" cy="0"/>
+          <a:chOff x="0" y="0"/>
+          <a:chExt cx="0" cy="0"/>
+        </a:xfrm>
+      </p:grpSpPr>
+      <p:sp>
+        <p:nvSpPr>
+          <p:cNvPr id="2" name="Title 1">
+            <a:extLst>
+              <a:ext uri="{FF2B5EF4-FFF2-40B4-BE49-F238E27FC236}">
+                <a16:creationId xmlns:a16="http://schemas.microsoft.com/office/drawing/2014/main" id="{A36507C9-B5DA-FFCA-3EAD-620ADC2B61BB}"/>
+              </a:ext>
+            </a:extLst>
+          </p:cNvPr>
+          <p:cNvSpPr>
+            <a:spLocks noGrp="1"/>
+          </p:cNvSpPr>
+          <p:nvPr>
+            <p:ph type="title"/>
+          </p:nvPr>
+        </p:nvSpPr>
+        <p:spPr/>
+        <p:txBody>
+          <a:bodyPr/>
+          <a:lstStyle/>
+          <a:p>
+            <a:r>
+              <a:rPr lang="en-US" dirty="0">
+                <a:latin typeface="Times New Roman" panose="02020603050405020304" pitchFamily="18" charset="0"/>
+                <a:cs typeface="Times New Roman" panose="02020603050405020304" pitchFamily="18" charset="0"/>
+              </a:rPr>
+              <a:t>Table of Contents</a:t>
+            </a:r>
+            <a:endParaRPr lang="en-US" dirty="0"/>
+          </a:p>
+        </p:txBody>
+      </p:sp>
+      <p:sp>
+        <p:nvSpPr>
+          <p:cNvPr id="3" name="Content Placeholder 2">
+            <a:extLst>
+              <a:ext uri="{FF2B5EF4-FFF2-40B4-BE49-F238E27FC236}">
+                <a16:creationId xmlns:a16="http://schemas.microsoft.com/office/drawing/2014/main" id="{8DDF16DB-3293-81BF-0DFD-32B3F32A63C1}"/>
+              </a:ext>
+            </a:extLst>
+          </p:cNvPr>
+          <p:cNvSpPr>
+            <a:spLocks noGrp="1"/>
+          </p:cNvSpPr>
+          <p:nvPr>
+            <p:ph idx="1"/>
+          </p:nvPr>
+        </p:nvSpPr>
+        <p:spPr/>
+        <p:txBody>
+          <a:bodyPr/>
+          <a:lstStyle/>
+          <a:p>
+            <a:r>
+              <a:rPr lang="en-US" dirty="0">
+                <a:latin typeface="Times New Roman" panose="02020603050405020304" pitchFamily="18" charset="0"/>
+                <a:cs typeface="Times New Roman" panose="02020603050405020304" pitchFamily="18" charset="0"/>
+              </a:rPr>
+              <a:t>Solution to Research Questions</a:t>
+            </a:r>
+          </a:p>
+          <a:p>
+            <a:r>
+              <a:rPr lang="en-US" dirty="0">
+                <a:latin typeface="Times New Roman" panose="02020603050405020304" pitchFamily="18" charset="0"/>
+                <a:cs typeface="Times New Roman" panose="02020603050405020304" pitchFamily="18" charset="0"/>
+              </a:rPr>
+              <a:t>Key Findings</a:t>
+            </a:r>
+          </a:p>
+          <a:p>
+            <a:r>
+              <a:rPr lang="en-US" dirty="0">
+                <a:latin typeface="Times New Roman" panose="02020603050405020304" pitchFamily="18" charset="0"/>
+                <a:cs typeface="Times New Roman" panose="02020603050405020304" pitchFamily="18" charset="0"/>
+              </a:rPr>
+              <a:t>Limitations</a:t>
+            </a:r>
+          </a:p>
+          <a:p>
+            <a:r>
+              <a:rPr lang="en-US" dirty="0">
+                <a:latin typeface="Times New Roman" panose="02020603050405020304" pitchFamily="18" charset="0"/>
+                <a:cs typeface="Times New Roman" panose="02020603050405020304" pitchFamily="18" charset="0"/>
+              </a:rPr>
+              <a:t>Conclusion and recommendations</a:t>
+            </a:r>
+          </a:p>
+          <a:p>
+            <a:r>
+              <a:rPr lang="en-US" dirty="0">
+                <a:latin typeface="Times New Roman" panose="02020603050405020304" pitchFamily="18" charset="0"/>
+                <a:cs typeface="Times New Roman" panose="02020603050405020304" pitchFamily="18" charset="0"/>
+              </a:rPr>
+              <a:t>References</a:t>
+            </a:r>
+          </a:p>
+          <a:p>
+            <a:endParaRPr lang="en-US" dirty="0"/>
+          </a:p>
+        </p:txBody>
+      </p:sp>
+    </p:spTree>
+    <p:extLst>
+      <p:ext uri="{BB962C8B-B14F-4D97-AF65-F5344CB8AC3E}">
+        <p14:creationId xmlns:p14="http://schemas.microsoft.com/office/powerpoint/2010/main" val="2011723551"/>
+      </p:ext>
+    </p:extLst>
+  </p:cSld>
+  <p:clrMapOvr>
+    <a:masterClrMapping/>
+  </p:clrMapOvr>
+</p:sld>
+</file>
+
+<file path=ppt/slides/slide30.xml><?xml version="1.0" encoding="utf-8"?>
 <p:sld xmlns:a="http://schemas.openxmlformats.org/drawingml/2006/main" xmlns:r="http://schemas.openxmlformats.org/officeDocument/2006/relationships" xmlns:p="http://schemas.openxmlformats.org/presentationml/2006/main">
   <p:cSld>
     <p:spTree>
@@ -8214,7 +8747,7 @@
 </p:sld>
 </file>
 
-<file path=ppt/slides/slide28.xml><?xml version="1.0" encoding="utf-8"?>
+<file path=ppt/slides/slide31.xml><?xml version="1.0" encoding="utf-8"?>
 <p:sld xmlns:a="http://schemas.openxmlformats.org/drawingml/2006/main" xmlns:r="http://schemas.openxmlformats.org/officeDocument/2006/relationships" xmlns:p="http://schemas.openxmlformats.org/presentationml/2006/main">
   <p:cSld>
     <p:spTree>
@@ -8310,7 +8843,7 @@
 </p:sld>
 </file>
 
-<file path=ppt/slides/slide29.xml><?xml version="1.0" encoding="utf-8"?>
+<file path=ppt/slides/slide32.xml><?xml version="1.0" encoding="utf-8"?>
 <p:sld xmlns:a="http://schemas.openxmlformats.org/drawingml/2006/main" xmlns:r="http://schemas.openxmlformats.org/officeDocument/2006/relationships" xmlns:p="http://schemas.openxmlformats.org/presentationml/2006/main">
   <p:cSld>
     <p:spTree>
@@ -8372,7 +8905,7 @@
 </p:sld>
 </file>
 
-<file path=ppt/slides/slide3.xml><?xml version="1.0" encoding="utf-8"?>
+<file path=ppt/slides/slide33.xml><?xml version="1.0" encoding="utf-8"?>
 <p:sld xmlns:a="http://schemas.openxmlformats.org/drawingml/2006/main" xmlns:r="http://schemas.openxmlformats.org/officeDocument/2006/relationships" xmlns:p="http://schemas.openxmlformats.org/presentationml/2006/main">
   <p:cSld>
     <p:spTree>
@@ -8394,124 +8927,6 @@
           <p:cNvPr id="2" name="Title 1">
             <a:extLst>
               <a:ext uri="{FF2B5EF4-FFF2-40B4-BE49-F238E27FC236}">
-                <a16:creationId xmlns:a16="http://schemas.microsoft.com/office/drawing/2014/main" id="{100AF7FC-7215-B8ED-A894-23C276392C27}"/>
-              </a:ext>
-            </a:extLst>
-          </p:cNvPr>
-          <p:cNvSpPr>
-            <a:spLocks noGrp="1"/>
-          </p:cNvSpPr>
-          <p:nvPr>
-            <p:ph type="title"/>
-          </p:nvPr>
-        </p:nvSpPr>
-        <p:spPr/>
-        <p:txBody>
-          <a:bodyPr/>
-          <a:lstStyle/>
-          <a:p>
-            <a:r>
-              <a:rPr lang="en-US" dirty="0">
-                <a:latin typeface="Times New Roman" panose="02020603050405020304" pitchFamily="18" charset="0"/>
-                <a:cs typeface="Times New Roman" panose="02020603050405020304" pitchFamily="18" charset="0"/>
-              </a:rPr>
-              <a:t>INTRODUCTION</a:t>
-            </a:r>
-          </a:p>
-        </p:txBody>
-      </p:sp>
-      <p:sp>
-        <p:nvSpPr>
-          <p:cNvPr id="3" name="Content Placeholder 2">
-            <a:extLst>
-              <a:ext uri="{FF2B5EF4-FFF2-40B4-BE49-F238E27FC236}">
-                <a16:creationId xmlns:a16="http://schemas.microsoft.com/office/drawing/2014/main" id="{A620E020-18CE-4F65-5106-6B0CA04787BB}"/>
-              </a:ext>
-            </a:extLst>
-          </p:cNvPr>
-          <p:cNvSpPr>
-            <a:spLocks noGrp="1"/>
-          </p:cNvSpPr>
-          <p:nvPr>
-            <p:ph idx="1"/>
-          </p:nvPr>
-        </p:nvSpPr>
-        <p:spPr/>
-        <p:txBody>
-          <a:bodyPr>
-            <a:normAutofit lnSpcReduction="10000"/>
-          </a:bodyPr>
-          <a:lstStyle/>
-          <a:p>
-            <a:r>
-              <a:rPr lang="en-US" dirty="0">
-                <a:latin typeface="Times New Roman" panose="02020603050405020304" pitchFamily="18" charset="0"/>
-                <a:cs typeface="Times New Roman" panose="02020603050405020304" pitchFamily="18" charset="0"/>
-              </a:rPr>
-              <a:t>The housing market is an important sector of every economy. House prices are influenced by several factors such as location, property size, property type, age of the building, and market demand.</a:t>
-            </a:r>
-          </a:p>
-          <a:p>
-            <a:r>
-              <a:rPr lang="en-US" dirty="0">
-                <a:latin typeface="Times New Roman" panose="02020603050405020304" pitchFamily="18" charset="0"/>
-                <a:cs typeface="Times New Roman" panose="02020603050405020304" pitchFamily="18" charset="0"/>
-              </a:rPr>
-              <a:t>Exploratory Data Analysis (EDA) provides an effective way of discovering hidden trends, relationships, and patterns within housing datasets before applying predictive models.</a:t>
-            </a:r>
-          </a:p>
-          <a:p>
-            <a:r>
-              <a:rPr lang="en-US" dirty="0">
-                <a:latin typeface="Times New Roman" panose="02020603050405020304" pitchFamily="18" charset="0"/>
-                <a:cs typeface="Times New Roman" panose="02020603050405020304" pitchFamily="18" charset="0"/>
-              </a:rPr>
-              <a:t>This study focuses on analyzing the Danish housing market using Python and data visualization techniques.</a:t>
-            </a:r>
-          </a:p>
-          <a:p>
-            <a:endParaRPr lang="en-US" dirty="0">
-              <a:latin typeface="Times New Roman" panose="02020603050405020304" pitchFamily="18" charset="0"/>
-              <a:cs typeface="Times New Roman" panose="02020603050405020304" pitchFamily="18" charset="0"/>
-            </a:endParaRPr>
-          </a:p>
-        </p:txBody>
-      </p:sp>
-    </p:spTree>
-    <p:extLst>
-      <p:ext uri="{BB962C8B-B14F-4D97-AF65-F5344CB8AC3E}">
-        <p14:creationId xmlns:p14="http://schemas.microsoft.com/office/powerpoint/2010/main" val="1702612140"/>
-      </p:ext>
-    </p:extLst>
-  </p:cSld>
-  <p:clrMapOvr>
-    <a:masterClrMapping/>
-  </p:clrMapOvr>
-</p:sld>
-</file>
-
-<file path=ppt/slides/slide30.xml><?xml version="1.0" encoding="utf-8"?>
-<p:sld xmlns:a="http://schemas.openxmlformats.org/drawingml/2006/main" xmlns:r="http://schemas.openxmlformats.org/officeDocument/2006/relationships" xmlns:p="http://schemas.openxmlformats.org/presentationml/2006/main">
-  <p:cSld>
-    <p:spTree>
-      <p:nvGrpSpPr>
-        <p:cNvPr id="1" name=""/>
-        <p:cNvGrpSpPr/>
-        <p:nvPr/>
-      </p:nvGrpSpPr>
-      <p:grpSpPr>
-        <a:xfrm>
-          <a:off x="0" y="0"/>
-          <a:ext cx="0" cy="0"/>
-          <a:chOff x="0" y="0"/>
-          <a:chExt cx="0" cy="0"/>
-        </a:xfrm>
-      </p:grpSpPr>
-      <p:sp>
-        <p:nvSpPr>
-          <p:cNvPr id="2" name="Title 1">
-            <a:extLst>
-              <a:ext uri="{FF2B5EF4-FFF2-40B4-BE49-F238E27FC236}">
                 <a16:creationId xmlns:a16="http://schemas.microsoft.com/office/drawing/2014/main" id="{0DFB8349-4D57-B21C-737E-F28C3355D2B5}"/>
               </a:ext>
             </a:extLst>
@@ -8636,7 +9051,7 @@
 </p:sld>
 </file>
 
-<file path=ppt/slides/slide31.xml><?xml version="1.0" encoding="utf-8"?>
+<file path=ppt/slides/slide34.xml><?xml version="1.0" encoding="utf-8"?>
 <p:sld xmlns:a="http://schemas.openxmlformats.org/drawingml/2006/main" xmlns:r="http://schemas.openxmlformats.org/officeDocument/2006/relationships" xmlns:p="http://schemas.openxmlformats.org/presentationml/2006/main">
   <p:cSld>
     <p:spTree>
@@ -8731,7 +9146,7 @@
 </p:sld>
 </file>
 
-<file path=ppt/slides/slide32.xml><?xml version="1.0" encoding="utf-8"?>
+<file path=ppt/slides/slide35.xml><?xml version="1.0" encoding="utf-8"?>
 <p:sld xmlns:a="http://schemas.openxmlformats.org/drawingml/2006/main" xmlns:r="http://schemas.openxmlformats.org/officeDocument/2006/relationships" xmlns:p="http://schemas.openxmlformats.org/presentationml/2006/main">
   <p:cSld>
     <p:spTree>
@@ -8827,7 +9242,7 @@
 </p:sld>
 </file>
 
-<file path=ppt/slides/slide33.xml><?xml version="1.0" encoding="utf-8"?>
+<file path=ppt/slides/slide36.xml><?xml version="1.0" encoding="utf-8"?>
 <p:sld xmlns:a="http://schemas.openxmlformats.org/drawingml/2006/main" xmlns:r="http://schemas.openxmlformats.org/officeDocument/2006/relationships" xmlns:p="http://schemas.openxmlformats.org/presentationml/2006/main">
   <p:cSld>
     <p:spTree>
@@ -8973,7 +9388,7 @@
 </p:sld>
 </file>
 
-<file path=ppt/slides/slide34.xml><?xml version="1.0" encoding="utf-8"?>
+<file path=ppt/slides/slide37.xml><?xml version="1.0" encoding="utf-8"?>
 <p:sld xmlns:a="http://schemas.openxmlformats.org/drawingml/2006/main" xmlns:r="http://schemas.openxmlformats.org/officeDocument/2006/relationships" xmlns:p="http://schemas.openxmlformats.org/presentationml/2006/main">
   <p:cSld>
     <p:spTree>
@@ -9096,7 +9511,7 @@
 </p:sld>
 </file>
 
-<file path=ppt/slides/slide35.xml><?xml version="1.0" encoding="utf-8"?>
+<file path=ppt/slides/slide38.xml><?xml version="1.0" encoding="utf-8"?>
 <p:sld xmlns:a="http://schemas.openxmlformats.org/drawingml/2006/main" xmlns:r="http://schemas.openxmlformats.org/officeDocument/2006/relationships" xmlns:p="http://schemas.openxmlformats.org/presentationml/2006/main">
   <p:cSld>
     <p:spTree>
@@ -9220,7 +9635,7 @@
 </p:sld>
 </file>
 
-<file path=ppt/slides/slide36.xml><?xml version="1.0" encoding="utf-8"?>
+<file path=ppt/slides/slide39.xml><?xml version="1.0" encoding="utf-8"?>
 <p:sld xmlns:a="http://schemas.openxmlformats.org/drawingml/2006/main" xmlns:r="http://schemas.openxmlformats.org/officeDocument/2006/relationships" xmlns:p="http://schemas.openxmlformats.org/presentationml/2006/main">
   <p:cSld>
     <p:spTree>
@@ -9316,7 +9731,7 @@
 </p:sld>
 </file>
 
-<file path=ppt/slides/slide37.xml><?xml version="1.0" encoding="utf-8"?>
+<file path=ppt/slides/slide4.xml><?xml version="1.0" encoding="utf-8"?>
 <p:sld xmlns:a="http://schemas.openxmlformats.org/drawingml/2006/main" xmlns:r="http://schemas.openxmlformats.org/officeDocument/2006/relationships" xmlns:p="http://schemas.openxmlformats.org/presentationml/2006/main">
   <p:cSld>
     <p:spTree>
@@ -9338,6 +9753,138 @@
           <p:cNvPr id="2" name="Title 1">
             <a:extLst>
               <a:ext uri="{FF2B5EF4-FFF2-40B4-BE49-F238E27FC236}">
+                <a16:creationId xmlns:a16="http://schemas.microsoft.com/office/drawing/2014/main" id="{4165CBEB-5938-09F2-BC03-94731ABDB3C4}"/>
+              </a:ext>
+            </a:extLst>
+          </p:cNvPr>
+          <p:cNvSpPr>
+            <a:spLocks noGrp="1"/>
+          </p:cNvSpPr>
+          <p:nvPr>
+            <p:ph type="title"/>
+          </p:nvPr>
+        </p:nvSpPr>
+        <p:spPr/>
+        <p:txBody>
+          <a:bodyPr>
+            <a:normAutofit/>
+          </a:bodyPr>
+          <a:lstStyle/>
+          <a:p>
+            <a:r>
+              <a:rPr lang="en-US" dirty="0">
+                <a:latin typeface="Times New Roman" panose="02020603050405020304" pitchFamily="18" charset="0"/>
+                <a:cs typeface="Times New Roman" panose="02020603050405020304" pitchFamily="18" charset="0"/>
+              </a:rPr>
+              <a:t>ABSTRACT</a:t>
+            </a:r>
+          </a:p>
+        </p:txBody>
+      </p:sp>
+      <p:sp>
+        <p:nvSpPr>
+          <p:cNvPr id="3" name="Content Placeholder 2">
+            <a:extLst>
+              <a:ext uri="{FF2B5EF4-FFF2-40B4-BE49-F238E27FC236}">
+                <a16:creationId xmlns:a16="http://schemas.microsoft.com/office/drawing/2014/main" id="{B0F10586-C0A8-73F2-85BE-E3B41147920A}"/>
+              </a:ext>
+            </a:extLst>
+          </p:cNvPr>
+          <p:cNvSpPr>
+            <a:spLocks noGrp="1"/>
+          </p:cNvSpPr>
+          <p:nvPr>
+            <p:ph idx="1"/>
+          </p:nvPr>
+        </p:nvSpPr>
+        <p:spPr/>
+        <p:txBody>
+          <a:bodyPr>
+            <a:noAutofit/>
+          </a:bodyPr>
+          <a:lstStyle/>
+          <a:p>
+            <a:r>
+              <a:rPr lang="en-US" sz="1950" dirty="0">
+                <a:latin typeface="Times New Roman" panose="02020603050405020304" pitchFamily="18" charset="0"/>
+                <a:cs typeface="Times New Roman" panose="02020603050405020304" pitchFamily="18" charset="0"/>
+              </a:rPr>
+              <a:t>This study explores the Danish housing market using Exploratory Data Analysis (EDA) techniques in Python. </a:t>
+            </a:r>
+          </a:p>
+          <a:p>
+            <a:r>
+              <a:rPr lang="en-US" sz="1950" dirty="0">
+                <a:latin typeface="Times New Roman" panose="02020603050405020304" pitchFamily="18" charset="0"/>
+                <a:cs typeface="Times New Roman" panose="02020603050405020304" pitchFamily="18" charset="0"/>
+              </a:rPr>
+              <a:t>The dataset was cleaned, transformed, and analyzed to identify patterns in housing prices across different regions, property types, property ages, and construction periods. </a:t>
+            </a:r>
+          </a:p>
+          <a:p>
+            <a:r>
+              <a:rPr lang="en-US" sz="1950" dirty="0">
+                <a:latin typeface="Times New Roman" panose="02020603050405020304" pitchFamily="18" charset="0"/>
+                <a:cs typeface="Times New Roman" panose="02020603050405020304" pitchFamily="18" charset="0"/>
+              </a:rPr>
+              <a:t>Various statistical summaries and visualizations including bar charts, box plots, histograms, line plots, pie charts, and heatmaps were used to answer fifteen research questions. </a:t>
+            </a:r>
+          </a:p>
+          <a:p>
+            <a:r>
+              <a:rPr lang="en-US" sz="1950" dirty="0">
+                <a:latin typeface="Times New Roman" panose="02020603050405020304" pitchFamily="18" charset="0"/>
+                <a:cs typeface="Times New Roman" panose="02020603050405020304" pitchFamily="18" charset="0"/>
+              </a:rPr>
+              <a:t>The findings show that housing prices are significantly influenced by location, property type, property size, age, and construction decade. </a:t>
+            </a:r>
+          </a:p>
+          <a:p>
+            <a:r>
+              <a:rPr lang="en-US" sz="1950" dirty="0">
+                <a:latin typeface="Times New Roman" panose="02020603050405020304" pitchFamily="18" charset="0"/>
+                <a:cs typeface="Times New Roman" panose="02020603050405020304" pitchFamily="18" charset="0"/>
+              </a:rPr>
+              <a:t>The study demonstrates how data analytics can provide valuable insights for buyers, sellers, investors, and policymakers.</a:t>
+            </a:r>
+          </a:p>
+        </p:txBody>
+      </p:sp>
+    </p:spTree>
+    <p:extLst>
+      <p:ext uri="{BB962C8B-B14F-4D97-AF65-F5344CB8AC3E}">
+        <p14:creationId xmlns:p14="http://schemas.microsoft.com/office/powerpoint/2010/main" val="4074782667"/>
+      </p:ext>
+    </p:extLst>
+  </p:cSld>
+  <p:clrMapOvr>
+    <a:masterClrMapping/>
+  </p:clrMapOvr>
+</p:sld>
+</file>
+
+<file path=ppt/slides/slide40.xml><?xml version="1.0" encoding="utf-8"?>
+<p:sld xmlns:a="http://schemas.openxmlformats.org/drawingml/2006/main" xmlns:r="http://schemas.openxmlformats.org/officeDocument/2006/relationships" xmlns:p="http://schemas.openxmlformats.org/presentationml/2006/main">
+  <p:cSld>
+    <p:spTree>
+      <p:nvGrpSpPr>
+        <p:cNvPr id="1" name=""/>
+        <p:cNvGrpSpPr/>
+        <p:nvPr/>
+      </p:nvGrpSpPr>
+      <p:grpSpPr>
+        <a:xfrm>
+          <a:off x="0" y="0"/>
+          <a:ext cx="0" cy="0"/>
+          <a:chOff x="0" y="0"/>
+          <a:chExt cx="0" cy="0"/>
+        </a:xfrm>
+      </p:grpSpPr>
+      <p:sp>
+        <p:nvSpPr>
+          <p:cNvPr id="2" name="Title 1">
+            <a:extLst>
+              <a:ext uri="{FF2B5EF4-FFF2-40B4-BE49-F238E27FC236}">
                 <a16:creationId xmlns:a16="http://schemas.microsoft.com/office/drawing/2014/main" id="{3773F429-7E8D-926C-3D3C-2E12CEF57F61}"/>
               </a:ext>
             </a:extLst>
@@ -9480,7 +10027,7 @@
 </p:sld>
 </file>
 
-<file path=ppt/slides/slide38.xml><?xml version="1.0" encoding="utf-8"?>
+<file path=ppt/slides/slide41.xml><?xml version="1.0" encoding="utf-8"?>
 <p:sld xmlns:a="http://schemas.openxmlformats.org/drawingml/2006/main" xmlns:r="http://schemas.openxmlformats.org/officeDocument/2006/relationships" xmlns:p="http://schemas.openxmlformats.org/presentationml/2006/main">
   <p:cSld>
     <p:spTree>
@@ -9573,7 +10120,7 @@
 </p:sld>
 </file>
 
-<file path=ppt/slides/slide39.xml><?xml version="1.0" encoding="utf-8"?>
+<file path=ppt/slides/slide42.xml><?xml version="1.0" encoding="utf-8"?>
 <p:sld xmlns:a="http://schemas.openxmlformats.org/drawingml/2006/main" xmlns:r="http://schemas.openxmlformats.org/officeDocument/2006/relationships" xmlns:p="http://schemas.openxmlformats.org/presentationml/2006/main">
   <p:cSld>
     <p:spTree>
@@ -9717,99 +10264,7 @@
 </p:sld>
 </file>
 
-<file path=ppt/slides/slide4.xml><?xml version="1.0" encoding="utf-8"?>
-<p:sld xmlns:a="http://schemas.openxmlformats.org/drawingml/2006/main" xmlns:r="http://schemas.openxmlformats.org/officeDocument/2006/relationships" xmlns:p="http://schemas.openxmlformats.org/presentationml/2006/main">
-  <p:cSld>
-    <p:spTree>
-      <p:nvGrpSpPr>
-        <p:cNvPr id="1" name=""/>
-        <p:cNvGrpSpPr/>
-        <p:nvPr/>
-      </p:nvGrpSpPr>
-      <p:grpSpPr>
-        <a:xfrm>
-          <a:off x="0" y="0"/>
-          <a:ext cx="0" cy="0"/>
-          <a:chOff x="0" y="0"/>
-          <a:chExt cx="0" cy="0"/>
-        </a:xfrm>
-      </p:grpSpPr>
-      <p:sp>
-        <p:nvSpPr>
-          <p:cNvPr id="2" name="Title 1">
-            <a:extLst>
-              <a:ext uri="{FF2B5EF4-FFF2-40B4-BE49-F238E27FC236}">
-                <a16:creationId xmlns:a16="http://schemas.microsoft.com/office/drawing/2014/main" id="{A94502A2-EAB4-E470-4226-ABAF2BC07B45}"/>
-              </a:ext>
-            </a:extLst>
-          </p:cNvPr>
-          <p:cNvSpPr>
-            <a:spLocks noGrp="1"/>
-          </p:cNvSpPr>
-          <p:nvPr>
-            <p:ph type="title"/>
-          </p:nvPr>
-        </p:nvSpPr>
-        <p:spPr/>
-        <p:txBody>
-          <a:bodyPr/>
-          <a:lstStyle/>
-          <a:p>
-            <a:r>
-              <a:rPr lang="en-US" dirty="0">
-                <a:latin typeface="Times New Roman" panose="02020603050405020304" pitchFamily="18" charset="0"/>
-                <a:cs typeface="Times New Roman" panose="02020603050405020304" pitchFamily="18" charset="0"/>
-              </a:rPr>
-              <a:t>Aim</a:t>
-            </a:r>
-          </a:p>
-        </p:txBody>
-      </p:sp>
-      <p:sp>
-        <p:nvSpPr>
-          <p:cNvPr id="3" name="Content Placeholder 2">
-            <a:extLst>
-              <a:ext uri="{FF2B5EF4-FFF2-40B4-BE49-F238E27FC236}">
-                <a16:creationId xmlns:a16="http://schemas.microsoft.com/office/drawing/2014/main" id="{14037715-B604-E9DE-2B64-C6171C26CE93}"/>
-              </a:ext>
-            </a:extLst>
-          </p:cNvPr>
-          <p:cNvSpPr>
-            <a:spLocks noGrp="1"/>
-          </p:cNvSpPr>
-          <p:nvPr>
-            <p:ph idx="1"/>
-          </p:nvPr>
-        </p:nvSpPr>
-        <p:spPr/>
-        <p:txBody>
-          <a:bodyPr/>
-          <a:lstStyle/>
-          <a:p>
-            <a:r>
-              <a:rPr lang="en-US" dirty="0"/>
-              <a:t>To perform an Exploratory Data Analysis of the Danish Housing Market.</a:t>
-            </a:r>
-          </a:p>
-          <a:p>
-            <a:endParaRPr lang="en-US" dirty="0"/>
-          </a:p>
-        </p:txBody>
-      </p:sp>
-    </p:spTree>
-    <p:extLst>
-      <p:ext uri="{BB962C8B-B14F-4D97-AF65-F5344CB8AC3E}">
-        <p14:creationId xmlns:p14="http://schemas.microsoft.com/office/powerpoint/2010/main" val="349474122"/>
-      </p:ext>
-    </p:extLst>
-  </p:cSld>
-  <p:clrMapOvr>
-    <a:masterClrMapping/>
-  </p:clrMapOvr>
-</p:sld>
-</file>
-
-<file path=ppt/slides/slide40.xml><?xml version="1.0" encoding="utf-8"?>
+<file path=ppt/slides/slide43.xml><?xml version="1.0" encoding="utf-8"?>
 <p:sld xmlns:a="http://schemas.openxmlformats.org/drawingml/2006/main" xmlns:r="http://schemas.openxmlformats.org/officeDocument/2006/relationships" xmlns:p="http://schemas.openxmlformats.org/presentationml/2006/main">
   <p:cSld>
     <p:spTree>
@@ -9908,7 +10363,7 @@
 </p:sld>
 </file>
 
-<file path=ppt/slides/slide41.xml><?xml version="1.0" encoding="utf-8"?>
+<file path=ppt/slides/slide44.xml><?xml version="1.0" encoding="utf-8"?>
 <p:sld xmlns:a="http://schemas.openxmlformats.org/drawingml/2006/main" xmlns:r="http://schemas.openxmlformats.org/officeDocument/2006/relationships" xmlns:p="http://schemas.openxmlformats.org/presentationml/2006/main">
   <p:cSld>
     <p:spTree>
@@ -10008,7 +10463,7 @@
 </p:sld>
 </file>
 
-<file path=ppt/slides/slide42.xml><?xml version="1.0" encoding="utf-8"?>
+<file path=ppt/slides/slide45.xml><?xml version="1.0" encoding="utf-8"?>
 <p:sld xmlns:a="http://schemas.openxmlformats.org/drawingml/2006/main" xmlns:r="http://schemas.openxmlformats.org/officeDocument/2006/relationships" xmlns:p="http://schemas.openxmlformats.org/presentationml/2006/main">
   <p:cSld>
     <p:spTree>
@@ -10152,7 +10607,7 @@
 </p:sld>
 </file>
 
-<file path=ppt/slides/slide43.xml><?xml version="1.0" encoding="utf-8"?>
+<file path=ppt/slides/slide46.xml><?xml version="1.0" encoding="utf-8"?>
 <p:sld xmlns:a="http://schemas.openxmlformats.org/drawingml/2006/main" xmlns:r="http://schemas.openxmlformats.org/officeDocument/2006/relationships" xmlns:p="http://schemas.openxmlformats.org/presentationml/2006/main">
   <p:cSld>
     <p:spTree>
@@ -10252,7 +10707,7 @@
 </p:sld>
 </file>
 
-<file path=ppt/slides/slide44.xml><?xml version="1.0" encoding="utf-8"?>
+<file path=ppt/slides/slide47.xml><?xml version="1.0" encoding="utf-8"?>
 <p:sld xmlns:a="http://schemas.openxmlformats.org/drawingml/2006/main" xmlns:r="http://schemas.openxmlformats.org/officeDocument/2006/relationships" xmlns:p="http://schemas.openxmlformats.org/presentationml/2006/main">
   <p:cSld>
     <p:spTree>
@@ -10389,7 +10844,7 @@
 </p:sld>
 </file>
 
-<file path=ppt/slides/slide45.xml><?xml version="1.0" encoding="utf-8"?>
+<file path=ppt/slides/slide48.xml><?xml version="1.0" encoding="utf-8"?>
 <p:sld xmlns:a="http://schemas.openxmlformats.org/drawingml/2006/main" xmlns:r="http://schemas.openxmlformats.org/officeDocument/2006/relationships" xmlns:p="http://schemas.openxmlformats.org/presentationml/2006/main">
   <p:cSld>
     <p:spTree>
@@ -10488,7 +10943,7 @@
 </p:sld>
 </file>
 
-<file path=ppt/slides/slide46.xml><?xml version="1.0" encoding="utf-8"?>
+<file path=ppt/slides/slide49.xml><?xml version="1.0" encoding="utf-8"?>
 <p:sld xmlns:a="http://schemas.openxmlformats.org/drawingml/2006/main" xmlns:r="http://schemas.openxmlformats.org/officeDocument/2006/relationships" xmlns:p="http://schemas.openxmlformats.org/presentationml/2006/main">
   <p:cSld>
     <p:spTree>
@@ -10632,7 +11087,125 @@
 </p:sld>
 </file>
 
-<file path=ppt/slides/slide47.xml><?xml version="1.0" encoding="utf-8"?>
+<file path=ppt/slides/slide5.xml><?xml version="1.0" encoding="utf-8"?>
+<p:sld xmlns:a="http://schemas.openxmlformats.org/drawingml/2006/main" xmlns:r="http://schemas.openxmlformats.org/officeDocument/2006/relationships" xmlns:p="http://schemas.openxmlformats.org/presentationml/2006/main">
+  <p:cSld>
+    <p:spTree>
+      <p:nvGrpSpPr>
+        <p:cNvPr id="1" name=""/>
+        <p:cNvGrpSpPr/>
+        <p:nvPr/>
+      </p:nvGrpSpPr>
+      <p:grpSpPr>
+        <a:xfrm>
+          <a:off x="0" y="0"/>
+          <a:ext cx="0" cy="0"/>
+          <a:chOff x="0" y="0"/>
+          <a:chExt cx="0" cy="0"/>
+        </a:xfrm>
+      </p:grpSpPr>
+      <p:sp>
+        <p:nvSpPr>
+          <p:cNvPr id="2" name="Title 1">
+            <a:extLst>
+              <a:ext uri="{FF2B5EF4-FFF2-40B4-BE49-F238E27FC236}">
+                <a16:creationId xmlns:a16="http://schemas.microsoft.com/office/drawing/2014/main" id="{100AF7FC-7215-B8ED-A894-23C276392C27}"/>
+              </a:ext>
+            </a:extLst>
+          </p:cNvPr>
+          <p:cNvSpPr>
+            <a:spLocks noGrp="1"/>
+          </p:cNvSpPr>
+          <p:nvPr>
+            <p:ph type="title"/>
+          </p:nvPr>
+        </p:nvSpPr>
+        <p:spPr/>
+        <p:txBody>
+          <a:bodyPr/>
+          <a:lstStyle/>
+          <a:p>
+            <a:r>
+              <a:rPr lang="en-US" dirty="0">
+                <a:latin typeface="Times New Roman" panose="02020603050405020304" pitchFamily="18" charset="0"/>
+                <a:cs typeface="Times New Roman" panose="02020603050405020304" pitchFamily="18" charset="0"/>
+              </a:rPr>
+              <a:t>INTRODUCTION</a:t>
+            </a:r>
+          </a:p>
+        </p:txBody>
+      </p:sp>
+      <p:sp>
+        <p:nvSpPr>
+          <p:cNvPr id="3" name="Content Placeholder 2">
+            <a:extLst>
+              <a:ext uri="{FF2B5EF4-FFF2-40B4-BE49-F238E27FC236}">
+                <a16:creationId xmlns:a16="http://schemas.microsoft.com/office/drawing/2014/main" id="{A620E020-18CE-4F65-5106-6B0CA04787BB}"/>
+              </a:ext>
+            </a:extLst>
+          </p:cNvPr>
+          <p:cNvSpPr>
+            <a:spLocks noGrp="1"/>
+          </p:cNvSpPr>
+          <p:nvPr>
+            <p:ph idx="1"/>
+          </p:nvPr>
+        </p:nvSpPr>
+        <p:spPr/>
+        <p:txBody>
+          <a:bodyPr>
+            <a:normAutofit lnSpcReduction="10000"/>
+          </a:bodyPr>
+          <a:lstStyle/>
+          <a:p>
+            <a:r>
+              <a:rPr lang="en-US" dirty="0">
+                <a:latin typeface="Times New Roman" panose="02020603050405020304" pitchFamily="18" charset="0"/>
+                <a:cs typeface="Times New Roman" panose="02020603050405020304" pitchFamily="18" charset="0"/>
+              </a:rPr>
+              <a:t>The housing market is an important sector of every economy. House prices are influenced by several factors such as location, property size, property type, age of the building, and market demand.</a:t>
+            </a:r>
+          </a:p>
+          <a:p>
+            <a:r>
+              <a:rPr lang="en-US" dirty="0">
+                <a:latin typeface="Times New Roman" panose="02020603050405020304" pitchFamily="18" charset="0"/>
+                <a:cs typeface="Times New Roman" panose="02020603050405020304" pitchFamily="18" charset="0"/>
+              </a:rPr>
+              <a:t>Exploratory Data Analysis (EDA) provides an effective way of discovering hidden trends, relationships, and patterns within housing datasets before applying predictive models.</a:t>
+            </a:r>
+          </a:p>
+          <a:p>
+            <a:r>
+              <a:rPr lang="en-US" dirty="0">
+                <a:latin typeface="Times New Roman" panose="02020603050405020304" pitchFamily="18" charset="0"/>
+                <a:cs typeface="Times New Roman" panose="02020603050405020304" pitchFamily="18" charset="0"/>
+              </a:rPr>
+              <a:t>This study focuses on analyzing the Danish housing market using Python and data visualization techniques.</a:t>
+            </a:r>
+          </a:p>
+          <a:p>
+            <a:endParaRPr lang="en-US" dirty="0">
+              <a:latin typeface="Times New Roman" panose="02020603050405020304" pitchFamily="18" charset="0"/>
+              <a:cs typeface="Times New Roman" panose="02020603050405020304" pitchFamily="18" charset="0"/>
+            </a:endParaRPr>
+          </a:p>
+        </p:txBody>
+      </p:sp>
+    </p:spTree>
+    <p:extLst>
+      <p:ext uri="{BB962C8B-B14F-4D97-AF65-F5344CB8AC3E}">
+        <p14:creationId xmlns:p14="http://schemas.microsoft.com/office/powerpoint/2010/main" val="1702612140"/>
+      </p:ext>
+    </p:extLst>
+  </p:cSld>
+  <p:clrMapOvr>
+    <a:masterClrMapping/>
+  </p:clrMapOvr>
+</p:sld>
+</file>
+
+<file path=ppt/slides/slide50.xml><?xml version="1.0" encoding="utf-8"?>
 <p:sld xmlns:a="http://schemas.openxmlformats.org/drawingml/2006/main" xmlns:r="http://schemas.openxmlformats.org/officeDocument/2006/relationships" xmlns:p="http://schemas.openxmlformats.org/presentationml/2006/main">
   <p:cSld>
     <p:spTree>
@@ -10731,7 +11304,7 @@
 </p:sld>
 </file>
 
-<file path=ppt/slides/slide48.xml><?xml version="1.0" encoding="utf-8"?>
+<file path=ppt/slides/slide51.xml><?xml version="1.0" encoding="utf-8"?>
 <p:sld xmlns:a="http://schemas.openxmlformats.org/drawingml/2006/main" xmlns:r="http://schemas.openxmlformats.org/officeDocument/2006/relationships" xmlns:p="http://schemas.openxmlformats.org/presentationml/2006/main">
   <p:cSld>
     <p:spTree>
@@ -10831,604 +11404,6 @@
 </p:sld>
 </file>
 
-<file path=ppt/slides/slide49.xml><?xml version="1.0" encoding="utf-8"?>
-<p:sld xmlns:a="http://schemas.openxmlformats.org/drawingml/2006/main" xmlns:r="http://schemas.openxmlformats.org/officeDocument/2006/relationships" xmlns:p="http://schemas.openxmlformats.org/presentationml/2006/main">
-  <p:cSld>
-    <p:spTree>
-      <p:nvGrpSpPr>
-        <p:cNvPr id="1" name=""/>
-        <p:cNvGrpSpPr/>
-        <p:nvPr/>
-      </p:nvGrpSpPr>
-      <p:grpSpPr>
-        <a:xfrm>
-          <a:off x="0" y="0"/>
-          <a:ext cx="0" cy="0"/>
-          <a:chOff x="0" y="0"/>
-          <a:chExt cx="0" cy="0"/>
-        </a:xfrm>
-      </p:grpSpPr>
-      <p:sp>
-        <p:nvSpPr>
-          <p:cNvPr id="2" name="Title 1">
-            <a:extLst>
-              <a:ext uri="{FF2B5EF4-FFF2-40B4-BE49-F238E27FC236}">
-                <a16:creationId xmlns:a16="http://schemas.microsoft.com/office/drawing/2014/main" id="{73A862B1-C3BC-C83F-32F7-8E8629F22F14}"/>
-              </a:ext>
-            </a:extLst>
-          </p:cNvPr>
-          <p:cNvSpPr>
-            <a:spLocks noGrp="1"/>
-          </p:cNvSpPr>
-          <p:nvPr>
-            <p:ph type="title"/>
-          </p:nvPr>
-        </p:nvSpPr>
-        <p:spPr/>
-        <p:txBody>
-          <a:bodyPr/>
-          <a:lstStyle/>
-          <a:p>
-            <a:r>
-              <a:rPr lang="en-US" dirty="0">
-                <a:latin typeface="Times New Roman" panose="02020603050405020304" pitchFamily="18" charset="0"/>
-                <a:cs typeface="Times New Roman" panose="02020603050405020304" pitchFamily="18" charset="0"/>
-              </a:rPr>
-              <a:t>Property Age and Construction Decade</a:t>
-            </a:r>
-            <a:endParaRPr lang="en-US" dirty="0"/>
-          </a:p>
-        </p:txBody>
-      </p:sp>
-      <p:sp>
-        <p:nvSpPr>
-          <p:cNvPr id="3" name="Content Placeholder 2">
-            <a:extLst>
-              <a:ext uri="{FF2B5EF4-FFF2-40B4-BE49-F238E27FC236}">
-                <a16:creationId xmlns:a16="http://schemas.microsoft.com/office/drawing/2014/main" id="{B05366C7-3268-C83E-4EB9-D8B19AD0A8BC}"/>
-              </a:ext>
-            </a:extLst>
-          </p:cNvPr>
-          <p:cNvSpPr>
-            <a:spLocks noGrp="1"/>
-          </p:cNvSpPr>
-          <p:nvPr>
-            <p:ph idx="1"/>
-          </p:nvPr>
-        </p:nvSpPr>
-        <p:spPr/>
-        <p:txBody>
-          <a:bodyPr>
-            <a:normAutofit fontScale="92500" lnSpcReduction="10000"/>
-          </a:bodyPr>
-          <a:lstStyle/>
-          <a:p>
-            <a:r>
-              <a:rPr lang="en-US" b="1" dirty="0">
-                <a:latin typeface="Times New Roman" panose="02020603050405020304" pitchFamily="18" charset="0"/>
-                <a:cs typeface="Times New Roman" panose="02020603050405020304" pitchFamily="18" charset="0"/>
-              </a:rPr>
-              <a:t>Findings</a:t>
-            </a:r>
-          </a:p>
-          <a:p>
-            <a:r>
-              <a:rPr lang="en-US" dirty="0">
-                <a:latin typeface="Times New Roman" panose="02020603050405020304" pitchFamily="18" charset="0"/>
-                <a:cs typeface="Times New Roman" panose="02020603050405020304" pitchFamily="18" charset="0"/>
-              </a:rPr>
-              <a:t>Newer properties generally have higher average prices. </a:t>
-            </a:r>
-          </a:p>
-          <a:p>
-            <a:r>
-              <a:rPr lang="en-US" dirty="0">
-                <a:latin typeface="Times New Roman" panose="02020603050405020304" pitchFamily="18" charset="0"/>
-                <a:cs typeface="Times New Roman" panose="02020603050405020304" pitchFamily="18" charset="0"/>
-              </a:rPr>
-              <a:t>Housing prices decrease as buildings age. </a:t>
-            </a:r>
-          </a:p>
-          <a:p>
-            <a:r>
-              <a:rPr lang="en-US" dirty="0">
-                <a:latin typeface="Times New Roman" panose="02020603050405020304" pitchFamily="18" charset="0"/>
-                <a:cs typeface="Times New Roman" panose="02020603050405020304" pitchFamily="18" charset="0"/>
-              </a:rPr>
-              <a:t>Some older historic properties remain valuable. </a:t>
-            </a:r>
-          </a:p>
-          <a:p>
-            <a:r>
-              <a:rPr lang="en-US" dirty="0">
-                <a:latin typeface="Times New Roman" panose="02020603050405020304" pitchFamily="18" charset="0"/>
-                <a:cs typeface="Times New Roman" panose="02020603050405020304" pitchFamily="18" charset="0"/>
-              </a:rPr>
-              <a:t>Construction decade influences market value. </a:t>
-            </a:r>
-          </a:p>
-          <a:p>
-            <a:r>
-              <a:rPr lang="en-US" b="1" dirty="0">
-                <a:latin typeface="Times New Roman" panose="02020603050405020304" pitchFamily="18" charset="0"/>
-                <a:cs typeface="Times New Roman" panose="02020603050405020304" pitchFamily="18" charset="0"/>
-              </a:rPr>
-              <a:t>Conclusion</a:t>
-            </a:r>
-          </a:p>
-          <a:p>
-            <a:r>
-              <a:rPr lang="en-US" dirty="0">
-                <a:latin typeface="Times New Roman" panose="02020603050405020304" pitchFamily="18" charset="0"/>
-                <a:cs typeface="Times New Roman" panose="02020603050405020304" pitchFamily="18" charset="0"/>
-              </a:rPr>
-              <a:t>Property age and construction period significantly affect housing prices.</a:t>
-            </a:r>
-          </a:p>
-          <a:p>
-            <a:endParaRPr lang="en-US" dirty="0">
-              <a:latin typeface="Times New Roman" panose="02020603050405020304" pitchFamily="18" charset="0"/>
-              <a:cs typeface="Times New Roman" panose="02020603050405020304" pitchFamily="18" charset="0"/>
-            </a:endParaRPr>
-          </a:p>
-        </p:txBody>
-      </p:sp>
-    </p:spTree>
-    <p:extLst>
-      <p:ext uri="{BB962C8B-B14F-4D97-AF65-F5344CB8AC3E}">
-        <p14:creationId xmlns:p14="http://schemas.microsoft.com/office/powerpoint/2010/main" val="2301407379"/>
-      </p:ext>
-    </p:extLst>
-  </p:cSld>
-  <p:clrMapOvr>
-    <a:masterClrMapping/>
-  </p:clrMapOvr>
-</p:sld>
-</file>
-
-<file path=ppt/slides/slide5.xml><?xml version="1.0" encoding="utf-8"?>
-<p:sld xmlns:a="http://schemas.openxmlformats.org/drawingml/2006/main" xmlns:r="http://schemas.openxmlformats.org/officeDocument/2006/relationships" xmlns:p="http://schemas.openxmlformats.org/presentationml/2006/main">
-  <p:cSld>
-    <p:spTree>
-      <p:nvGrpSpPr>
-        <p:cNvPr id="1" name=""/>
-        <p:cNvGrpSpPr/>
-        <p:nvPr/>
-      </p:nvGrpSpPr>
-      <p:grpSpPr>
-        <a:xfrm>
-          <a:off x="0" y="0"/>
-          <a:ext cx="0" cy="0"/>
-          <a:chOff x="0" y="0"/>
-          <a:chExt cx="0" cy="0"/>
-        </a:xfrm>
-      </p:grpSpPr>
-      <p:sp>
-        <p:nvSpPr>
-          <p:cNvPr id="2" name="Title 1">
-            <a:extLst>
-              <a:ext uri="{FF2B5EF4-FFF2-40B4-BE49-F238E27FC236}">
-                <a16:creationId xmlns:a16="http://schemas.microsoft.com/office/drawing/2014/main" id="{205B2917-7F53-B7B5-9F18-468D522CCD61}"/>
-              </a:ext>
-            </a:extLst>
-          </p:cNvPr>
-          <p:cNvSpPr>
-            <a:spLocks noGrp="1"/>
-          </p:cNvSpPr>
-          <p:nvPr>
-            <p:ph type="title"/>
-          </p:nvPr>
-        </p:nvSpPr>
-        <p:spPr/>
-        <p:txBody>
-          <a:bodyPr/>
-          <a:lstStyle/>
-          <a:p>
-            <a:r>
-              <a:rPr lang="en-US" dirty="0">
-                <a:latin typeface="Times New Roman" panose="02020603050405020304" pitchFamily="18" charset="0"/>
-                <a:cs typeface="Times New Roman" panose="02020603050405020304" pitchFamily="18" charset="0"/>
-              </a:rPr>
-              <a:t>Objectives</a:t>
-            </a:r>
-          </a:p>
-        </p:txBody>
-      </p:sp>
-      <p:sp>
-        <p:nvSpPr>
-          <p:cNvPr id="3" name="Content Placeholder 2">
-            <a:extLst>
-              <a:ext uri="{FF2B5EF4-FFF2-40B4-BE49-F238E27FC236}">
-                <a16:creationId xmlns:a16="http://schemas.microsoft.com/office/drawing/2014/main" id="{6F7467F8-4604-56D7-247A-87488E2516AC}"/>
-              </a:ext>
-            </a:extLst>
-          </p:cNvPr>
-          <p:cNvSpPr>
-            <a:spLocks noGrp="1"/>
-          </p:cNvSpPr>
-          <p:nvPr>
-            <p:ph idx="1"/>
-          </p:nvPr>
-        </p:nvSpPr>
-        <p:spPr/>
-        <p:txBody>
-          <a:bodyPr>
-            <a:normAutofit lnSpcReduction="10000"/>
-          </a:bodyPr>
-          <a:lstStyle/>
-          <a:p>
-            <a:r>
-              <a:rPr lang="en-US" dirty="0">
-                <a:latin typeface="Times New Roman" panose="02020603050405020304" pitchFamily="18" charset="0"/>
-                <a:cs typeface="Times New Roman" panose="02020603050405020304" pitchFamily="18" charset="0"/>
-              </a:rPr>
-              <a:t>Clean and prepare the dataset. </a:t>
-            </a:r>
-          </a:p>
-          <a:p>
-            <a:r>
-              <a:rPr lang="en-US" dirty="0">
-                <a:latin typeface="Times New Roman" panose="02020603050405020304" pitchFamily="18" charset="0"/>
-                <a:cs typeface="Times New Roman" panose="02020603050405020304" pitchFamily="18" charset="0"/>
-              </a:rPr>
-              <a:t>Identify missing values and outliers. </a:t>
-            </a:r>
-          </a:p>
-          <a:p>
-            <a:r>
-              <a:rPr lang="en-US" dirty="0">
-                <a:latin typeface="Times New Roman" panose="02020603050405020304" pitchFamily="18" charset="0"/>
-                <a:cs typeface="Times New Roman" panose="02020603050405020304" pitchFamily="18" charset="0"/>
-              </a:rPr>
-              <a:t>Analyze housing prices across regions. </a:t>
-            </a:r>
-          </a:p>
-          <a:p>
-            <a:r>
-              <a:rPr lang="en-US" dirty="0">
-                <a:latin typeface="Times New Roman" panose="02020603050405020304" pitchFamily="18" charset="0"/>
-                <a:cs typeface="Times New Roman" panose="02020603050405020304" pitchFamily="18" charset="0"/>
-              </a:rPr>
-              <a:t>Compare different property types. </a:t>
-            </a:r>
-          </a:p>
-          <a:p>
-            <a:r>
-              <a:rPr lang="en-US" dirty="0">
-                <a:latin typeface="Times New Roman" panose="02020603050405020304" pitchFamily="18" charset="0"/>
-                <a:cs typeface="Times New Roman" panose="02020603050405020304" pitchFamily="18" charset="0"/>
-              </a:rPr>
-              <a:t>Investigate negotiation outcomes. </a:t>
-            </a:r>
-          </a:p>
-          <a:p>
-            <a:r>
-              <a:rPr lang="en-US" dirty="0">
-                <a:latin typeface="Times New Roman" panose="02020603050405020304" pitchFamily="18" charset="0"/>
-                <a:cs typeface="Times New Roman" panose="02020603050405020304" pitchFamily="18" charset="0"/>
-              </a:rPr>
-              <a:t>Study the effect of property age. </a:t>
-            </a:r>
-          </a:p>
-          <a:p>
-            <a:r>
-              <a:rPr lang="en-US" dirty="0">
-                <a:latin typeface="Times New Roman" panose="02020603050405020304" pitchFamily="18" charset="0"/>
-                <a:cs typeface="Times New Roman" panose="02020603050405020304" pitchFamily="18" charset="0"/>
-              </a:rPr>
-              <a:t>Examine housing price trends using visualization techniques.</a:t>
-            </a:r>
-          </a:p>
-        </p:txBody>
-      </p:sp>
-    </p:spTree>
-    <p:extLst>
-      <p:ext uri="{BB962C8B-B14F-4D97-AF65-F5344CB8AC3E}">
-        <p14:creationId xmlns:p14="http://schemas.microsoft.com/office/powerpoint/2010/main" val="2330155842"/>
-      </p:ext>
-    </p:extLst>
-  </p:cSld>
-  <p:clrMapOvr>
-    <a:masterClrMapping/>
-  </p:clrMapOvr>
-</p:sld>
-</file>
-
-<file path=ppt/slides/slide50.xml><?xml version="1.0" encoding="utf-8"?>
-<p:sld xmlns:a="http://schemas.openxmlformats.org/drawingml/2006/main" xmlns:r="http://schemas.openxmlformats.org/officeDocument/2006/relationships" xmlns:p="http://schemas.openxmlformats.org/presentationml/2006/main">
-  <p:cSld>
-    <p:spTree>
-      <p:nvGrpSpPr>
-        <p:cNvPr id="1" name=""/>
-        <p:cNvGrpSpPr/>
-        <p:nvPr/>
-      </p:nvGrpSpPr>
-      <p:grpSpPr>
-        <a:xfrm>
-          <a:off x="0" y="0"/>
-          <a:ext cx="0" cy="0"/>
-          <a:chOff x="0" y="0"/>
-          <a:chExt cx="0" cy="0"/>
-        </a:xfrm>
-      </p:grpSpPr>
-      <p:sp>
-        <p:nvSpPr>
-          <p:cNvPr id="2" name="Title 1">
-            <a:extLst>
-              <a:ext uri="{FF2B5EF4-FFF2-40B4-BE49-F238E27FC236}">
-                <a16:creationId xmlns:a16="http://schemas.microsoft.com/office/drawing/2014/main" id="{49B8C627-F9E0-B3AF-A77F-431DECBB3933}"/>
-              </a:ext>
-            </a:extLst>
-          </p:cNvPr>
-          <p:cNvSpPr>
-            <a:spLocks noGrp="1"/>
-          </p:cNvSpPr>
-          <p:nvPr>
-            <p:ph type="title"/>
-          </p:nvPr>
-        </p:nvSpPr>
-        <p:spPr/>
-        <p:txBody>
-          <a:bodyPr/>
-          <a:lstStyle/>
-          <a:p>
-            <a:r>
-              <a:rPr lang="en-US" dirty="0">
-                <a:latin typeface="Times New Roman" panose="02020603050405020304" pitchFamily="18" charset="0"/>
-                <a:cs typeface="Times New Roman" panose="02020603050405020304" pitchFamily="18" charset="0"/>
-              </a:rPr>
-              <a:t>KEY FINDINGS</a:t>
-            </a:r>
-          </a:p>
-        </p:txBody>
-      </p:sp>
-      <p:sp>
-        <p:nvSpPr>
-          <p:cNvPr id="3" name="Content Placeholder 2">
-            <a:extLst>
-              <a:ext uri="{FF2B5EF4-FFF2-40B4-BE49-F238E27FC236}">
-                <a16:creationId xmlns:a16="http://schemas.microsoft.com/office/drawing/2014/main" id="{FA7FCB0A-BC28-1D67-1F91-F79CAB5784E5}"/>
-              </a:ext>
-            </a:extLst>
-          </p:cNvPr>
-          <p:cNvSpPr>
-            <a:spLocks noGrp="1"/>
-          </p:cNvSpPr>
-          <p:nvPr>
-            <p:ph idx="1"/>
-          </p:nvPr>
-        </p:nvSpPr>
-        <p:spPr/>
-        <p:txBody>
-          <a:bodyPr>
-            <a:normAutofit fontScale="92500" lnSpcReduction="20000"/>
-          </a:bodyPr>
-          <a:lstStyle/>
-          <a:p>
-            <a:r>
-              <a:rPr lang="en-US" dirty="0">
-                <a:latin typeface="Times New Roman" panose="02020603050405020304" pitchFamily="18" charset="0"/>
-                <a:cs typeface="Times New Roman" panose="02020603050405020304" pitchFamily="18" charset="0"/>
-              </a:rPr>
-              <a:t>Region strongly influences housing prices. </a:t>
-            </a:r>
-          </a:p>
-          <a:p>
-            <a:r>
-              <a:rPr lang="en-US" dirty="0">
-                <a:latin typeface="Times New Roman" panose="02020603050405020304" pitchFamily="18" charset="0"/>
-                <a:cs typeface="Times New Roman" panose="02020603050405020304" pitchFamily="18" charset="0"/>
-              </a:rPr>
-              <a:t>Property size positively affects purchase price. </a:t>
-            </a:r>
-          </a:p>
-          <a:p>
-            <a:r>
-              <a:rPr lang="en-US" dirty="0">
-                <a:latin typeface="Times New Roman" panose="02020603050405020304" pitchFamily="18" charset="0"/>
-                <a:cs typeface="Times New Roman" panose="02020603050405020304" pitchFamily="18" charset="0"/>
-              </a:rPr>
-              <a:t>Villas are generally more expensive. </a:t>
-            </a:r>
-          </a:p>
-          <a:p>
-            <a:r>
-              <a:rPr lang="en-US" dirty="0">
-                <a:latin typeface="Times New Roman" panose="02020603050405020304" pitchFamily="18" charset="0"/>
-                <a:cs typeface="Times New Roman" panose="02020603050405020304" pitchFamily="18" charset="0"/>
-              </a:rPr>
-              <a:t>Copenhagen remains the most expensive area. </a:t>
-            </a:r>
-          </a:p>
-          <a:p>
-            <a:r>
-              <a:rPr lang="en-US" dirty="0">
-                <a:latin typeface="Times New Roman" panose="02020603050405020304" pitchFamily="18" charset="0"/>
-                <a:cs typeface="Times New Roman" panose="02020603050405020304" pitchFamily="18" charset="0"/>
-              </a:rPr>
-              <a:t>Newer properties command higher prices. </a:t>
-            </a:r>
-          </a:p>
-          <a:p>
-            <a:r>
-              <a:rPr lang="en-US" dirty="0">
-                <a:latin typeface="Times New Roman" panose="02020603050405020304" pitchFamily="18" charset="0"/>
-                <a:cs typeface="Times New Roman" panose="02020603050405020304" pitchFamily="18" charset="0"/>
-              </a:rPr>
-              <a:t>Negotiation outcomes differ across regions. </a:t>
-            </a:r>
-          </a:p>
-          <a:p>
-            <a:r>
-              <a:rPr lang="en-US" dirty="0">
-                <a:latin typeface="Times New Roman" panose="02020603050405020304" pitchFamily="18" charset="0"/>
-                <a:cs typeface="Times New Roman" panose="02020603050405020304" pitchFamily="18" charset="0"/>
-              </a:rPr>
-              <a:t>Construction decade affects valuation. </a:t>
-            </a:r>
-          </a:p>
-          <a:p>
-            <a:r>
-              <a:rPr lang="en-US" dirty="0">
-                <a:latin typeface="Times New Roman" panose="02020603050405020304" pitchFamily="18" charset="0"/>
-                <a:cs typeface="Times New Roman" panose="02020603050405020304" pitchFamily="18" charset="0"/>
-              </a:rPr>
-              <a:t>Exploratory Data Analysis successfully identified market trends.</a:t>
-            </a:r>
-          </a:p>
-        </p:txBody>
-      </p:sp>
-    </p:spTree>
-    <p:extLst>
-      <p:ext uri="{BB962C8B-B14F-4D97-AF65-F5344CB8AC3E}">
-        <p14:creationId xmlns:p14="http://schemas.microsoft.com/office/powerpoint/2010/main" val="1939795852"/>
-      </p:ext>
-    </p:extLst>
-  </p:cSld>
-  <p:clrMapOvr>
-    <a:masterClrMapping/>
-  </p:clrMapOvr>
-</p:sld>
-</file>
-
-<file path=ppt/slides/slide51.xml><?xml version="1.0" encoding="utf-8"?>
-<p:sld xmlns:a="http://schemas.openxmlformats.org/drawingml/2006/main" xmlns:r="http://schemas.openxmlformats.org/officeDocument/2006/relationships" xmlns:p="http://schemas.openxmlformats.org/presentationml/2006/main">
-  <p:cSld>
-    <p:spTree>
-      <p:nvGrpSpPr>
-        <p:cNvPr id="1" name=""/>
-        <p:cNvGrpSpPr/>
-        <p:nvPr/>
-      </p:nvGrpSpPr>
-      <p:grpSpPr>
-        <a:xfrm>
-          <a:off x="0" y="0"/>
-          <a:ext cx="0" cy="0"/>
-          <a:chOff x="0" y="0"/>
-          <a:chExt cx="0" cy="0"/>
-        </a:xfrm>
-      </p:grpSpPr>
-      <p:sp>
-        <p:nvSpPr>
-          <p:cNvPr id="2" name="Title 1">
-            <a:extLst>
-              <a:ext uri="{FF2B5EF4-FFF2-40B4-BE49-F238E27FC236}">
-                <a16:creationId xmlns:a16="http://schemas.microsoft.com/office/drawing/2014/main" id="{0153CDDF-CD35-BCEF-E5AC-58ABF48908A6}"/>
-              </a:ext>
-            </a:extLst>
-          </p:cNvPr>
-          <p:cNvSpPr>
-            <a:spLocks noGrp="1"/>
-          </p:cNvSpPr>
-          <p:nvPr>
-            <p:ph type="title"/>
-          </p:nvPr>
-        </p:nvSpPr>
-        <p:spPr/>
-        <p:txBody>
-          <a:bodyPr/>
-          <a:lstStyle/>
-          <a:p>
-            <a:r>
-              <a:rPr lang="en-US" dirty="0">
-                <a:latin typeface="Times New Roman" panose="02020603050405020304" pitchFamily="18" charset="0"/>
-                <a:cs typeface="Times New Roman" panose="02020603050405020304" pitchFamily="18" charset="0"/>
-              </a:rPr>
-              <a:t>RECOMMENDATIONS</a:t>
-            </a:r>
-          </a:p>
-        </p:txBody>
-      </p:sp>
-      <p:sp>
-        <p:nvSpPr>
-          <p:cNvPr id="3" name="Content Placeholder 2">
-            <a:extLst>
-              <a:ext uri="{FF2B5EF4-FFF2-40B4-BE49-F238E27FC236}">
-                <a16:creationId xmlns:a16="http://schemas.microsoft.com/office/drawing/2014/main" id="{5426E9DE-4F84-7CEA-06F4-D269D52A0A4D}"/>
-              </a:ext>
-            </a:extLst>
-          </p:cNvPr>
-          <p:cNvSpPr>
-            <a:spLocks noGrp="1"/>
-          </p:cNvSpPr>
-          <p:nvPr>
-            <p:ph idx="1"/>
-          </p:nvPr>
-        </p:nvSpPr>
-        <p:spPr/>
-        <p:txBody>
-          <a:bodyPr>
-            <a:normAutofit/>
-          </a:bodyPr>
-          <a:lstStyle/>
-          <a:p>
-            <a:r>
-              <a:rPr lang="en-US" b="1" dirty="0"/>
-              <a:t>Buyers: </a:t>
-            </a:r>
-            <a:r>
-              <a:rPr lang="en-US" dirty="0"/>
-              <a:t>Consider older houses for affordability.</a:t>
-            </a:r>
-          </a:p>
-          <a:p>
-            <a:r>
-              <a:rPr lang="en-US" b="1" dirty="0"/>
-              <a:t>Investors: </a:t>
-            </a:r>
-            <a:r>
-              <a:rPr lang="en-US" dirty="0"/>
-              <a:t>Focus on high-growth regions.</a:t>
-            </a:r>
-          </a:p>
-          <a:p>
-            <a:r>
-              <a:rPr lang="en-US" b="1" dirty="0"/>
-              <a:t>Government: </a:t>
-            </a:r>
-            <a:r>
-              <a:rPr lang="en-US" dirty="0"/>
-              <a:t>Promote balanced regional development.</a:t>
-            </a:r>
-          </a:p>
-          <a:p>
-            <a:r>
-              <a:rPr lang="en-US" b="1" dirty="0"/>
-              <a:t>Real Estate Agencies: </a:t>
-            </a:r>
-            <a:r>
-              <a:rPr lang="en-US" dirty="0"/>
-              <a:t>Use market insights for pricing strategies.</a:t>
-            </a:r>
-          </a:p>
-          <a:p>
-            <a:r>
-              <a:rPr lang="en-US" b="1" dirty="0"/>
-              <a:t>Future Researchers: </a:t>
-            </a:r>
-            <a:r>
-              <a:rPr lang="en-US" dirty="0"/>
-              <a:t>Develop machine learning models for price prediction.</a:t>
-            </a:r>
-          </a:p>
-          <a:p>
-            <a:endParaRPr lang="en-US" dirty="0"/>
-          </a:p>
-        </p:txBody>
-      </p:sp>
-    </p:spTree>
-    <p:extLst>
-      <p:ext uri="{BB962C8B-B14F-4D97-AF65-F5344CB8AC3E}">
-        <p14:creationId xmlns:p14="http://schemas.microsoft.com/office/powerpoint/2010/main" val="3113668641"/>
-      </p:ext>
-    </p:extLst>
-  </p:cSld>
-  <p:clrMapOvr>
-    <a:masterClrMapping/>
-  </p:clrMapOvr>
-</p:sld>
-</file>
-
 <file path=ppt/slides/slide52.xml><?xml version="1.0" encoding="utf-8"?>
 <p:sld xmlns:a="http://schemas.openxmlformats.org/drawingml/2006/main" xmlns:r="http://schemas.openxmlformats.org/officeDocument/2006/relationships" xmlns:p="http://schemas.openxmlformats.org/presentationml/2006/main">
   <p:cSld>
@@ -11451,7 +11426,7 @@
           <p:cNvPr id="2" name="Title 1">
             <a:extLst>
               <a:ext uri="{FF2B5EF4-FFF2-40B4-BE49-F238E27FC236}">
-                <a16:creationId xmlns:a16="http://schemas.microsoft.com/office/drawing/2014/main" id="{E4DAD861-1E97-9592-A23D-5CCD9B138240}"/>
+                <a16:creationId xmlns:a16="http://schemas.microsoft.com/office/drawing/2014/main" id="{73A862B1-C3BC-C83F-32F7-8E8629F22F14}"/>
               </a:ext>
             </a:extLst>
           </p:cNvPr>
@@ -11464,18 +11439,17 @@
         </p:nvSpPr>
         <p:spPr/>
         <p:txBody>
-          <a:bodyPr>
-            <a:normAutofit/>
-          </a:bodyPr>
-          <a:lstStyle/>
-          <a:p>
-            <a:r>
-              <a:rPr lang="en-US" dirty="0">
-                <a:latin typeface="Times New Roman" panose="02020603050405020304" pitchFamily="18" charset="0"/>
-                <a:cs typeface="Times New Roman" panose="02020603050405020304" pitchFamily="18" charset="0"/>
-              </a:rPr>
-              <a:t>LIMITATIONS</a:t>
-            </a:r>
+          <a:bodyPr/>
+          <a:lstStyle/>
+          <a:p>
+            <a:r>
+              <a:rPr lang="en-US" dirty="0">
+                <a:latin typeface="Times New Roman" panose="02020603050405020304" pitchFamily="18" charset="0"/>
+                <a:cs typeface="Times New Roman" panose="02020603050405020304" pitchFamily="18" charset="0"/>
+              </a:rPr>
+              <a:t>Property Age and Construction Decade</a:t>
+            </a:r>
+            <a:endParaRPr lang="en-US" dirty="0"/>
           </a:p>
         </p:txBody>
       </p:sp>
@@ -11484,7 +11458,7 @@
           <p:cNvPr id="3" name="Content Placeholder 2">
             <a:extLst>
               <a:ext uri="{FF2B5EF4-FFF2-40B4-BE49-F238E27FC236}">
-                <a16:creationId xmlns:a16="http://schemas.microsoft.com/office/drawing/2014/main" id="{4E1D73CC-BF44-61B6-B995-F8A10CA4B5C5}"/>
+                <a16:creationId xmlns:a16="http://schemas.microsoft.com/office/drawing/2014/main" id="{B05366C7-3268-C83E-4EB9-D8B19AD0A8BC}"/>
               </a:ext>
             </a:extLst>
           </p:cNvPr>
@@ -11497,51 +11471,71 @@
         </p:nvSpPr>
         <p:spPr/>
         <p:txBody>
-          <a:bodyPr/>
-          <a:lstStyle/>
-          <a:p>
-            <a:r>
-              <a:rPr lang="en-US" dirty="0">
-                <a:latin typeface="Times New Roman" panose="02020603050405020304" pitchFamily="18" charset="0"/>
-                <a:cs typeface="Times New Roman" panose="02020603050405020304" pitchFamily="18" charset="0"/>
-              </a:rPr>
-              <a:t>Dataset limited to available variables. </a:t>
-            </a:r>
-          </a:p>
-          <a:p>
-            <a:r>
-              <a:rPr lang="en-US" dirty="0">
-                <a:latin typeface="Times New Roman" panose="02020603050405020304" pitchFamily="18" charset="0"/>
-                <a:cs typeface="Times New Roman" panose="02020603050405020304" pitchFamily="18" charset="0"/>
-              </a:rPr>
-              <a:t>Inflation was not considered. </a:t>
-            </a:r>
-          </a:p>
-          <a:p>
-            <a:r>
-              <a:rPr lang="en-US" dirty="0">
-                <a:latin typeface="Times New Roman" panose="02020603050405020304" pitchFamily="18" charset="0"/>
-                <a:cs typeface="Times New Roman" panose="02020603050405020304" pitchFamily="18" charset="0"/>
-              </a:rPr>
-              <a:t>Interest rates were excluded. </a:t>
-            </a:r>
-          </a:p>
-          <a:p>
-            <a:r>
-              <a:rPr lang="en-US" dirty="0">
-                <a:latin typeface="Times New Roman" panose="02020603050405020304" pitchFamily="18" charset="0"/>
-                <a:cs typeface="Times New Roman" panose="02020603050405020304" pitchFamily="18" charset="0"/>
-              </a:rPr>
-              <a:t>Economic indicators were unavailable. </a:t>
-            </a:r>
-          </a:p>
-          <a:p>
-            <a:r>
-              <a:rPr lang="en-US" dirty="0">
-                <a:latin typeface="Times New Roman" panose="02020603050405020304" pitchFamily="18" charset="0"/>
-                <a:cs typeface="Times New Roman" panose="02020603050405020304" pitchFamily="18" charset="0"/>
-              </a:rPr>
-              <a:t>Results are limited to the study period.</a:t>
+          <a:bodyPr>
+            <a:normAutofit fontScale="92500" lnSpcReduction="10000"/>
+          </a:bodyPr>
+          <a:lstStyle/>
+          <a:p>
+            <a:r>
+              <a:rPr lang="en-US" b="1" dirty="0">
+                <a:latin typeface="Times New Roman" panose="02020603050405020304" pitchFamily="18" charset="0"/>
+                <a:cs typeface="Times New Roman" panose="02020603050405020304" pitchFamily="18" charset="0"/>
+              </a:rPr>
+              <a:t>Findings</a:t>
+            </a:r>
+          </a:p>
+          <a:p>
+            <a:r>
+              <a:rPr lang="en-US" dirty="0">
+                <a:latin typeface="Times New Roman" panose="02020603050405020304" pitchFamily="18" charset="0"/>
+                <a:cs typeface="Times New Roman" panose="02020603050405020304" pitchFamily="18" charset="0"/>
+              </a:rPr>
+              <a:t>Newer properties generally have higher average prices. </a:t>
+            </a:r>
+          </a:p>
+          <a:p>
+            <a:r>
+              <a:rPr lang="en-US" dirty="0">
+                <a:latin typeface="Times New Roman" panose="02020603050405020304" pitchFamily="18" charset="0"/>
+                <a:cs typeface="Times New Roman" panose="02020603050405020304" pitchFamily="18" charset="0"/>
+              </a:rPr>
+              <a:t>Housing prices decrease as buildings age. </a:t>
+            </a:r>
+          </a:p>
+          <a:p>
+            <a:r>
+              <a:rPr lang="en-US" dirty="0">
+                <a:latin typeface="Times New Roman" panose="02020603050405020304" pitchFamily="18" charset="0"/>
+                <a:cs typeface="Times New Roman" panose="02020603050405020304" pitchFamily="18" charset="0"/>
+              </a:rPr>
+              <a:t>Some older historic properties remain valuable. </a:t>
+            </a:r>
+          </a:p>
+          <a:p>
+            <a:r>
+              <a:rPr lang="en-US" dirty="0">
+                <a:latin typeface="Times New Roman" panose="02020603050405020304" pitchFamily="18" charset="0"/>
+                <a:cs typeface="Times New Roman" panose="02020603050405020304" pitchFamily="18" charset="0"/>
+              </a:rPr>
+              <a:t>Construction decade influences market value. </a:t>
+            </a:r>
+          </a:p>
+          <a:p>
+            <a:r>
+              <a:rPr lang="en-US" b="1" dirty="0">
+                <a:latin typeface="Times New Roman" panose="02020603050405020304" pitchFamily="18" charset="0"/>
+                <a:cs typeface="Times New Roman" panose="02020603050405020304" pitchFamily="18" charset="0"/>
+              </a:rPr>
+              <a:t>Conclusion</a:t>
+            </a:r>
+          </a:p>
+          <a:p>
+            <a:r>
+              <a:rPr lang="en-US" dirty="0">
+                <a:latin typeface="Times New Roman" panose="02020603050405020304" pitchFamily="18" charset="0"/>
+                <a:cs typeface="Times New Roman" panose="02020603050405020304" pitchFamily="18" charset="0"/>
+              </a:rPr>
+              <a:t>Property age and construction period significantly affect housing prices.</a:t>
             </a:r>
           </a:p>
           <a:p>
@@ -11555,7 +11549,7 @@
     </p:spTree>
     <p:extLst>
       <p:ext uri="{BB962C8B-B14F-4D97-AF65-F5344CB8AC3E}">
-        <p14:creationId xmlns:p14="http://schemas.microsoft.com/office/powerpoint/2010/main" val="3458179084"/>
+        <p14:creationId xmlns:p14="http://schemas.microsoft.com/office/powerpoint/2010/main" val="2301407379"/>
       </p:ext>
     </p:extLst>
   </p:cSld>
@@ -11587,6 +11581,299 @@
           <p:cNvPr id="2" name="Title 1">
             <a:extLst>
               <a:ext uri="{FF2B5EF4-FFF2-40B4-BE49-F238E27FC236}">
+                <a16:creationId xmlns:a16="http://schemas.microsoft.com/office/drawing/2014/main" id="{49B8C627-F9E0-B3AF-A77F-431DECBB3933}"/>
+              </a:ext>
+            </a:extLst>
+          </p:cNvPr>
+          <p:cNvSpPr>
+            <a:spLocks noGrp="1"/>
+          </p:cNvSpPr>
+          <p:nvPr>
+            <p:ph type="title"/>
+          </p:nvPr>
+        </p:nvSpPr>
+        <p:spPr/>
+        <p:txBody>
+          <a:bodyPr/>
+          <a:lstStyle/>
+          <a:p>
+            <a:r>
+              <a:rPr lang="en-US" dirty="0">
+                <a:latin typeface="Times New Roman" panose="02020603050405020304" pitchFamily="18" charset="0"/>
+                <a:cs typeface="Times New Roman" panose="02020603050405020304" pitchFamily="18" charset="0"/>
+              </a:rPr>
+              <a:t>KEY FINDINGS</a:t>
+            </a:r>
+          </a:p>
+        </p:txBody>
+      </p:sp>
+      <p:sp>
+        <p:nvSpPr>
+          <p:cNvPr id="3" name="Content Placeholder 2">
+            <a:extLst>
+              <a:ext uri="{FF2B5EF4-FFF2-40B4-BE49-F238E27FC236}">
+                <a16:creationId xmlns:a16="http://schemas.microsoft.com/office/drawing/2014/main" id="{FA7FCB0A-BC28-1D67-1F91-F79CAB5784E5}"/>
+              </a:ext>
+            </a:extLst>
+          </p:cNvPr>
+          <p:cNvSpPr>
+            <a:spLocks noGrp="1"/>
+          </p:cNvSpPr>
+          <p:nvPr>
+            <p:ph idx="1"/>
+          </p:nvPr>
+        </p:nvSpPr>
+        <p:spPr/>
+        <p:txBody>
+          <a:bodyPr>
+            <a:normAutofit fontScale="92500" lnSpcReduction="20000"/>
+          </a:bodyPr>
+          <a:lstStyle/>
+          <a:p>
+            <a:r>
+              <a:rPr lang="en-US" dirty="0">
+                <a:latin typeface="Times New Roman" panose="02020603050405020304" pitchFamily="18" charset="0"/>
+                <a:cs typeface="Times New Roman" panose="02020603050405020304" pitchFamily="18" charset="0"/>
+              </a:rPr>
+              <a:t>Region strongly influences housing prices. </a:t>
+            </a:r>
+          </a:p>
+          <a:p>
+            <a:r>
+              <a:rPr lang="en-US" dirty="0">
+                <a:latin typeface="Times New Roman" panose="02020603050405020304" pitchFamily="18" charset="0"/>
+                <a:cs typeface="Times New Roman" panose="02020603050405020304" pitchFamily="18" charset="0"/>
+              </a:rPr>
+              <a:t>Property size positively affects purchase price. </a:t>
+            </a:r>
+          </a:p>
+          <a:p>
+            <a:r>
+              <a:rPr lang="en-US" dirty="0">
+                <a:latin typeface="Times New Roman" panose="02020603050405020304" pitchFamily="18" charset="0"/>
+                <a:cs typeface="Times New Roman" panose="02020603050405020304" pitchFamily="18" charset="0"/>
+              </a:rPr>
+              <a:t>Villas are generally more expensive. </a:t>
+            </a:r>
+          </a:p>
+          <a:p>
+            <a:r>
+              <a:rPr lang="en-US" dirty="0">
+                <a:latin typeface="Times New Roman" panose="02020603050405020304" pitchFamily="18" charset="0"/>
+                <a:cs typeface="Times New Roman" panose="02020603050405020304" pitchFamily="18" charset="0"/>
+              </a:rPr>
+              <a:t>Copenhagen remains the most expensive area. </a:t>
+            </a:r>
+          </a:p>
+          <a:p>
+            <a:r>
+              <a:rPr lang="en-US" dirty="0">
+                <a:latin typeface="Times New Roman" panose="02020603050405020304" pitchFamily="18" charset="0"/>
+                <a:cs typeface="Times New Roman" panose="02020603050405020304" pitchFamily="18" charset="0"/>
+              </a:rPr>
+              <a:t>Newer properties command higher prices. </a:t>
+            </a:r>
+          </a:p>
+          <a:p>
+            <a:r>
+              <a:rPr lang="en-US" dirty="0">
+                <a:latin typeface="Times New Roman" panose="02020603050405020304" pitchFamily="18" charset="0"/>
+                <a:cs typeface="Times New Roman" panose="02020603050405020304" pitchFamily="18" charset="0"/>
+              </a:rPr>
+              <a:t>Negotiation outcomes differ across regions. </a:t>
+            </a:r>
+          </a:p>
+          <a:p>
+            <a:r>
+              <a:rPr lang="en-US" dirty="0">
+                <a:latin typeface="Times New Roman" panose="02020603050405020304" pitchFamily="18" charset="0"/>
+                <a:cs typeface="Times New Roman" panose="02020603050405020304" pitchFamily="18" charset="0"/>
+              </a:rPr>
+              <a:t>Construction decade affects valuation. </a:t>
+            </a:r>
+          </a:p>
+          <a:p>
+            <a:r>
+              <a:rPr lang="en-US" dirty="0">
+                <a:latin typeface="Times New Roman" panose="02020603050405020304" pitchFamily="18" charset="0"/>
+                <a:cs typeface="Times New Roman" panose="02020603050405020304" pitchFamily="18" charset="0"/>
+              </a:rPr>
+              <a:t>Exploratory Data Analysis successfully identified market trends.</a:t>
+            </a:r>
+          </a:p>
+        </p:txBody>
+      </p:sp>
+    </p:spTree>
+    <p:extLst>
+      <p:ext uri="{BB962C8B-B14F-4D97-AF65-F5344CB8AC3E}">
+        <p14:creationId xmlns:p14="http://schemas.microsoft.com/office/powerpoint/2010/main" val="1939795852"/>
+      </p:ext>
+    </p:extLst>
+  </p:cSld>
+  <p:clrMapOvr>
+    <a:masterClrMapping/>
+  </p:clrMapOvr>
+</p:sld>
+</file>
+
+<file path=ppt/slides/slide54.xml><?xml version="1.0" encoding="utf-8"?>
+<p:sld xmlns:a="http://schemas.openxmlformats.org/drawingml/2006/main" xmlns:r="http://schemas.openxmlformats.org/officeDocument/2006/relationships" xmlns:p="http://schemas.openxmlformats.org/presentationml/2006/main">
+  <p:cSld>
+    <p:spTree>
+      <p:nvGrpSpPr>
+        <p:cNvPr id="1" name=""/>
+        <p:cNvGrpSpPr/>
+        <p:nvPr/>
+      </p:nvGrpSpPr>
+      <p:grpSpPr>
+        <a:xfrm>
+          <a:off x="0" y="0"/>
+          <a:ext cx="0" cy="0"/>
+          <a:chOff x="0" y="0"/>
+          <a:chExt cx="0" cy="0"/>
+        </a:xfrm>
+      </p:grpSpPr>
+      <p:sp>
+        <p:nvSpPr>
+          <p:cNvPr id="2" name="Title 1">
+            <a:extLst>
+              <a:ext uri="{FF2B5EF4-FFF2-40B4-BE49-F238E27FC236}">
+                <a16:creationId xmlns:a16="http://schemas.microsoft.com/office/drawing/2014/main" id="{E4DAD861-1E97-9592-A23D-5CCD9B138240}"/>
+              </a:ext>
+            </a:extLst>
+          </p:cNvPr>
+          <p:cNvSpPr>
+            <a:spLocks noGrp="1"/>
+          </p:cNvSpPr>
+          <p:nvPr>
+            <p:ph type="title"/>
+          </p:nvPr>
+        </p:nvSpPr>
+        <p:spPr/>
+        <p:txBody>
+          <a:bodyPr>
+            <a:normAutofit/>
+          </a:bodyPr>
+          <a:lstStyle/>
+          <a:p>
+            <a:r>
+              <a:rPr lang="en-US" dirty="0">
+                <a:latin typeface="Times New Roman" panose="02020603050405020304" pitchFamily="18" charset="0"/>
+                <a:cs typeface="Times New Roman" panose="02020603050405020304" pitchFamily="18" charset="0"/>
+              </a:rPr>
+              <a:t>LIMITATIONS</a:t>
+            </a:r>
+          </a:p>
+        </p:txBody>
+      </p:sp>
+      <p:sp>
+        <p:nvSpPr>
+          <p:cNvPr id="3" name="Content Placeholder 2">
+            <a:extLst>
+              <a:ext uri="{FF2B5EF4-FFF2-40B4-BE49-F238E27FC236}">
+                <a16:creationId xmlns:a16="http://schemas.microsoft.com/office/drawing/2014/main" id="{4E1D73CC-BF44-61B6-B995-F8A10CA4B5C5}"/>
+              </a:ext>
+            </a:extLst>
+          </p:cNvPr>
+          <p:cNvSpPr>
+            <a:spLocks noGrp="1"/>
+          </p:cNvSpPr>
+          <p:nvPr>
+            <p:ph idx="1"/>
+          </p:nvPr>
+        </p:nvSpPr>
+        <p:spPr/>
+        <p:txBody>
+          <a:bodyPr/>
+          <a:lstStyle/>
+          <a:p>
+            <a:r>
+              <a:rPr lang="en-US" dirty="0">
+                <a:latin typeface="Times New Roman" panose="02020603050405020304" pitchFamily="18" charset="0"/>
+                <a:cs typeface="Times New Roman" panose="02020603050405020304" pitchFamily="18" charset="0"/>
+              </a:rPr>
+              <a:t>Dataset limited to available variables. </a:t>
+            </a:r>
+          </a:p>
+          <a:p>
+            <a:r>
+              <a:rPr lang="en-US" dirty="0">
+                <a:latin typeface="Times New Roman" panose="02020603050405020304" pitchFamily="18" charset="0"/>
+                <a:cs typeface="Times New Roman" panose="02020603050405020304" pitchFamily="18" charset="0"/>
+              </a:rPr>
+              <a:t>Inflation was not considered. </a:t>
+            </a:r>
+          </a:p>
+          <a:p>
+            <a:r>
+              <a:rPr lang="en-US" dirty="0">
+                <a:latin typeface="Times New Roman" panose="02020603050405020304" pitchFamily="18" charset="0"/>
+                <a:cs typeface="Times New Roman" panose="02020603050405020304" pitchFamily="18" charset="0"/>
+              </a:rPr>
+              <a:t>Interest rates were excluded. </a:t>
+            </a:r>
+          </a:p>
+          <a:p>
+            <a:r>
+              <a:rPr lang="en-US" dirty="0">
+                <a:latin typeface="Times New Roman" panose="02020603050405020304" pitchFamily="18" charset="0"/>
+                <a:cs typeface="Times New Roman" panose="02020603050405020304" pitchFamily="18" charset="0"/>
+              </a:rPr>
+              <a:t>Economic indicators were unavailable. </a:t>
+            </a:r>
+          </a:p>
+          <a:p>
+            <a:r>
+              <a:rPr lang="en-US" dirty="0">
+                <a:latin typeface="Times New Roman" panose="02020603050405020304" pitchFamily="18" charset="0"/>
+                <a:cs typeface="Times New Roman" panose="02020603050405020304" pitchFamily="18" charset="0"/>
+              </a:rPr>
+              <a:t>Results are limited to the study period.</a:t>
+            </a:r>
+          </a:p>
+          <a:p>
+            <a:endParaRPr lang="en-US" dirty="0">
+              <a:latin typeface="Times New Roman" panose="02020603050405020304" pitchFamily="18" charset="0"/>
+              <a:cs typeface="Times New Roman" panose="02020603050405020304" pitchFamily="18" charset="0"/>
+            </a:endParaRPr>
+          </a:p>
+        </p:txBody>
+      </p:sp>
+    </p:spTree>
+    <p:extLst>
+      <p:ext uri="{BB962C8B-B14F-4D97-AF65-F5344CB8AC3E}">
+        <p14:creationId xmlns:p14="http://schemas.microsoft.com/office/powerpoint/2010/main" val="3458179084"/>
+      </p:ext>
+    </p:extLst>
+  </p:cSld>
+  <p:clrMapOvr>
+    <a:masterClrMapping/>
+  </p:clrMapOvr>
+</p:sld>
+</file>
+
+<file path=ppt/slides/slide55.xml><?xml version="1.0" encoding="utf-8"?>
+<p:sld xmlns:a="http://schemas.openxmlformats.org/drawingml/2006/main" xmlns:r="http://schemas.openxmlformats.org/officeDocument/2006/relationships" xmlns:p="http://schemas.openxmlformats.org/presentationml/2006/main">
+  <p:cSld>
+    <p:spTree>
+      <p:nvGrpSpPr>
+        <p:cNvPr id="1" name=""/>
+        <p:cNvGrpSpPr/>
+        <p:nvPr/>
+      </p:nvGrpSpPr>
+      <p:grpSpPr>
+        <a:xfrm>
+          <a:off x="0" y="0"/>
+          <a:ext cx="0" cy="0"/>
+          <a:chOff x="0" y="0"/>
+          <a:chExt cx="0" cy="0"/>
+        </a:xfrm>
+      </p:grpSpPr>
+      <p:sp>
+        <p:nvSpPr>
+          <p:cNvPr id="2" name="Title 1">
+            <a:extLst>
+              <a:ext uri="{FF2B5EF4-FFF2-40B4-BE49-F238E27FC236}">
                 <a16:creationId xmlns:a16="http://schemas.microsoft.com/office/drawing/2014/main" id="{42002C5A-3DC9-9DAC-FF90-0AD8DAC5FA8C}"/>
               </a:ext>
             </a:extLst>
@@ -11677,7 +11964,398 @@
 </p:sld>
 </file>
 
-<file path=ppt/slides/slide54.xml><?xml version="1.0" encoding="utf-8"?>
+<file path=ppt/slides/slide56.xml><?xml version="1.0" encoding="utf-8"?>
+<p:sld xmlns:a="http://schemas.openxmlformats.org/drawingml/2006/main" xmlns:r="http://schemas.openxmlformats.org/officeDocument/2006/relationships" xmlns:p="http://schemas.openxmlformats.org/presentationml/2006/main">
+  <p:cSld>
+    <p:spTree>
+      <p:nvGrpSpPr>
+        <p:cNvPr id="1" name=""/>
+        <p:cNvGrpSpPr/>
+        <p:nvPr/>
+      </p:nvGrpSpPr>
+      <p:grpSpPr>
+        <a:xfrm>
+          <a:off x="0" y="0"/>
+          <a:ext cx="0" cy="0"/>
+          <a:chOff x="0" y="0"/>
+          <a:chExt cx="0" cy="0"/>
+        </a:xfrm>
+      </p:grpSpPr>
+      <p:sp>
+        <p:nvSpPr>
+          <p:cNvPr id="2" name="Title 1">
+            <a:extLst>
+              <a:ext uri="{FF2B5EF4-FFF2-40B4-BE49-F238E27FC236}">
+                <a16:creationId xmlns:a16="http://schemas.microsoft.com/office/drawing/2014/main" id="{0153CDDF-CD35-BCEF-E5AC-58ABF48908A6}"/>
+              </a:ext>
+            </a:extLst>
+          </p:cNvPr>
+          <p:cNvSpPr>
+            <a:spLocks noGrp="1"/>
+          </p:cNvSpPr>
+          <p:nvPr>
+            <p:ph type="title"/>
+          </p:nvPr>
+        </p:nvSpPr>
+        <p:spPr/>
+        <p:txBody>
+          <a:bodyPr/>
+          <a:lstStyle/>
+          <a:p>
+            <a:r>
+              <a:rPr lang="en-US" dirty="0">
+                <a:latin typeface="Times New Roman" panose="02020603050405020304" pitchFamily="18" charset="0"/>
+                <a:cs typeface="Times New Roman" panose="02020603050405020304" pitchFamily="18" charset="0"/>
+              </a:rPr>
+              <a:t>RECOMMENDATIONS</a:t>
+            </a:r>
+          </a:p>
+        </p:txBody>
+      </p:sp>
+      <p:sp>
+        <p:nvSpPr>
+          <p:cNvPr id="3" name="Content Placeholder 2">
+            <a:extLst>
+              <a:ext uri="{FF2B5EF4-FFF2-40B4-BE49-F238E27FC236}">
+                <a16:creationId xmlns:a16="http://schemas.microsoft.com/office/drawing/2014/main" id="{5426E9DE-4F84-7CEA-06F4-D269D52A0A4D}"/>
+              </a:ext>
+            </a:extLst>
+          </p:cNvPr>
+          <p:cNvSpPr>
+            <a:spLocks noGrp="1"/>
+          </p:cNvSpPr>
+          <p:nvPr>
+            <p:ph idx="1"/>
+          </p:nvPr>
+        </p:nvSpPr>
+        <p:spPr/>
+        <p:txBody>
+          <a:bodyPr>
+            <a:normAutofit/>
+          </a:bodyPr>
+          <a:lstStyle/>
+          <a:p>
+            <a:r>
+              <a:rPr lang="en-US" b="1" dirty="0">
+                <a:latin typeface="Times New Roman" panose="02020603050405020304" pitchFamily="18" charset="0"/>
+                <a:cs typeface="Times New Roman" panose="02020603050405020304" pitchFamily="18" charset="0"/>
+              </a:rPr>
+              <a:t>Buyers: </a:t>
+            </a:r>
+            <a:r>
+              <a:rPr lang="en-US" dirty="0">
+                <a:latin typeface="Times New Roman" panose="02020603050405020304" pitchFamily="18" charset="0"/>
+                <a:cs typeface="Times New Roman" panose="02020603050405020304" pitchFamily="18" charset="0"/>
+              </a:rPr>
+              <a:t>Consider older houses for affordability.</a:t>
+            </a:r>
+          </a:p>
+          <a:p>
+            <a:r>
+              <a:rPr lang="en-US" b="1" dirty="0">
+                <a:latin typeface="Times New Roman" panose="02020603050405020304" pitchFamily="18" charset="0"/>
+                <a:cs typeface="Times New Roman" panose="02020603050405020304" pitchFamily="18" charset="0"/>
+              </a:rPr>
+              <a:t>Investors: </a:t>
+            </a:r>
+            <a:r>
+              <a:rPr lang="en-US" dirty="0">
+                <a:latin typeface="Times New Roman" panose="02020603050405020304" pitchFamily="18" charset="0"/>
+                <a:cs typeface="Times New Roman" panose="02020603050405020304" pitchFamily="18" charset="0"/>
+              </a:rPr>
+              <a:t>Focus on high-growth regions.</a:t>
+            </a:r>
+          </a:p>
+          <a:p>
+            <a:r>
+              <a:rPr lang="en-US" b="1" dirty="0">
+                <a:latin typeface="Times New Roman" panose="02020603050405020304" pitchFamily="18" charset="0"/>
+                <a:cs typeface="Times New Roman" panose="02020603050405020304" pitchFamily="18" charset="0"/>
+              </a:rPr>
+              <a:t>Government: </a:t>
+            </a:r>
+            <a:r>
+              <a:rPr lang="en-US" dirty="0">
+                <a:latin typeface="Times New Roman" panose="02020603050405020304" pitchFamily="18" charset="0"/>
+                <a:cs typeface="Times New Roman" panose="02020603050405020304" pitchFamily="18" charset="0"/>
+              </a:rPr>
+              <a:t>Promote balanced regional development.</a:t>
+            </a:r>
+          </a:p>
+          <a:p>
+            <a:r>
+              <a:rPr lang="en-US" b="1" dirty="0">
+                <a:latin typeface="Times New Roman" panose="02020603050405020304" pitchFamily="18" charset="0"/>
+                <a:cs typeface="Times New Roman" panose="02020603050405020304" pitchFamily="18" charset="0"/>
+              </a:rPr>
+              <a:t>Real Estate Agencies: </a:t>
+            </a:r>
+            <a:r>
+              <a:rPr lang="en-US" dirty="0">
+                <a:latin typeface="Times New Roman" panose="02020603050405020304" pitchFamily="18" charset="0"/>
+                <a:cs typeface="Times New Roman" panose="02020603050405020304" pitchFamily="18" charset="0"/>
+              </a:rPr>
+              <a:t>Use market insights for pricing strategies.</a:t>
+            </a:r>
+          </a:p>
+          <a:p>
+            <a:r>
+              <a:rPr lang="en-US" b="1" dirty="0">
+                <a:latin typeface="Times New Roman" panose="02020603050405020304" pitchFamily="18" charset="0"/>
+                <a:cs typeface="Times New Roman" panose="02020603050405020304" pitchFamily="18" charset="0"/>
+              </a:rPr>
+              <a:t>Future Researchers: </a:t>
+            </a:r>
+            <a:r>
+              <a:rPr lang="en-US" dirty="0">
+                <a:latin typeface="Times New Roman" panose="02020603050405020304" pitchFamily="18" charset="0"/>
+                <a:cs typeface="Times New Roman" panose="02020603050405020304" pitchFamily="18" charset="0"/>
+              </a:rPr>
+              <a:t>Develop machine learning models for price prediction.</a:t>
+            </a:r>
+          </a:p>
+          <a:p>
+            <a:endParaRPr lang="en-US" dirty="0">
+              <a:latin typeface="Times New Roman" panose="02020603050405020304" pitchFamily="18" charset="0"/>
+              <a:cs typeface="Times New Roman" panose="02020603050405020304" pitchFamily="18" charset="0"/>
+            </a:endParaRPr>
+          </a:p>
+        </p:txBody>
+      </p:sp>
+    </p:spTree>
+    <p:extLst>
+      <p:ext uri="{BB962C8B-B14F-4D97-AF65-F5344CB8AC3E}">
+        <p14:creationId xmlns:p14="http://schemas.microsoft.com/office/powerpoint/2010/main" val="3113668641"/>
+      </p:ext>
+    </p:extLst>
+  </p:cSld>
+  <p:clrMapOvr>
+    <a:masterClrMapping/>
+  </p:clrMapOvr>
+</p:sld>
+</file>
+
+<file path=ppt/slides/slide57.xml><?xml version="1.0" encoding="utf-8"?>
+<p:sld xmlns:a="http://schemas.openxmlformats.org/drawingml/2006/main" xmlns:r="http://schemas.openxmlformats.org/officeDocument/2006/relationships" xmlns:p="http://schemas.openxmlformats.org/presentationml/2006/main">
+  <p:cSld>
+    <p:spTree>
+      <p:nvGrpSpPr>
+        <p:cNvPr id="1" name=""/>
+        <p:cNvGrpSpPr/>
+        <p:nvPr/>
+      </p:nvGrpSpPr>
+      <p:grpSpPr>
+        <a:xfrm>
+          <a:off x="0" y="0"/>
+          <a:ext cx="0" cy="0"/>
+          <a:chOff x="0" y="0"/>
+          <a:chExt cx="0" cy="0"/>
+        </a:xfrm>
+      </p:grpSpPr>
+      <p:sp>
+        <p:nvSpPr>
+          <p:cNvPr id="2" name="Title 1">
+            <a:extLst>
+              <a:ext uri="{FF2B5EF4-FFF2-40B4-BE49-F238E27FC236}">
+                <a16:creationId xmlns:a16="http://schemas.microsoft.com/office/drawing/2014/main" id="{53955069-17C8-9C91-2F57-B1B1C742DC84}"/>
+              </a:ext>
+            </a:extLst>
+          </p:cNvPr>
+          <p:cNvSpPr>
+            <a:spLocks noGrp="1"/>
+          </p:cNvSpPr>
+          <p:nvPr>
+            <p:ph type="title"/>
+          </p:nvPr>
+        </p:nvSpPr>
+        <p:spPr/>
+        <p:txBody>
+          <a:bodyPr/>
+          <a:lstStyle/>
+          <a:p>
+            <a:r>
+              <a:rPr lang="en-US" dirty="0">
+                <a:latin typeface="Times New Roman" panose="02020603050405020304" pitchFamily="18" charset="0"/>
+                <a:cs typeface="Times New Roman" panose="02020603050405020304" pitchFamily="18" charset="0"/>
+              </a:rPr>
+              <a:t>References</a:t>
+            </a:r>
+          </a:p>
+        </p:txBody>
+      </p:sp>
+      <p:sp>
+        <p:nvSpPr>
+          <p:cNvPr id="3" name="Content Placeholder 2">
+            <a:extLst>
+              <a:ext uri="{FF2B5EF4-FFF2-40B4-BE49-F238E27FC236}">
+                <a16:creationId xmlns:a16="http://schemas.microsoft.com/office/drawing/2014/main" id="{01ED2D77-1CD6-1CD3-F1D2-AAAAD64FE283}"/>
+              </a:ext>
+            </a:extLst>
+          </p:cNvPr>
+          <p:cNvSpPr>
+            <a:spLocks noGrp="1"/>
+          </p:cNvSpPr>
+          <p:nvPr>
+            <p:ph idx="1"/>
+          </p:nvPr>
+        </p:nvSpPr>
+        <p:spPr/>
+        <p:txBody>
+          <a:bodyPr>
+            <a:normAutofit fontScale="92500" lnSpcReduction="20000"/>
+          </a:bodyPr>
+          <a:lstStyle/>
+          <a:p>
+            <a:r>
+              <a:rPr lang="en-US" dirty="0">
+                <a:latin typeface="Times New Roman" panose="02020603050405020304" pitchFamily="18" charset="0"/>
+                <a:cs typeface="Times New Roman" panose="02020603050405020304" pitchFamily="18" charset="0"/>
+              </a:rPr>
+              <a:t>Rosen, S. (1974). Hedonic prices and implicit markets: Product differentiation in pure competition. </a:t>
+            </a:r>
+            <a:r>
+              <a:rPr lang="en-US" i="1" dirty="0">
+                <a:latin typeface="Times New Roman" panose="02020603050405020304" pitchFamily="18" charset="0"/>
+                <a:cs typeface="Times New Roman" panose="02020603050405020304" pitchFamily="18" charset="0"/>
+              </a:rPr>
+              <a:t>Journal of Political Economy, 82</a:t>
+            </a:r>
+            <a:r>
+              <a:rPr lang="en-US" dirty="0">
+                <a:latin typeface="Times New Roman" panose="02020603050405020304" pitchFamily="18" charset="0"/>
+                <a:cs typeface="Times New Roman" panose="02020603050405020304" pitchFamily="18" charset="0"/>
+              </a:rPr>
+              <a:t>(1), 34–55.</a:t>
+            </a:r>
+          </a:p>
+          <a:p>
+            <a:r>
+              <a:rPr lang="en-US" dirty="0">
+                <a:latin typeface="Times New Roman" panose="02020603050405020304" pitchFamily="18" charset="0"/>
+                <a:cs typeface="Times New Roman" panose="02020603050405020304" pitchFamily="18" charset="0"/>
+              </a:rPr>
+              <a:t>Tukey, J. W. (1977). </a:t>
+            </a:r>
+            <a:r>
+              <a:rPr lang="en-US" i="1" dirty="0">
+                <a:latin typeface="Times New Roman" panose="02020603050405020304" pitchFamily="18" charset="0"/>
+                <a:cs typeface="Times New Roman" panose="02020603050405020304" pitchFamily="18" charset="0"/>
+              </a:rPr>
+              <a:t>Exploratory Data Analysis</a:t>
+            </a:r>
+            <a:r>
+              <a:rPr lang="en-US" dirty="0">
+                <a:latin typeface="Times New Roman" panose="02020603050405020304" pitchFamily="18" charset="0"/>
+                <a:cs typeface="Times New Roman" panose="02020603050405020304" pitchFamily="18" charset="0"/>
+              </a:rPr>
+              <a:t>. Addison-Wesley.</a:t>
+            </a:r>
+          </a:p>
+          <a:p>
+            <a:r>
+              <a:rPr lang="en-US" dirty="0">
+                <a:latin typeface="Times New Roman" panose="02020603050405020304" pitchFamily="18" charset="0"/>
+                <a:cs typeface="Times New Roman" panose="02020603050405020304" pitchFamily="18" charset="0"/>
+              </a:rPr>
+              <a:t>James, G., Witten, D., Hastie, T., &amp; </a:t>
+            </a:r>
+            <a:r>
+              <a:rPr lang="en-US" dirty="0" err="1">
+                <a:latin typeface="Times New Roman" panose="02020603050405020304" pitchFamily="18" charset="0"/>
+                <a:cs typeface="Times New Roman" panose="02020603050405020304" pitchFamily="18" charset="0"/>
+              </a:rPr>
+              <a:t>Tibshirani</a:t>
+            </a:r>
+            <a:r>
+              <a:rPr lang="en-US" dirty="0">
+                <a:latin typeface="Times New Roman" panose="02020603050405020304" pitchFamily="18" charset="0"/>
+                <a:cs typeface="Times New Roman" panose="02020603050405020304" pitchFamily="18" charset="0"/>
+              </a:rPr>
+              <a:t>, R. (2021). </a:t>
+            </a:r>
+            <a:r>
+              <a:rPr lang="en-US" i="1" dirty="0">
+                <a:latin typeface="Times New Roman" panose="02020603050405020304" pitchFamily="18" charset="0"/>
+                <a:cs typeface="Times New Roman" panose="02020603050405020304" pitchFamily="18" charset="0"/>
+              </a:rPr>
+              <a:t>An Introduction to Statistical Learning</a:t>
+            </a:r>
+            <a:r>
+              <a:rPr lang="en-US" dirty="0">
+                <a:latin typeface="Times New Roman" panose="02020603050405020304" pitchFamily="18" charset="0"/>
+                <a:cs typeface="Times New Roman" panose="02020603050405020304" pitchFamily="18" charset="0"/>
+              </a:rPr>
+              <a:t> (2nd ed.). Springer.</a:t>
+            </a:r>
+          </a:p>
+          <a:p>
+            <a:r>
+              <a:rPr lang="en-US" dirty="0">
+                <a:latin typeface="Times New Roman" panose="02020603050405020304" pitchFamily="18" charset="0"/>
+                <a:cs typeface="Times New Roman" panose="02020603050405020304" pitchFamily="18" charset="0"/>
+              </a:rPr>
+              <a:t>Han, J., Kamber, M., &amp; Pei, J. (2012). </a:t>
+            </a:r>
+            <a:r>
+              <a:rPr lang="en-US" i="1" dirty="0">
+                <a:latin typeface="Times New Roman" panose="02020603050405020304" pitchFamily="18" charset="0"/>
+                <a:cs typeface="Times New Roman" panose="02020603050405020304" pitchFamily="18" charset="0"/>
+              </a:rPr>
+              <a:t>Data Mining: Concepts and Techniques</a:t>
+            </a:r>
+            <a:r>
+              <a:rPr lang="en-US" dirty="0">
+                <a:latin typeface="Times New Roman" panose="02020603050405020304" pitchFamily="18" charset="0"/>
+                <a:cs typeface="Times New Roman" panose="02020603050405020304" pitchFamily="18" charset="0"/>
+              </a:rPr>
+              <a:t> (3rd ed.). Morgan Kaufmann.</a:t>
+            </a:r>
+          </a:p>
+          <a:p>
+            <a:r>
+              <a:rPr lang="en-US" dirty="0">
+                <a:latin typeface="Times New Roman" panose="02020603050405020304" pitchFamily="18" charset="0"/>
+                <a:cs typeface="Times New Roman" panose="02020603050405020304" pitchFamily="18" charset="0"/>
+              </a:rPr>
+              <a:t>Hair, J. F., Black, W. C., Babin, B. J., &amp; Anderson, R. E. (2019). </a:t>
+            </a:r>
+            <a:r>
+              <a:rPr lang="en-US" i="1" dirty="0">
+                <a:latin typeface="Times New Roman" panose="02020603050405020304" pitchFamily="18" charset="0"/>
+                <a:cs typeface="Times New Roman" panose="02020603050405020304" pitchFamily="18" charset="0"/>
+              </a:rPr>
+              <a:t>Multivariate Data Analysis</a:t>
+            </a:r>
+            <a:r>
+              <a:rPr lang="en-US" dirty="0">
+                <a:latin typeface="Times New Roman" panose="02020603050405020304" pitchFamily="18" charset="0"/>
+                <a:cs typeface="Times New Roman" panose="02020603050405020304" pitchFamily="18" charset="0"/>
+              </a:rPr>
+              <a:t> (8th ed.). Cengage Learning.</a:t>
+            </a:r>
+          </a:p>
+          <a:p>
+            <a:endParaRPr lang="en-US" dirty="0">
+              <a:latin typeface="Times New Roman" panose="02020603050405020304" pitchFamily="18" charset="0"/>
+              <a:cs typeface="Times New Roman" panose="02020603050405020304" pitchFamily="18" charset="0"/>
+            </a:endParaRPr>
+          </a:p>
+        </p:txBody>
+      </p:sp>
+    </p:spTree>
+    <p:extLst>
+      <p:ext uri="{BB962C8B-B14F-4D97-AF65-F5344CB8AC3E}">
+        <p14:creationId xmlns:p14="http://schemas.microsoft.com/office/powerpoint/2010/main" val="4091250870"/>
+      </p:ext>
+    </p:extLst>
+  </p:cSld>
+  <p:clrMapOvr>
+    <a:masterClrMapping/>
+  </p:clrMapOvr>
+</p:sld>
+</file>
+
+<file path=ppt/slides/slide58.xml><?xml version="1.0" encoding="utf-8"?>
 <p:sld xmlns:a="http://schemas.openxmlformats.org/drawingml/2006/main" xmlns:r="http://schemas.openxmlformats.org/officeDocument/2006/relationships" xmlns:p="http://schemas.openxmlformats.org/presentationml/2006/main">
   <p:cSld>
     <p:spTree>
@@ -11824,7 +12502,7 @@
           <p:cNvPr id="2" name="Title 1">
             <a:extLst>
               <a:ext uri="{FF2B5EF4-FFF2-40B4-BE49-F238E27FC236}">
-                <a16:creationId xmlns:a16="http://schemas.microsoft.com/office/drawing/2014/main" id="{121C1F9D-4BE7-3EEB-AF60-70E0A6FA2841}"/>
+                <a16:creationId xmlns:a16="http://schemas.microsoft.com/office/drawing/2014/main" id="{A94502A2-EAB4-E470-4226-ABAF2BC07B45}"/>
               </a:ext>
             </a:extLst>
           </p:cNvPr>
@@ -11845,7 +12523,7 @@
                 <a:latin typeface="Times New Roman" panose="02020603050405020304" pitchFamily="18" charset="0"/>
                 <a:cs typeface="Times New Roman" panose="02020603050405020304" pitchFamily="18" charset="0"/>
               </a:rPr>
-              <a:t>Dataset</a:t>
+              <a:t>Aim</a:t>
             </a:r>
           </a:p>
         </p:txBody>
@@ -11855,7 +12533,7 @@
           <p:cNvPr id="3" name="Content Placeholder 2">
             <a:extLst>
               <a:ext uri="{FF2B5EF4-FFF2-40B4-BE49-F238E27FC236}">
-                <a16:creationId xmlns:a16="http://schemas.microsoft.com/office/drawing/2014/main" id="{07313A65-F4C8-A61A-602E-43997A5BC6AA}"/>
+                <a16:creationId xmlns:a16="http://schemas.microsoft.com/office/drawing/2014/main" id="{14037715-B604-E9DE-2B64-C6171C26CE93}"/>
               </a:ext>
             </a:extLst>
           </p:cNvPr>
@@ -11872,64 +12550,19 @@
           <a:lstStyle/>
           <a:p>
             <a:r>
-              <a:rPr lang="en-US" dirty="0">
-                <a:latin typeface="Times New Roman" panose="02020603050405020304" pitchFamily="18" charset="0"/>
-                <a:cs typeface="Times New Roman" panose="02020603050405020304" pitchFamily="18" charset="0"/>
-              </a:rPr>
-              <a:t>Danish Housing Dataset </a:t>
-            </a:r>
-          </a:p>
-          <a:p>
-            <a:r>
-              <a:rPr lang="en-US" dirty="0">
-                <a:latin typeface="Times New Roman" panose="02020603050405020304" pitchFamily="18" charset="0"/>
-                <a:cs typeface="Times New Roman" panose="02020603050405020304" pitchFamily="18" charset="0"/>
-              </a:rPr>
-              <a:t>Multiple regions </a:t>
-            </a:r>
-          </a:p>
-          <a:p>
-            <a:r>
-              <a:rPr lang="en-US" dirty="0">
-                <a:latin typeface="Times New Roman" panose="02020603050405020304" pitchFamily="18" charset="0"/>
-                <a:cs typeface="Times New Roman" panose="02020603050405020304" pitchFamily="18" charset="0"/>
-              </a:rPr>
-              <a:t>Various property types </a:t>
-            </a:r>
-          </a:p>
-          <a:p>
-            <a:r>
-              <a:rPr lang="en-US" dirty="0">
-                <a:latin typeface="Times New Roman" panose="02020603050405020304" pitchFamily="18" charset="0"/>
-                <a:cs typeface="Times New Roman" panose="02020603050405020304" pitchFamily="18" charset="0"/>
-              </a:rPr>
-              <a:t>Purchase prices </a:t>
-            </a:r>
-          </a:p>
-          <a:p>
-            <a:r>
-              <a:rPr lang="en-US" dirty="0">
-                <a:latin typeface="Times New Roman" panose="02020603050405020304" pitchFamily="18" charset="0"/>
-                <a:cs typeface="Times New Roman" panose="02020603050405020304" pitchFamily="18" charset="0"/>
-              </a:rPr>
-              <a:t>Offer prices Size (sqm) </a:t>
-            </a:r>
-          </a:p>
-          <a:p>
-            <a:r>
-              <a:rPr lang="en-US" dirty="0">
-                <a:latin typeface="Times New Roman" panose="02020603050405020304" pitchFamily="18" charset="0"/>
-                <a:cs typeface="Times New Roman" panose="02020603050405020304" pitchFamily="18" charset="0"/>
-              </a:rPr>
-              <a:t>Construction year</a:t>
-            </a:r>
+              <a:rPr lang="en-US" dirty="0"/>
+              <a:t>To perform an Exploratory Data Analysis of the Danish Housing Market.</a:t>
+            </a:r>
+          </a:p>
+          <a:p>
+            <a:endParaRPr lang="en-US" dirty="0"/>
           </a:p>
         </p:txBody>
       </p:sp>
     </p:spTree>
     <p:extLst>
       <p:ext uri="{BB962C8B-B14F-4D97-AF65-F5344CB8AC3E}">
-        <p14:creationId xmlns:p14="http://schemas.microsoft.com/office/powerpoint/2010/main" val="3036954873"/>
+        <p14:creationId xmlns:p14="http://schemas.microsoft.com/office/powerpoint/2010/main" val="349474122"/>
       </p:ext>
     </p:extLst>
   </p:cSld>
@@ -11961,7 +12594,7 @@
           <p:cNvPr id="2" name="Title 1">
             <a:extLst>
               <a:ext uri="{FF2B5EF4-FFF2-40B4-BE49-F238E27FC236}">
-                <a16:creationId xmlns:a16="http://schemas.microsoft.com/office/drawing/2014/main" id="{EC13A5F1-E263-CD97-29A2-94365AC3CC59}"/>
+                <a16:creationId xmlns:a16="http://schemas.microsoft.com/office/drawing/2014/main" id="{205B2917-7F53-B7B5-9F18-468D522CCD61}"/>
               </a:ext>
             </a:extLst>
           </p:cNvPr>
@@ -11982,53 +12615,102 @@
                 <a:latin typeface="Times New Roman" panose="02020603050405020304" pitchFamily="18" charset="0"/>
                 <a:cs typeface="Times New Roman" panose="02020603050405020304" pitchFamily="18" charset="0"/>
               </a:rPr>
-              <a:t>Dataset</a:t>
-            </a:r>
-          </a:p>
-        </p:txBody>
-      </p:sp>
-      <p:pic>
-        <p:nvPicPr>
-          <p:cNvPr id="5" name="Content Placeholder 4">
+              <a:t>Objectives</a:t>
+            </a:r>
+          </a:p>
+        </p:txBody>
+      </p:sp>
+      <p:sp>
+        <p:nvSpPr>
+          <p:cNvPr id="3" name="Content Placeholder 2">
             <a:extLst>
               <a:ext uri="{FF2B5EF4-FFF2-40B4-BE49-F238E27FC236}">
-                <a16:creationId xmlns:a16="http://schemas.microsoft.com/office/drawing/2014/main" id="{71FCE656-2D79-2ECE-D162-E1CA1B914E68}"/>
+                <a16:creationId xmlns:a16="http://schemas.microsoft.com/office/drawing/2014/main" id="{6F7467F8-4604-56D7-247A-87488E2516AC}"/>
               </a:ext>
             </a:extLst>
           </p:cNvPr>
-          <p:cNvPicPr>
-            <a:picLocks noGrp="1" noChangeAspect="1"/>
-          </p:cNvPicPr>
+          <p:cNvSpPr>
+            <a:spLocks noGrp="1"/>
+          </p:cNvSpPr>
           <p:nvPr>
             <p:ph idx="1"/>
           </p:nvPr>
-        </p:nvPicPr>
-        <p:blipFill>
-          <a:blip r:embed="rId2">
-            <a:extLst>
-              <a:ext uri="{28A0092B-C50C-407E-A947-70E740481C1C}">
-                <a14:useLocalDpi xmlns:a14="http://schemas.microsoft.com/office/drawing/2010/main" val="0"/>
-              </a:ext>
-            </a:extLst>
-          </a:blip>
-          <a:stretch>
-            <a:fillRect/>
-          </a:stretch>
-        </p:blipFill>
-        <p:spPr>
-          <a:xfrm>
-            <a:off x="1432751" y="2557463"/>
-            <a:ext cx="9326498" cy="3317875"/>
-          </a:xfrm>
-          <a:prstGeom prst="rect">
-            <a:avLst/>
-          </a:prstGeom>
-        </p:spPr>
-      </p:pic>
+        </p:nvSpPr>
+        <p:spPr/>
+        <p:txBody>
+          <a:bodyPr>
+            <a:normAutofit lnSpcReduction="10000"/>
+          </a:bodyPr>
+          <a:lstStyle/>
+          <a:p>
+            <a:r>
+              <a:rPr lang="en-US" dirty="0">
+                <a:latin typeface="Times New Roman" panose="02020603050405020304" pitchFamily="18" charset="0"/>
+                <a:cs typeface="Times New Roman" panose="02020603050405020304" pitchFamily="18" charset="0"/>
+              </a:rPr>
+              <a:t>Clean and prepare the dataset. </a:t>
+            </a:r>
+          </a:p>
+          <a:p>
+            <a:r>
+              <a:rPr lang="en-US" dirty="0">
+                <a:latin typeface="Times New Roman" panose="02020603050405020304" pitchFamily="18" charset="0"/>
+                <a:cs typeface="Times New Roman" panose="02020603050405020304" pitchFamily="18" charset="0"/>
+              </a:rPr>
+              <a:t>Identify missing values and outliers. </a:t>
+            </a:r>
+          </a:p>
+          <a:p>
+            <a:r>
+              <a:rPr lang="en-US" dirty="0">
+                <a:latin typeface="Times New Roman" panose="02020603050405020304" pitchFamily="18" charset="0"/>
+                <a:cs typeface="Times New Roman" panose="02020603050405020304" pitchFamily="18" charset="0"/>
+              </a:rPr>
+              <a:t>Analyze housing prices across regions. </a:t>
+            </a:r>
+          </a:p>
+          <a:p>
+            <a:r>
+              <a:rPr lang="en-US" dirty="0">
+                <a:latin typeface="Times New Roman" panose="02020603050405020304" pitchFamily="18" charset="0"/>
+                <a:cs typeface="Times New Roman" panose="02020603050405020304" pitchFamily="18" charset="0"/>
+              </a:rPr>
+              <a:t>Compare different property types. </a:t>
+            </a:r>
+          </a:p>
+          <a:p>
+            <a:r>
+              <a:rPr lang="en-US" dirty="0">
+                <a:latin typeface="Times New Roman" panose="02020603050405020304" pitchFamily="18" charset="0"/>
+                <a:cs typeface="Times New Roman" panose="02020603050405020304" pitchFamily="18" charset="0"/>
+              </a:rPr>
+              <a:t>Investigate negotiation outcomes. </a:t>
+            </a:r>
+          </a:p>
+          <a:p>
+            <a:r>
+              <a:rPr lang="en-US" dirty="0">
+                <a:latin typeface="Times New Roman" panose="02020603050405020304" pitchFamily="18" charset="0"/>
+                <a:cs typeface="Times New Roman" panose="02020603050405020304" pitchFamily="18" charset="0"/>
+              </a:rPr>
+              <a:t>Study the effect of property age. </a:t>
+            </a:r>
+          </a:p>
+          <a:p>
+            <a:r>
+              <a:rPr lang="en-US" dirty="0">
+                <a:latin typeface="Times New Roman" panose="02020603050405020304" pitchFamily="18" charset="0"/>
+                <a:cs typeface="Times New Roman" panose="02020603050405020304" pitchFamily="18" charset="0"/>
+              </a:rPr>
+              <a:t>Examine housing price trends using visualization techniques.</a:t>
+            </a:r>
+          </a:p>
+        </p:txBody>
+      </p:sp>
     </p:spTree>
     <p:extLst>
       <p:ext uri="{BB962C8B-B14F-4D97-AF65-F5344CB8AC3E}">
-        <p14:creationId xmlns:p14="http://schemas.microsoft.com/office/powerpoint/2010/main" val="1503541351"/>
+        <p14:creationId xmlns:p14="http://schemas.microsoft.com/office/powerpoint/2010/main" val="2330155842"/>
       </p:ext>
     </p:extLst>
   </p:cSld>
@@ -12060,7 +12742,7 @@
           <p:cNvPr id="2" name="Title 1">
             <a:extLst>
               <a:ext uri="{FF2B5EF4-FFF2-40B4-BE49-F238E27FC236}">
-                <a16:creationId xmlns:a16="http://schemas.microsoft.com/office/drawing/2014/main" id="{41C80367-10E7-E58E-18AC-3BFAE43797FA}"/>
+                <a16:creationId xmlns:a16="http://schemas.microsoft.com/office/drawing/2014/main" id="{4DCA4DC8-58A0-64FE-254D-082993A49087}"/>
               </a:ext>
             </a:extLst>
           </p:cNvPr>
@@ -12073,17 +12755,15 @@
         </p:nvSpPr>
         <p:spPr/>
         <p:txBody>
-          <a:bodyPr>
-            <a:normAutofit/>
-          </a:bodyPr>
-          <a:lstStyle/>
-          <a:p>
-            <a:r>
-              <a:rPr lang="en-US" dirty="0">
-                <a:latin typeface="Times New Roman" panose="02020603050405020304" pitchFamily="18" charset="0"/>
-                <a:cs typeface="Times New Roman" panose="02020603050405020304" pitchFamily="18" charset="0"/>
-              </a:rPr>
-              <a:t>Tools Used</a:t>
+          <a:bodyPr/>
+          <a:lstStyle/>
+          <a:p>
+            <a:r>
+              <a:rPr lang="en-US" dirty="0">
+                <a:latin typeface="Times New Roman" panose="02020603050405020304" pitchFamily="18" charset="0"/>
+                <a:cs typeface="Times New Roman" panose="02020603050405020304" pitchFamily="18" charset="0"/>
+              </a:rPr>
+              <a:t>Literature Review</a:t>
             </a:r>
           </a:p>
         </p:txBody>
@@ -12093,7 +12773,7 @@
           <p:cNvPr id="3" name="Content Placeholder 2">
             <a:extLst>
               <a:ext uri="{FF2B5EF4-FFF2-40B4-BE49-F238E27FC236}">
-                <a16:creationId xmlns:a16="http://schemas.microsoft.com/office/drawing/2014/main" id="{405947B7-28ED-0D57-907A-F1146D8C6660}"/>
+                <a16:creationId xmlns:a16="http://schemas.microsoft.com/office/drawing/2014/main" id="{D7172D6B-6C0D-50A7-9725-7327990414F9}"/>
               </a:ext>
             </a:extLst>
           </p:cNvPr>
@@ -12107,7 +12787,7 @@
         <p:spPr/>
         <p:txBody>
           <a:bodyPr>
-            <a:normAutofit/>
+            <a:normAutofit fontScale="92500" lnSpcReduction="10000"/>
           </a:bodyPr>
           <a:lstStyle/>
           <a:p>
@@ -12116,66 +12796,42 @@
                 <a:latin typeface="Times New Roman" panose="02020603050405020304" pitchFamily="18" charset="0"/>
                 <a:cs typeface="Times New Roman" panose="02020603050405020304" pitchFamily="18" charset="0"/>
               </a:rPr>
-              <a:t>Python </a:t>
-            </a:r>
-          </a:p>
-          <a:p>
-            <a:r>
-              <a:rPr lang="en-US" dirty="0">
-                <a:latin typeface="Times New Roman" panose="02020603050405020304" pitchFamily="18" charset="0"/>
-                <a:cs typeface="Times New Roman" panose="02020603050405020304" pitchFamily="18" charset="0"/>
-              </a:rPr>
-              <a:t>Pandas </a:t>
-            </a:r>
-          </a:p>
-          <a:p>
-            <a:r>
-              <a:rPr lang="en-US" dirty="0">
-                <a:latin typeface="Times New Roman" panose="02020603050405020304" pitchFamily="18" charset="0"/>
-                <a:cs typeface="Times New Roman" panose="02020603050405020304" pitchFamily="18" charset="0"/>
-              </a:rPr>
-              <a:t>NumPy </a:t>
-            </a:r>
-          </a:p>
-          <a:p>
-            <a:r>
-              <a:rPr lang="en-US" dirty="0">
-                <a:latin typeface="Times New Roman" panose="02020603050405020304" pitchFamily="18" charset="0"/>
-                <a:cs typeface="Times New Roman" panose="02020603050405020304" pitchFamily="18" charset="0"/>
-              </a:rPr>
-              <a:t>Matplotlib </a:t>
-            </a:r>
-          </a:p>
-          <a:p>
-            <a:r>
-              <a:rPr lang="en-US" dirty="0">
-                <a:latin typeface="Times New Roman" panose="02020603050405020304" pitchFamily="18" charset="0"/>
-                <a:cs typeface="Times New Roman" panose="02020603050405020304" pitchFamily="18" charset="0"/>
-              </a:rPr>
-              <a:t>Seaborn </a:t>
-            </a:r>
-          </a:p>
-          <a:p>
-            <a:r>
-              <a:rPr lang="en-US" dirty="0">
-                <a:latin typeface="Times New Roman" panose="02020603050405020304" pitchFamily="18" charset="0"/>
-                <a:cs typeface="Times New Roman" panose="02020603050405020304" pitchFamily="18" charset="0"/>
-              </a:rPr>
-              <a:t>Jupyter Notebook</a:t>
-            </a:r>
-          </a:p>
-          <a:p>
-            <a:endParaRPr lang="en-US" dirty="0">
-              <a:latin typeface="Times New Roman" panose="02020603050405020304" pitchFamily="18" charset="0"/>
-              <a:cs typeface="Times New Roman" panose="02020603050405020304" pitchFamily="18" charset="0"/>
-            </a:endParaRPr>
+              <a:t>Housing markets have attracted extensive academic interest because of their importance to economic growth, wealth creation, and social welfare. </a:t>
+            </a:r>
+          </a:p>
+          <a:p>
+            <a:r>
+              <a:rPr lang="en-US" dirty="0">
+                <a:latin typeface="Times New Roman" panose="02020603050405020304" pitchFamily="18" charset="0"/>
+                <a:cs typeface="Times New Roman" panose="02020603050405020304" pitchFamily="18" charset="0"/>
+              </a:rPr>
+              <a:t>According to Tukey, EDA allows analysts to "listen to the data" before drawing conclusions.</a:t>
+            </a:r>
+          </a:p>
+          <a:p>
+            <a:r>
+              <a:rPr lang="en-US" dirty="0">
+                <a:latin typeface="Times New Roman" panose="02020603050405020304" pitchFamily="18" charset="0"/>
+                <a:cs typeface="Times New Roman" panose="02020603050405020304" pitchFamily="18" charset="0"/>
+              </a:rPr>
+              <a:t>Research by Rosen (1974) introduced the Hedonic Pricing Model, explaining that house prices are determined by bundles of characteristics rather than individual features.</a:t>
+            </a:r>
+          </a:p>
+          <a:p>
+            <a:r>
+              <a:rPr lang="en-US" dirty="0">
+                <a:latin typeface="Times New Roman" panose="02020603050405020304" pitchFamily="18" charset="0"/>
+                <a:cs typeface="Times New Roman" panose="02020603050405020304" pitchFamily="18" charset="0"/>
+              </a:rPr>
+              <a:t>Relatively fewer studies focus exclusively on comprehensive exploratory analysis.</a:t>
+            </a:r>
           </a:p>
         </p:txBody>
       </p:sp>
     </p:spTree>
     <p:extLst>
       <p:ext uri="{BB962C8B-B14F-4D97-AF65-F5344CB8AC3E}">
-        <p14:creationId xmlns:p14="http://schemas.microsoft.com/office/powerpoint/2010/main" val="2376516149"/>
+        <p14:creationId xmlns:p14="http://schemas.microsoft.com/office/powerpoint/2010/main" val="3013477453"/>
       </p:ext>
     </p:extLst>
   </p:cSld>
@@ -12207,7 +12863,7 @@
           <p:cNvPr id="2" name="Title 1">
             <a:extLst>
               <a:ext uri="{FF2B5EF4-FFF2-40B4-BE49-F238E27FC236}">
-                <a16:creationId xmlns:a16="http://schemas.microsoft.com/office/drawing/2014/main" id="{0B02C1EB-940C-65EF-5E77-23FE615D3310}"/>
+                <a16:creationId xmlns:a16="http://schemas.microsoft.com/office/drawing/2014/main" id="{121C1F9D-4BE7-3EEB-AF60-70E0A6FA2841}"/>
               </a:ext>
             </a:extLst>
           </p:cNvPr>
@@ -12220,17 +12876,15 @@
         </p:nvSpPr>
         <p:spPr/>
         <p:txBody>
-          <a:bodyPr>
-            <a:normAutofit/>
-          </a:bodyPr>
-          <a:lstStyle/>
-          <a:p>
-            <a:r>
-              <a:rPr lang="en-US" dirty="0">
-                <a:latin typeface="Times New Roman" panose="02020603050405020304" pitchFamily="18" charset="0"/>
-                <a:cs typeface="Times New Roman" panose="02020603050405020304" pitchFamily="18" charset="0"/>
-              </a:rPr>
-              <a:t>Methodology</a:t>
+          <a:bodyPr/>
+          <a:lstStyle/>
+          <a:p>
+            <a:r>
+              <a:rPr lang="en-US" dirty="0">
+                <a:latin typeface="Times New Roman" panose="02020603050405020304" pitchFamily="18" charset="0"/>
+                <a:cs typeface="Times New Roman" panose="02020603050405020304" pitchFamily="18" charset="0"/>
+              </a:rPr>
+              <a:t>Dataset</a:t>
             </a:r>
           </a:p>
         </p:txBody>
@@ -12240,7 +12894,7 @@
           <p:cNvPr id="3" name="Content Placeholder 2">
             <a:extLst>
               <a:ext uri="{FF2B5EF4-FFF2-40B4-BE49-F238E27FC236}">
-                <a16:creationId xmlns:a16="http://schemas.microsoft.com/office/drawing/2014/main" id="{09954CD0-D925-5001-056C-B9F60FFD3677}"/>
+                <a16:creationId xmlns:a16="http://schemas.microsoft.com/office/drawing/2014/main" id="{07313A65-F4C8-A61A-602E-43997A5BC6AA}"/>
               </a:ext>
             </a:extLst>
           </p:cNvPr>
@@ -12253,76 +12907,68 @@
         </p:nvSpPr>
         <p:spPr/>
         <p:txBody>
-          <a:bodyPr>
-            <a:normAutofit/>
-          </a:bodyPr>
-          <a:lstStyle/>
-          <a:p>
-            <a:r>
-              <a:rPr lang="en-US" dirty="0">
-                <a:latin typeface="Times New Roman" panose="02020603050405020304" pitchFamily="18" charset="0"/>
-                <a:cs typeface="Times New Roman" panose="02020603050405020304" pitchFamily="18" charset="0"/>
-              </a:rPr>
-              <a:t>Data Collection</a:t>
-            </a:r>
-          </a:p>
-          <a:p>
-            <a:r>
-              <a:rPr lang="en-US" dirty="0">
-                <a:latin typeface="Times New Roman" panose="02020603050405020304" pitchFamily="18" charset="0"/>
-                <a:cs typeface="Times New Roman" panose="02020603050405020304" pitchFamily="18" charset="0"/>
-              </a:rPr>
-              <a:t>Data Cleaning</a:t>
-            </a:r>
-          </a:p>
-          <a:p>
-            <a:r>
-              <a:rPr lang="en-US" dirty="0">
-                <a:latin typeface="Times New Roman" panose="02020603050405020304" pitchFamily="18" charset="0"/>
-                <a:cs typeface="Times New Roman" panose="02020603050405020304" pitchFamily="18" charset="0"/>
-              </a:rPr>
-              <a:t>Feature Engineering</a:t>
-            </a:r>
-          </a:p>
-          <a:p>
-            <a:r>
-              <a:rPr lang="en-US" dirty="0">
-                <a:latin typeface="Times New Roman" panose="02020603050405020304" pitchFamily="18" charset="0"/>
-                <a:cs typeface="Times New Roman" panose="02020603050405020304" pitchFamily="18" charset="0"/>
-              </a:rPr>
-              <a:t>Exploratory Data Analysis</a:t>
-            </a:r>
-          </a:p>
-          <a:p>
-            <a:r>
-              <a:rPr lang="en-US" dirty="0">
-                <a:latin typeface="Times New Roman" panose="02020603050405020304" pitchFamily="18" charset="0"/>
-                <a:cs typeface="Times New Roman" panose="02020603050405020304" pitchFamily="18" charset="0"/>
-              </a:rPr>
-              <a:t>Visualization</a:t>
-            </a:r>
-          </a:p>
-          <a:p>
-            <a:r>
-              <a:rPr lang="en-US" dirty="0">
-                <a:latin typeface="Times New Roman" panose="02020603050405020304" pitchFamily="18" charset="0"/>
-                <a:cs typeface="Times New Roman" panose="02020603050405020304" pitchFamily="18" charset="0"/>
-              </a:rPr>
-              <a:t>Interpretation</a:t>
-            </a:r>
-          </a:p>
-          <a:p>
-            <a:endParaRPr lang="en-US" dirty="0">
-              <a:latin typeface="Times New Roman" panose="02020603050405020304" pitchFamily="18" charset="0"/>
-              <a:cs typeface="Times New Roman" panose="02020603050405020304" pitchFamily="18" charset="0"/>
-            </a:endParaRPr>
+          <a:bodyPr/>
+          <a:lstStyle/>
+          <a:p>
+            <a:r>
+              <a:rPr lang="en-US" dirty="0">
+                <a:latin typeface="Times New Roman" panose="02020603050405020304" pitchFamily="18" charset="0"/>
+                <a:cs typeface="Times New Roman" panose="02020603050405020304" pitchFamily="18" charset="0"/>
+              </a:rPr>
+              <a:t>Danish Housing Dataset </a:t>
+            </a:r>
+          </a:p>
+          <a:p>
+            <a:r>
+              <a:rPr lang="en-US" dirty="0">
+                <a:latin typeface="Times New Roman" panose="02020603050405020304" pitchFamily="18" charset="0"/>
+                <a:cs typeface="Times New Roman" panose="02020603050405020304" pitchFamily="18" charset="0"/>
+              </a:rPr>
+              <a:t>Multiple regions </a:t>
+            </a:r>
+          </a:p>
+          <a:p>
+            <a:r>
+              <a:rPr lang="en-US" dirty="0">
+                <a:latin typeface="Times New Roman" panose="02020603050405020304" pitchFamily="18" charset="0"/>
+                <a:cs typeface="Times New Roman" panose="02020603050405020304" pitchFamily="18" charset="0"/>
+              </a:rPr>
+              <a:t>Various property types </a:t>
+            </a:r>
+          </a:p>
+          <a:p>
+            <a:r>
+              <a:rPr lang="en-US" dirty="0">
+                <a:latin typeface="Times New Roman" panose="02020603050405020304" pitchFamily="18" charset="0"/>
+                <a:cs typeface="Times New Roman" panose="02020603050405020304" pitchFamily="18" charset="0"/>
+              </a:rPr>
+              <a:t>Purchase prices </a:t>
+            </a:r>
+          </a:p>
+          <a:p>
+            <a:r>
+              <a:rPr lang="en-US" dirty="0">
+                <a:latin typeface="Times New Roman" panose="02020603050405020304" pitchFamily="18" charset="0"/>
+                <a:cs typeface="Times New Roman" panose="02020603050405020304" pitchFamily="18" charset="0"/>
+              </a:rPr>
+              <a:t>Offer prices Size (sqm) </a:t>
+            </a:r>
+          </a:p>
+          <a:p>
+            <a:r>
+              <a:rPr lang="en-US" dirty="0">
+                <a:latin typeface="Times New Roman" panose="02020603050405020304" pitchFamily="18" charset="0"/>
+                <a:cs typeface="Times New Roman" panose="02020603050405020304" pitchFamily="18" charset="0"/>
+              </a:rPr>
+              <a:t>Construction year</a:t>
+            </a:r>
           </a:p>
         </p:txBody>
       </p:sp>
     </p:spTree>
     <p:extLst>
       <p:ext uri="{BB962C8B-B14F-4D97-AF65-F5344CB8AC3E}">
-        <p14:creationId xmlns:p14="http://schemas.microsoft.com/office/powerpoint/2010/main" val="3567523146"/>
+        <p14:creationId xmlns:p14="http://schemas.microsoft.com/office/powerpoint/2010/main" val="3036954873"/>
       </p:ext>
     </p:extLst>
   </p:cSld>

--- a/AYOMIKUN EDA.pptx
+++ b/AYOMIKUN EDA.pptx
@@ -50,19 +50,20 @@
     <p:sldId id="295" r:id="rId44"/>
     <p:sldId id="296" r:id="rId45"/>
     <p:sldId id="297" r:id="rId46"/>
-    <p:sldId id="301" r:id="rId47"/>
-    <p:sldId id="298" r:id="rId48"/>
-    <p:sldId id="299" r:id="rId49"/>
-    <p:sldId id="300" r:id="rId50"/>
-    <p:sldId id="302" r:id="rId51"/>
-    <p:sldId id="303" r:id="rId52"/>
-    <p:sldId id="304" r:id="rId53"/>
-    <p:sldId id="305" r:id="rId54"/>
-    <p:sldId id="307" r:id="rId55"/>
-    <p:sldId id="308" r:id="rId56"/>
-    <p:sldId id="306" r:id="rId57"/>
-    <p:sldId id="311" r:id="rId58"/>
-    <p:sldId id="310" r:id="rId59"/>
+    <p:sldId id="315" r:id="rId47"/>
+    <p:sldId id="301" r:id="rId48"/>
+    <p:sldId id="298" r:id="rId49"/>
+    <p:sldId id="299" r:id="rId50"/>
+    <p:sldId id="300" r:id="rId51"/>
+    <p:sldId id="302" r:id="rId52"/>
+    <p:sldId id="303" r:id="rId53"/>
+    <p:sldId id="304" r:id="rId54"/>
+    <p:sldId id="305" r:id="rId55"/>
+    <p:sldId id="307" r:id="rId56"/>
+    <p:sldId id="308" r:id="rId57"/>
+    <p:sldId id="306" r:id="rId58"/>
+    <p:sldId id="311" r:id="rId59"/>
+    <p:sldId id="310" r:id="rId60"/>
   </p:sldIdLst>
   <p:sldSz cx="12192000" cy="6858000"/>
   <p:notesSz cx="6858000" cy="9144000"/>
@@ -500,7 +501,7 @@
           <a:p>
             <a:fld id="{D6D111B7-D0BA-4F94-AA57-BC0CCBE54C47}" type="datetimeFigureOut">
               <a:rPr lang="en-US" smtClean="0"/>
-              <a:t>7/8/2026</a:t>
+              <a:t>7/13/2026</a:t>
             </a:fld>
             <a:endParaRPr lang="en-US"/>
           </a:p>
@@ -824,7 +825,7 @@
           <a:p>
             <a:fld id="{D6D111B7-D0BA-4F94-AA57-BC0CCBE54C47}" type="datetimeFigureOut">
               <a:rPr lang="en-US" smtClean="0"/>
-              <a:t>7/8/2026</a:t>
+              <a:t>7/13/2026</a:t>
             </a:fld>
             <a:endParaRPr lang="en-US"/>
           </a:p>
@@ -1072,7 +1073,7 @@
           <a:p>
             <a:fld id="{D6D111B7-D0BA-4F94-AA57-BC0CCBE54C47}" type="datetimeFigureOut">
               <a:rPr lang="en-US" smtClean="0"/>
-              <a:t>7/8/2026</a:t>
+              <a:t>7/13/2026</a:t>
             </a:fld>
             <a:endParaRPr lang="en-US"/>
           </a:p>
@@ -1411,7 +1412,7 @@
           <a:p>
             <a:fld id="{D6D111B7-D0BA-4F94-AA57-BC0CCBE54C47}" type="datetimeFigureOut">
               <a:rPr lang="en-US" smtClean="0"/>
-              <a:t>7/8/2026</a:t>
+              <a:t>7/13/2026</a:t>
             </a:fld>
             <a:endParaRPr lang="en-US"/>
           </a:p>
@@ -1758,7 +1759,7 @@
           <a:p>
             <a:fld id="{D6D111B7-D0BA-4F94-AA57-BC0CCBE54C47}" type="datetimeFigureOut">
               <a:rPr lang="en-US" smtClean="0"/>
-              <a:t>7/8/2026</a:t>
+              <a:t>7/13/2026</a:t>
             </a:fld>
             <a:endParaRPr lang="en-US"/>
           </a:p>
@@ -2132,7 +2133,7 @@
           <a:p>
             <a:fld id="{D6D111B7-D0BA-4F94-AA57-BC0CCBE54C47}" type="datetimeFigureOut">
               <a:rPr lang="en-US" smtClean="0"/>
-              <a:t>7/8/2026</a:t>
+              <a:t>7/13/2026</a:t>
             </a:fld>
             <a:endParaRPr lang="en-US"/>
           </a:p>
@@ -2602,7 +2603,7 @@
           <a:p>
             <a:fld id="{D6D111B7-D0BA-4F94-AA57-BC0CCBE54C47}" type="datetimeFigureOut">
               <a:rPr lang="en-US" smtClean="0"/>
-              <a:t>7/8/2026</a:t>
+              <a:t>7/13/2026</a:t>
             </a:fld>
             <a:endParaRPr lang="en-US"/>
           </a:p>
@@ -2807,7 +2808,7 @@
           <a:p>
             <a:fld id="{D6D111B7-D0BA-4F94-AA57-BC0CCBE54C47}" type="datetimeFigureOut">
               <a:rPr lang="en-US" smtClean="0"/>
-              <a:t>7/8/2026</a:t>
+              <a:t>7/13/2026</a:t>
             </a:fld>
             <a:endParaRPr lang="en-US"/>
           </a:p>
@@ -3018,7 +3019,7 @@
           <a:p>
             <a:fld id="{D6D111B7-D0BA-4F94-AA57-BC0CCBE54C47}" type="datetimeFigureOut">
               <a:rPr lang="en-US" smtClean="0"/>
-              <a:t>7/8/2026</a:t>
+              <a:t>7/13/2026</a:t>
             </a:fld>
             <a:endParaRPr lang="en-US"/>
           </a:p>
@@ -3250,7 +3251,7 @@
           <a:p>
             <a:fld id="{D6D111B7-D0BA-4F94-AA57-BC0CCBE54C47}" type="datetimeFigureOut">
               <a:rPr lang="en-US" smtClean="0"/>
-              <a:t>7/8/2026</a:t>
+              <a:t>7/13/2026</a:t>
             </a:fld>
             <a:endParaRPr lang="en-US"/>
           </a:p>
@@ -3498,7 +3499,7 @@
           <a:p>
             <a:fld id="{D6D111B7-D0BA-4F94-AA57-BC0CCBE54C47}" type="datetimeFigureOut">
               <a:rPr lang="en-US" smtClean="0"/>
-              <a:t>7/8/2026</a:t>
+              <a:t>7/13/2026</a:t>
             </a:fld>
             <a:endParaRPr lang="en-US"/>
           </a:p>
@@ -3796,7 +3797,7 @@
           <a:p>
             <a:fld id="{D6D111B7-D0BA-4F94-AA57-BC0CCBE54C47}" type="datetimeFigureOut">
               <a:rPr lang="en-US" smtClean="0"/>
-              <a:t>7/8/2026</a:t>
+              <a:t>7/13/2026</a:t>
             </a:fld>
             <a:endParaRPr lang="en-US"/>
           </a:p>
@@ -4190,7 +4191,7 @@
           <a:p>
             <a:fld id="{D6D111B7-D0BA-4F94-AA57-BC0CCBE54C47}" type="datetimeFigureOut">
               <a:rPr lang="en-US" smtClean="0"/>
-              <a:t>7/8/2026</a:t>
+              <a:t>7/13/2026</a:t>
             </a:fld>
             <a:endParaRPr lang="en-US"/>
           </a:p>
@@ -4339,7 +4340,7 @@
           <a:p>
             <a:fld id="{D6D111B7-D0BA-4F94-AA57-BC0CCBE54C47}" type="datetimeFigureOut">
               <a:rPr lang="en-US" smtClean="0"/>
-              <a:t>7/8/2026</a:t>
+              <a:t>7/13/2026</a:t>
             </a:fld>
             <a:endParaRPr lang="en-US"/>
           </a:p>
@@ -4465,7 +4466,7 @@
           <a:p>
             <a:fld id="{D6D111B7-D0BA-4F94-AA57-BC0CCBE54C47}" type="datetimeFigureOut">
               <a:rPr lang="en-US" smtClean="0"/>
-              <a:t>7/8/2026</a:t>
+              <a:t>7/13/2026</a:t>
             </a:fld>
             <a:endParaRPr lang="en-US"/>
           </a:p>
@@ -4720,7 +4721,7 @@
           <a:p>
             <a:fld id="{D6D111B7-D0BA-4F94-AA57-BC0CCBE54C47}" type="datetimeFigureOut">
               <a:rPr lang="en-US" smtClean="0"/>
-              <a:t>7/8/2026</a:t>
+              <a:t>7/13/2026</a:t>
             </a:fld>
             <a:endParaRPr lang="en-US"/>
           </a:p>
@@ -5035,7 +5036,7 @@
           <a:p>
             <a:fld id="{D6D111B7-D0BA-4F94-AA57-BC0CCBE54C47}" type="datetimeFigureOut">
               <a:rPr lang="en-US" smtClean="0"/>
-              <a:t>7/8/2026</a:t>
+              <a:t>7/13/2026</a:t>
             </a:fld>
             <a:endParaRPr lang="en-US"/>
           </a:p>
@@ -5392,7 +5393,7 @@
           <a:p>
             <a:fld id="{D6D111B7-D0BA-4F94-AA57-BC0CCBE54C47}" type="datetimeFigureOut">
               <a:rPr lang="en-US" smtClean="0"/>
-              <a:t>7/8/2026</a:t>
+              <a:t>7/13/2026</a:t>
             </a:fld>
             <a:endParaRPr lang="en-US"/>
           </a:p>
@@ -6019,7 +6020,7 @@
                 <a:latin typeface="Times New Roman" panose="02020603050405020304" pitchFamily="18" charset="0"/>
                 <a:cs typeface="Times New Roman" panose="02020603050405020304" pitchFamily="18" charset="0"/>
               </a:rPr>
-              <a:t>8</a:t>
+              <a:t>13</a:t>
             </a:r>
             <a:r>
               <a:rPr lang="en-US" baseline="30000" dirty="0">
@@ -10629,7 +10630,7 @@
           <p:cNvPr id="2" name="Title 1">
             <a:extLst>
               <a:ext uri="{FF2B5EF4-FFF2-40B4-BE49-F238E27FC236}">
-                <a16:creationId xmlns:a16="http://schemas.microsoft.com/office/drawing/2014/main" id="{97074CB3-C3DE-3302-4512-DCD1BCE1D0A7}"/>
+                <a16:creationId xmlns:a16="http://schemas.microsoft.com/office/drawing/2014/main" id="{D4C48EFD-A761-6866-5C1A-7D1EE8641129}"/>
               </a:ext>
             </a:extLst>
           </p:cNvPr>
@@ -10657,10 +10658,10 @@
       </p:sp>
       <p:pic>
         <p:nvPicPr>
-          <p:cNvPr id="5" name="Content Placeholder 4">
+          <p:cNvPr id="4" name="Content Placeholder 3">
             <a:extLst>
               <a:ext uri="{FF2B5EF4-FFF2-40B4-BE49-F238E27FC236}">
-                <a16:creationId xmlns:a16="http://schemas.microsoft.com/office/drawing/2014/main" id="{991B83C2-D07C-68B3-7C69-E6B0102A215C}"/>
+                <a16:creationId xmlns:a16="http://schemas.microsoft.com/office/drawing/2014/main" id="{1E092CE1-F3A3-8F3F-D92A-A9C0E984D1C9}"/>
               </a:ext>
             </a:extLst>
           </p:cNvPr>
@@ -10672,22 +10673,15 @@
           </p:nvPr>
         </p:nvPicPr>
         <p:blipFill>
-          <a:blip r:embed="rId2">
-            <a:extLst>
-              <a:ext uri="{28A0092B-C50C-407E-A947-70E740481C1C}">
-                <a14:useLocalDpi xmlns:a14="http://schemas.microsoft.com/office/drawing/2010/main" val="0"/>
-              </a:ext>
-            </a:extLst>
-          </a:blip>
-          <a:srcRect t="4270"/>
+          <a:blip r:embed="rId2"/>
           <a:stretch>
             <a:fillRect/>
           </a:stretch>
         </p:blipFill>
         <p:spPr>
           <a:xfrm>
-            <a:off x="1505180" y="2556443"/>
-            <a:ext cx="9181639" cy="3319425"/>
+            <a:off x="1426029" y="2557463"/>
+            <a:ext cx="9372600" cy="3636508"/>
           </a:xfrm>
           <a:prstGeom prst="rect">
             <a:avLst/>
@@ -10697,7 +10691,7 @@
     </p:spTree>
     <p:extLst>
       <p:ext uri="{BB962C8B-B14F-4D97-AF65-F5344CB8AC3E}">
-        <p14:creationId xmlns:p14="http://schemas.microsoft.com/office/powerpoint/2010/main" val="762847681"/>
+        <p14:creationId xmlns:p14="http://schemas.microsoft.com/office/powerpoint/2010/main" val="983596551"/>
       </p:ext>
     </p:extLst>
   </p:cSld>
@@ -10729,6 +10723,97 @@
           <p:cNvPr id="2" name="Title 1">
             <a:extLst>
               <a:ext uri="{FF2B5EF4-FFF2-40B4-BE49-F238E27FC236}">
+                <a16:creationId xmlns:a16="http://schemas.microsoft.com/office/drawing/2014/main" id="{97074CB3-C3DE-3302-4512-DCD1BCE1D0A7}"/>
+              </a:ext>
+            </a:extLst>
+          </p:cNvPr>
+          <p:cNvSpPr>
+            <a:spLocks noGrp="1"/>
+          </p:cNvSpPr>
+          <p:nvPr>
+            <p:ph type="title"/>
+          </p:nvPr>
+        </p:nvSpPr>
+        <p:spPr/>
+        <p:txBody>
+          <a:bodyPr/>
+          <a:lstStyle/>
+          <a:p>
+            <a:r>
+              <a:rPr lang="en-US" dirty="0">
+                <a:latin typeface="Times New Roman" panose="02020603050405020304" pitchFamily="18" charset="0"/>
+                <a:cs typeface="Times New Roman" panose="02020603050405020304" pitchFamily="18" charset="0"/>
+              </a:rPr>
+              <a:t>Correlation Analysis with Purchase Price</a:t>
+            </a:r>
+          </a:p>
+        </p:txBody>
+      </p:sp>
+      <p:pic>
+        <p:nvPicPr>
+          <p:cNvPr id="3" name="Picture 2">
+            <a:extLst>
+              <a:ext uri="{FF2B5EF4-FFF2-40B4-BE49-F238E27FC236}">
+                <a16:creationId xmlns:a16="http://schemas.microsoft.com/office/drawing/2014/main" id="{BFEDE7F6-49DC-729B-5093-1781E9794FFE}"/>
+              </a:ext>
+            </a:extLst>
+          </p:cNvPr>
+          <p:cNvPicPr>
+            <a:picLocks noChangeAspect="1"/>
+          </p:cNvPicPr>
+          <p:nvPr/>
+        </p:nvPicPr>
+        <p:blipFill>
+          <a:blip r:embed="rId2"/>
+          <a:stretch>
+            <a:fillRect/>
+          </a:stretch>
+        </p:blipFill>
+        <p:spPr>
+          <a:xfrm>
+            <a:off x="1328057" y="2556932"/>
+            <a:ext cx="9459685" cy="3318936"/>
+          </a:xfrm>
+          <a:prstGeom prst="rect">
+            <a:avLst/>
+          </a:prstGeom>
+        </p:spPr>
+      </p:pic>
+    </p:spTree>
+    <p:extLst>
+      <p:ext uri="{BB962C8B-B14F-4D97-AF65-F5344CB8AC3E}">
+        <p14:creationId xmlns:p14="http://schemas.microsoft.com/office/powerpoint/2010/main" val="762847681"/>
+      </p:ext>
+    </p:extLst>
+  </p:cSld>
+  <p:clrMapOvr>
+    <a:masterClrMapping/>
+  </p:clrMapOvr>
+</p:sld>
+</file>
+
+<file path=ppt/slides/slide48.xml><?xml version="1.0" encoding="utf-8"?>
+<p:sld xmlns:a="http://schemas.openxmlformats.org/drawingml/2006/main" xmlns:r="http://schemas.openxmlformats.org/officeDocument/2006/relationships" xmlns:p="http://schemas.openxmlformats.org/presentationml/2006/main">
+  <p:cSld>
+    <p:spTree>
+      <p:nvGrpSpPr>
+        <p:cNvPr id="1" name=""/>
+        <p:cNvGrpSpPr/>
+        <p:nvPr/>
+      </p:nvGrpSpPr>
+      <p:grpSpPr>
+        <a:xfrm>
+          <a:off x="0" y="0"/>
+          <a:ext cx="0" cy="0"/>
+          <a:chOff x="0" y="0"/>
+          <a:chExt cx="0" cy="0"/>
+        </a:xfrm>
+      </p:grpSpPr>
+      <p:sp>
+        <p:nvSpPr>
+          <p:cNvPr id="2" name="Title 1">
+            <a:extLst>
+              <a:ext uri="{FF2B5EF4-FFF2-40B4-BE49-F238E27FC236}">
                 <a16:creationId xmlns:a16="http://schemas.microsoft.com/office/drawing/2014/main" id="{FEB9A5BA-76E3-FD79-45CD-F4B48EBD08FC}"/>
               </a:ext>
             </a:extLst>
@@ -10844,7 +10929,7 @@
 </p:sld>
 </file>
 
-<file path=ppt/slides/slide48.xml><?xml version="1.0" encoding="utf-8"?>
+<file path=ppt/slides/slide49.xml><?xml version="1.0" encoding="utf-8"?>
 <p:sld xmlns:a="http://schemas.openxmlformats.org/drawingml/2006/main" xmlns:r="http://schemas.openxmlformats.org/officeDocument/2006/relationships" xmlns:p="http://schemas.openxmlformats.org/presentationml/2006/main">
   <p:cSld>
     <p:spTree>
@@ -10943,150 +11028,6 @@
 </p:sld>
 </file>
 
-<file path=ppt/slides/slide49.xml><?xml version="1.0" encoding="utf-8"?>
-<p:sld xmlns:a="http://schemas.openxmlformats.org/drawingml/2006/main" xmlns:r="http://schemas.openxmlformats.org/officeDocument/2006/relationships" xmlns:p="http://schemas.openxmlformats.org/presentationml/2006/main">
-  <p:cSld>
-    <p:spTree>
-      <p:nvGrpSpPr>
-        <p:cNvPr id="1" name=""/>
-        <p:cNvGrpSpPr/>
-        <p:nvPr/>
-      </p:nvGrpSpPr>
-      <p:grpSpPr>
-        <a:xfrm>
-          <a:off x="0" y="0"/>
-          <a:ext cx="0" cy="0"/>
-          <a:chOff x="0" y="0"/>
-          <a:chExt cx="0" cy="0"/>
-        </a:xfrm>
-      </p:grpSpPr>
-      <p:sp>
-        <p:nvSpPr>
-          <p:cNvPr id="2" name="Title 1">
-            <a:extLst>
-              <a:ext uri="{FF2B5EF4-FFF2-40B4-BE49-F238E27FC236}">
-                <a16:creationId xmlns:a16="http://schemas.microsoft.com/office/drawing/2014/main" id="{18E0DD5B-6252-7E18-D241-AA5E7E49A0BA}"/>
-              </a:ext>
-            </a:extLst>
-          </p:cNvPr>
-          <p:cNvSpPr>
-            <a:spLocks noGrp="1"/>
-          </p:cNvSpPr>
-          <p:nvPr>
-            <p:ph type="title"/>
-          </p:nvPr>
-        </p:nvSpPr>
-        <p:spPr/>
-        <p:txBody>
-          <a:bodyPr/>
-          <a:lstStyle/>
-          <a:p>
-            <a:r>
-              <a:rPr lang="en-US" dirty="0">
-                <a:latin typeface="Times New Roman" panose="02020603050405020304" pitchFamily="18" charset="0"/>
-                <a:cs typeface="Times New Roman" panose="02020603050405020304" pitchFamily="18" charset="0"/>
-              </a:rPr>
-              <a:t>Negotiation Outcomes</a:t>
-            </a:r>
-            <a:endParaRPr lang="en-US" dirty="0"/>
-          </a:p>
-        </p:txBody>
-      </p:sp>
-      <p:sp>
-        <p:nvSpPr>
-          <p:cNvPr id="3" name="Content Placeholder 2">
-            <a:extLst>
-              <a:ext uri="{FF2B5EF4-FFF2-40B4-BE49-F238E27FC236}">
-                <a16:creationId xmlns:a16="http://schemas.microsoft.com/office/drawing/2014/main" id="{8663665A-6984-F44D-D231-E50AFC5EA2FB}"/>
-              </a:ext>
-            </a:extLst>
-          </p:cNvPr>
-          <p:cNvSpPr>
-            <a:spLocks noGrp="1"/>
-          </p:cNvSpPr>
-          <p:nvPr>
-            <p:ph idx="1"/>
-          </p:nvPr>
-        </p:nvSpPr>
-        <p:spPr/>
-        <p:txBody>
-          <a:bodyPr/>
-          <a:lstStyle/>
-          <a:p>
-            <a:r>
-              <a:rPr lang="en-US" b="1" dirty="0">
-                <a:latin typeface="Times New Roman" panose="02020603050405020304" pitchFamily="18" charset="0"/>
-                <a:cs typeface="Times New Roman" panose="02020603050405020304" pitchFamily="18" charset="0"/>
-              </a:rPr>
-              <a:t>Findings</a:t>
-            </a:r>
-          </a:p>
-          <a:p>
-            <a:r>
-              <a:rPr lang="en-US" dirty="0">
-                <a:latin typeface="Times New Roman" panose="02020603050405020304" pitchFamily="18" charset="0"/>
-                <a:cs typeface="Times New Roman" panose="02020603050405020304" pitchFamily="18" charset="0"/>
-              </a:rPr>
-              <a:t>Purchase prices are generally below offer prices. </a:t>
-            </a:r>
-          </a:p>
-          <a:p>
-            <a:r>
-              <a:rPr lang="en-US" dirty="0">
-                <a:latin typeface="Times New Roman" panose="02020603050405020304" pitchFamily="18" charset="0"/>
-                <a:cs typeface="Times New Roman" panose="02020603050405020304" pitchFamily="18" charset="0"/>
-              </a:rPr>
-              <a:t>Negotiation differences vary across property types. </a:t>
-            </a:r>
-          </a:p>
-          <a:p>
-            <a:r>
-              <a:rPr lang="en-US" dirty="0">
-                <a:latin typeface="Times New Roman" panose="02020603050405020304" pitchFamily="18" charset="0"/>
-                <a:cs typeface="Times New Roman" panose="02020603050405020304" pitchFamily="18" charset="0"/>
-              </a:rPr>
-              <a:t>Regional differences also exist. </a:t>
-            </a:r>
-          </a:p>
-          <a:p>
-            <a:r>
-              <a:rPr lang="en-US" b="1" dirty="0">
-                <a:latin typeface="Times New Roman" panose="02020603050405020304" pitchFamily="18" charset="0"/>
-                <a:cs typeface="Times New Roman" panose="02020603050405020304" pitchFamily="18" charset="0"/>
-              </a:rPr>
-              <a:t>Conclusion</a:t>
-            </a:r>
-          </a:p>
-          <a:p>
-            <a:r>
-              <a:rPr lang="en-US" dirty="0">
-                <a:latin typeface="Times New Roman" panose="02020603050405020304" pitchFamily="18" charset="0"/>
-                <a:cs typeface="Times New Roman" panose="02020603050405020304" pitchFamily="18" charset="0"/>
-              </a:rPr>
-              <a:t>Negotiation outcomes depend on both property type and location.</a:t>
-            </a:r>
-          </a:p>
-          <a:p>
-            <a:endParaRPr lang="en-US" dirty="0">
-              <a:latin typeface="Times New Roman" panose="02020603050405020304" pitchFamily="18" charset="0"/>
-              <a:cs typeface="Times New Roman" panose="02020603050405020304" pitchFamily="18" charset="0"/>
-            </a:endParaRPr>
-          </a:p>
-        </p:txBody>
-      </p:sp>
-    </p:spTree>
-    <p:extLst>
-      <p:ext uri="{BB962C8B-B14F-4D97-AF65-F5344CB8AC3E}">
-        <p14:creationId xmlns:p14="http://schemas.microsoft.com/office/powerpoint/2010/main" val="2155903795"/>
-      </p:ext>
-    </p:extLst>
-  </p:cSld>
-  <p:clrMapOvr>
-    <a:masterClrMapping/>
-  </p:clrMapOvr>
-</p:sld>
-</file>
-
 <file path=ppt/slides/slide5.xml><?xml version="1.0" encoding="utf-8"?>
 <p:sld xmlns:a="http://schemas.openxmlformats.org/drawingml/2006/main" xmlns:r="http://schemas.openxmlformats.org/officeDocument/2006/relationships" xmlns:p="http://schemas.openxmlformats.org/presentationml/2006/main">
   <p:cSld>
@@ -11206,6 +11147,150 @@
 </file>
 
 <file path=ppt/slides/slide50.xml><?xml version="1.0" encoding="utf-8"?>
+<p:sld xmlns:a="http://schemas.openxmlformats.org/drawingml/2006/main" xmlns:r="http://schemas.openxmlformats.org/officeDocument/2006/relationships" xmlns:p="http://schemas.openxmlformats.org/presentationml/2006/main">
+  <p:cSld>
+    <p:spTree>
+      <p:nvGrpSpPr>
+        <p:cNvPr id="1" name=""/>
+        <p:cNvGrpSpPr/>
+        <p:nvPr/>
+      </p:nvGrpSpPr>
+      <p:grpSpPr>
+        <a:xfrm>
+          <a:off x="0" y="0"/>
+          <a:ext cx="0" cy="0"/>
+          <a:chOff x="0" y="0"/>
+          <a:chExt cx="0" cy="0"/>
+        </a:xfrm>
+      </p:grpSpPr>
+      <p:sp>
+        <p:nvSpPr>
+          <p:cNvPr id="2" name="Title 1">
+            <a:extLst>
+              <a:ext uri="{FF2B5EF4-FFF2-40B4-BE49-F238E27FC236}">
+                <a16:creationId xmlns:a16="http://schemas.microsoft.com/office/drawing/2014/main" id="{18E0DD5B-6252-7E18-D241-AA5E7E49A0BA}"/>
+              </a:ext>
+            </a:extLst>
+          </p:cNvPr>
+          <p:cNvSpPr>
+            <a:spLocks noGrp="1"/>
+          </p:cNvSpPr>
+          <p:nvPr>
+            <p:ph type="title"/>
+          </p:nvPr>
+        </p:nvSpPr>
+        <p:spPr/>
+        <p:txBody>
+          <a:bodyPr/>
+          <a:lstStyle/>
+          <a:p>
+            <a:r>
+              <a:rPr lang="en-US" dirty="0">
+                <a:latin typeface="Times New Roman" panose="02020603050405020304" pitchFamily="18" charset="0"/>
+                <a:cs typeface="Times New Roman" panose="02020603050405020304" pitchFamily="18" charset="0"/>
+              </a:rPr>
+              <a:t>Negotiation Outcomes</a:t>
+            </a:r>
+            <a:endParaRPr lang="en-US" dirty="0"/>
+          </a:p>
+        </p:txBody>
+      </p:sp>
+      <p:sp>
+        <p:nvSpPr>
+          <p:cNvPr id="3" name="Content Placeholder 2">
+            <a:extLst>
+              <a:ext uri="{FF2B5EF4-FFF2-40B4-BE49-F238E27FC236}">
+                <a16:creationId xmlns:a16="http://schemas.microsoft.com/office/drawing/2014/main" id="{8663665A-6984-F44D-D231-E50AFC5EA2FB}"/>
+              </a:ext>
+            </a:extLst>
+          </p:cNvPr>
+          <p:cNvSpPr>
+            <a:spLocks noGrp="1"/>
+          </p:cNvSpPr>
+          <p:nvPr>
+            <p:ph idx="1"/>
+          </p:nvPr>
+        </p:nvSpPr>
+        <p:spPr/>
+        <p:txBody>
+          <a:bodyPr/>
+          <a:lstStyle/>
+          <a:p>
+            <a:r>
+              <a:rPr lang="en-US" b="1" dirty="0">
+                <a:latin typeface="Times New Roman" panose="02020603050405020304" pitchFamily="18" charset="0"/>
+                <a:cs typeface="Times New Roman" panose="02020603050405020304" pitchFamily="18" charset="0"/>
+              </a:rPr>
+              <a:t>Findings</a:t>
+            </a:r>
+          </a:p>
+          <a:p>
+            <a:r>
+              <a:rPr lang="en-US" dirty="0">
+                <a:latin typeface="Times New Roman" panose="02020603050405020304" pitchFamily="18" charset="0"/>
+                <a:cs typeface="Times New Roman" panose="02020603050405020304" pitchFamily="18" charset="0"/>
+              </a:rPr>
+              <a:t>Purchase prices are generally below offer prices. </a:t>
+            </a:r>
+          </a:p>
+          <a:p>
+            <a:r>
+              <a:rPr lang="en-US" dirty="0">
+                <a:latin typeface="Times New Roman" panose="02020603050405020304" pitchFamily="18" charset="0"/>
+                <a:cs typeface="Times New Roman" panose="02020603050405020304" pitchFamily="18" charset="0"/>
+              </a:rPr>
+              <a:t>Negotiation differences vary across property types. </a:t>
+            </a:r>
+          </a:p>
+          <a:p>
+            <a:r>
+              <a:rPr lang="en-US" dirty="0">
+                <a:latin typeface="Times New Roman" panose="02020603050405020304" pitchFamily="18" charset="0"/>
+                <a:cs typeface="Times New Roman" panose="02020603050405020304" pitchFamily="18" charset="0"/>
+              </a:rPr>
+              <a:t>Regional differences also exist. </a:t>
+            </a:r>
+          </a:p>
+          <a:p>
+            <a:r>
+              <a:rPr lang="en-US" b="1" dirty="0">
+                <a:latin typeface="Times New Roman" panose="02020603050405020304" pitchFamily="18" charset="0"/>
+                <a:cs typeface="Times New Roman" panose="02020603050405020304" pitchFamily="18" charset="0"/>
+              </a:rPr>
+              <a:t>Conclusion</a:t>
+            </a:r>
+          </a:p>
+          <a:p>
+            <a:r>
+              <a:rPr lang="en-US" dirty="0">
+                <a:latin typeface="Times New Roman" panose="02020603050405020304" pitchFamily="18" charset="0"/>
+                <a:cs typeface="Times New Roman" panose="02020603050405020304" pitchFamily="18" charset="0"/>
+              </a:rPr>
+              <a:t>Negotiation outcomes depend on both property type and location.</a:t>
+            </a:r>
+          </a:p>
+          <a:p>
+            <a:endParaRPr lang="en-US" dirty="0">
+              <a:latin typeface="Times New Roman" panose="02020603050405020304" pitchFamily="18" charset="0"/>
+              <a:cs typeface="Times New Roman" panose="02020603050405020304" pitchFamily="18" charset="0"/>
+            </a:endParaRPr>
+          </a:p>
+        </p:txBody>
+      </p:sp>
+    </p:spTree>
+    <p:extLst>
+      <p:ext uri="{BB962C8B-B14F-4D97-AF65-F5344CB8AC3E}">
+        <p14:creationId xmlns:p14="http://schemas.microsoft.com/office/powerpoint/2010/main" val="2155903795"/>
+      </p:ext>
+    </p:extLst>
+  </p:cSld>
+  <p:clrMapOvr>
+    <a:masterClrMapping/>
+  </p:clrMapOvr>
+</p:sld>
+</file>
+
+<file path=ppt/slides/slide51.xml><?xml version="1.0" encoding="utf-8"?>
 <p:sld xmlns:a="http://schemas.openxmlformats.org/drawingml/2006/main" xmlns:r="http://schemas.openxmlformats.org/officeDocument/2006/relationships" xmlns:p="http://schemas.openxmlformats.org/presentationml/2006/main">
   <p:cSld>
     <p:spTree>
@@ -11304,7 +11389,7 @@
 </p:sld>
 </file>
 
-<file path=ppt/slides/slide51.xml><?xml version="1.0" encoding="utf-8"?>
+<file path=ppt/slides/slide52.xml><?xml version="1.0" encoding="utf-8"?>
 <p:sld xmlns:a="http://schemas.openxmlformats.org/drawingml/2006/main" xmlns:r="http://schemas.openxmlformats.org/officeDocument/2006/relationships" xmlns:p="http://schemas.openxmlformats.org/presentationml/2006/main">
   <p:cSld>
     <p:spTree>
@@ -11404,161 +11489,6 @@
 </p:sld>
 </file>
 
-<file path=ppt/slides/slide52.xml><?xml version="1.0" encoding="utf-8"?>
-<p:sld xmlns:a="http://schemas.openxmlformats.org/drawingml/2006/main" xmlns:r="http://schemas.openxmlformats.org/officeDocument/2006/relationships" xmlns:p="http://schemas.openxmlformats.org/presentationml/2006/main">
-  <p:cSld>
-    <p:spTree>
-      <p:nvGrpSpPr>
-        <p:cNvPr id="1" name=""/>
-        <p:cNvGrpSpPr/>
-        <p:nvPr/>
-      </p:nvGrpSpPr>
-      <p:grpSpPr>
-        <a:xfrm>
-          <a:off x="0" y="0"/>
-          <a:ext cx="0" cy="0"/>
-          <a:chOff x="0" y="0"/>
-          <a:chExt cx="0" cy="0"/>
-        </a:xfrm>
-      </p:grpSpPr>
-      <p:sp>
-        <p:nvSpPr>
-          <p:cNvPr id="2" name="Title 1">
-            <a:extLst>
-              <a:ext uri="{FF2B5EF4-FFF2-40B4-BE49-F238E27FC236}">
-                <a16:creationId xmlns:a16="http://schemas.microsoft.com/office/drawing/2014/main" id="{73A862B1-C3BC-C83F-32F7-8E8629F22F14}"/>
-              </a:ext>
-            </a:extLst>
-          </p:cNvPr>
-          <p:cNvSpPr>
-            <a:spLocks noGrp="1"/>
-          </p:cNvSpPr>
-          <p:nvPr>
-            <p:ph type="title"/>
-          </p:nvPr>
-        </p:nvSpPr>
-        <p:spPr/>
-        <p:txBody>
-          <a:bodyPr/>
-          <a:lstStyle/>
-          <a:p>
-            <a:r>
-              <a:rPr lang="en-US" dirty="0">
-                <a:latin typeface="Times New Roman" panose="02020603050405020304" pitchFamily="18" charset="0"/>
-                <a:cs typeface="Times New Roman" panose="02020603050405020304" pitchFamily="18" charset="0"/>
-              </a:rPr>
-              <a:t>Property Age and Construction Decade</a:t>
-            </a:r>
-            <a:endParaRPr lang="en-US" dirty="0"/>
-          </a:p>
-        </p:txBody>
-      </p:sp>
-      <p:sp>
-        <p:nvSpPr>
-          <p:cNvPr id="3" name="Content Placeholder 2">
-            <a:extLst>
-              <a:ext uri="{FF2B5EF4-FFF2-40B4-BE49-F238E27FC236}">
-                <a16:creationId xmlns:a16="http://schemas.microsoft.com/office/drawing/2014/main" id="{B05366C7-3268-C83E-4EB9-D8B19AD0A8BC}"/>
-              </a:ext>
-            </a:extLst>
-          </p:cNvPr>
-          <p:cNvSpPr>
-            <a:spLocks noGrp="1"/>
-          </p:cNvSpPr>
-          <p:nvPr>
-            <p:ph idx="1"/>
-          </p:nvPr>
-        </p:nvSpPr>
-        <p:spPr/>
-        <p:txBody>
-          <a:bodyPr>
-            <a:normAutofit fontScale="92500" lnSpcReduction="10000"/>
-          </a:bodyPr>
-          <a:lstStyle/>
-          <a:p>
-            <a:r>
-              <a:rPr lang="en-US" b="1" dirty="0">
-                <a:latin typeface="Times New Roman" panose="02020603050405020304" pitchFamily="18" charset="0"/>
-                <a:cs typeface="Times New Roman" panose="02020603050405020304" pitchFamily="18" charset="0"/>
-              </a:rPr>
-              <a:t>Findings</a:t>
-            </a:r>
-          </a:p>
-          <a:p>
-            <a:r>
-              <a:rPr lang="en-US" dirty="0">
-                <a:latin typeface="Times New Roman" panose="02020603050405020304" pitchFamily="18" charset="0"/>
-                <a:cs typeface="Times New Roman" panose="02020603050405020304" pitchFamily="18" charset="0"/>
-              </a:rPr>
-              <a:t>Newer properties generally have higher average prices. </a:t>
-            </a:r>
-          </a:p>
-          <a:p>
-            <a:r>
-              <a:rPr lang="en-US" dirty="0">
-                <a:latin typeface="Times New Roman" panose="02020603050405020304" pitchFamily="18" charset="0"/>
-                <a:cs typeface="Times New Roman" panose="02020603050405020304" pitchFamily="18" charset="0"/>
-              </a:rPr>
-              <a:t>Housing prices decrease as buildings age. </a:t>
-            </a:r>
-          </a:p>
-          <a:p>
-            <a:r>
-              <a:rPr lang="en-US" dirty="0">
-                <a:latin typeface="Times New Roman" panose="02020603050405020304" pitchFamily="18" charset="0"/>
-                <a:cs typeface="Times New Roman" panose="02020603050405020304" pitchFamily="18" charset="0"/>
-              </a:rPr>
-              <a:t>Some older historic properties remain valuable. </a:t>
-            </a:r>
-          </a:p>
-          <a:p>
-            <a:r>
-              <a:rPr lang="en-US" dirty="0">
-                <a:latin typeface="Times New Roman" panose="02020603050405020304" pitchFamily="18" charset="0"/>
-                <a:cs typeface="Times New Roman" panose="02020603050405020304" pitchFamily="18" charset="0"/>
-              </a:rPr>
-              <a:t>Construction decade influences market value. </a:t>
-            </a:r>
-          </a:p>
-          <a:p>
-            <a:r>
-              <a:rPr lang="en-US" b="1" dirty="0">
-                <a:latin typeface="Times New Roman" panose="02020603050405020304" pitchFamily="18" charset="0"/>
-                <a:cs typeface="Times New Roman" panose="02020603050405020304" pitchFamily="18" charset="0"/>
-              </a:rPr>
-              <a:t>Conclusion</a:t>
-            </a:r>
-          </a:p>
-          <a:p>
-            <a:r>
-              <a:rPr lang="en-US" dirty="0">
-                <a:latin typeface="Times New Roman" panose="02020603050405020304" pitchFamily="18" charset="0"/>
-                <a:cs typeface="Times New Roman" panose="02020603050405020304" pitchFamily="18" charset="0"/>
-              </a:rPr>
-              <a:t>Property age and construction period significantly affect housing prices.</a:t>
-            </a:r>
-          </a:p>
-          <a:p>
-            <a:endParaRPr lang="en-US" dirty="0">
-              <a:latin typeface="Times New Roman" panose="02020603050405020304" pitchFamily="18" charset="0"/>
-              <a:cs typeface="Times New Roman" panose="02020603050405020304" pitchFamily="18" charset="0"/>
-            </a:endParaRPr>
-          </a:p>
-        </p:txBody>
-      </p:sp>
-    </p:spTree>
-    <p:extLst>
-      <p:ext uri="{BB962C8B-B14F-4D97-AF65-F5344CB8AC3E}">
-        <p14:creationId xmlns:p14="http://schemas.microsoft.com/office/powerpoint/2010/main" val="2301407379"/>
-      </p:ext>
-    </p:extLst>
-  </p:cSld>
-  <p:clrMapOvr>
-    <a:masterClrMapping/>
-  </p:clrMapOvr>
-</p:sld>
-</file>
-
 <file path=ppt/slides/slide53.xml><?xml version="1.0" encoding="utf-8"?>
 <p:sld xmlns:a="http://schemas.openxmlformats.org/drawingml/2006/main" xmlns:r="http://schemas.openxmlformats.org/officeDocument/2006/relationships" xmlns:p="http://schemas.openxmlformats.org/presentationml/2006/main">
   <p:cSld>
@@ -11581,7 +11511,7 @@
           <p:cNvPr id="2" name="Title 1">
             <a:extLst>
               <a:ext uri="{FF2B5EF4-FFF2-40B4-BE49-F238E27FC236}">
-                <a16:creationId xmlns:a16="http://schemas.microsoft.com/office/drawing/2014/main" id="{49B8C627-F9E0-B3AF-A77F-431DECBB3933}"/>
+                <a16:creationId xmlns:a16="http://schemas.microsoft.com/office/drawing/2014/main" id="{73A862B1-C3BC-C83F-32F7-8E8629F22F14}"/>
               </a:ext>
             </a:extLst>
           </p:cNvPr>
@@ -11602,8 +11532,9 @@
                 <a:latin typeface="Times New Roman" panose="02020603050405020304" pitchFamily="18" charset="0"/>
                 <a:cs typeface="Times New Roman" panose="02020603050405020304" pitchFamily="18" charset="0"/>
               </a:rPr>
-              <a:t>KEY FINDINGS</a:t>
-            </a:r>
+              <a:t>Property Age and Construction Decade</a:t>
+            </a:r>
+            <a:endParaRPr lang="en-US" dirty="0"/>
           </a:p>
         </p:txBody>
       </p:sp>
@@ -11612,7 +11543,7 @@
           <p:cNvPr id="3" name="Content Placeholder 2">
             <a:extLst>
               <a:ext uri="{FF2B5EF4-FFF2-40B4-BE49-F238E27FC236}">
-                <a16:creationId xmlns:a16="http://schemas.microsoft.com/office/drawing/2014/main" id="{FA7FCB0A-BC28-1D67-1F91-F79CAB5784E5}"/>
+                <a16:creationId xmlns:a16="http://schemas.microsoft.com/office/drawing/2014/main" id="{B05366C7-3268-C83E-4EB9-D8B19AD0A8BC}"/>
               </a:ext>
             </a:extLst>
           </p:cNvPr>
@@ -11626,87 +11557,84 @@
         <p:spPr/>
         <p:txBody>
           <a:bodyPr>
-            <a:normAutofit fontScale="92500" lnSpcReduction="20000"/>
+            <a:normAutofit fontScale="92500" lnSpcReduction="10000"/>
           </a:bodyPr>
           <a:lstStyle/>
           <a:p>
             <a:r>
-              <a:rPr lang="en-US" dirty="0">
-                <a:latin typeface="Times New Roman" panose="02020603050405020304" pitchFamily="18" charset="0"/>
-                <a:cs typeface="Times New Roman" panose="02020603050405020304" pitchFamily="18" charset="0"/>
-              </a:rPr>
-              <a:t>Region strongly influences housing prices. </a:t>
-            </a:r>
-          </a:p>
-          <a:p>
-            <a:r>
-              <a:rPr lang="en-US" dirty="0">
-                <a:latin typeface="Times New Roman" panose="02020603050405020304" pitchFamily="18" charset="0"/>
-                <a:cs typeface="Times New Roman" panose="02020603050405020304" pitchFamily="18" charset="0"/>
-              </a:rPr>
-              <a:t>Property size positively affects purchase price. </a:t>
-            </a:r>
-          </a:p>
-          <a:p>
-            <a:r>
-              <a:rPr lang="en-US" dirty="0">
-                <a:latin typeface="Times New Roman" panose="02020603050405020304" pitchFamily="18" charset="0"/>
-                <a:cs typeface="Times New Roman" panose="02020603050405020304" pitchFamily="18" charset="0"/>
-              </a:rPr>
-              <a:t>Villas are generally more expensive. </a:t>
-            </a:r>
-          </a:p>
-          <a:p>
-            <a:r>
-              <a:rPr lang="en-US" dirty="0">
-                <a:latin typeface="Times New Roman" panose="02020603050405020304" pitchFamily="18" charset="0"/>
-                <a:cs typeface="Times New Roman" panose="02020603050405020304" pitchFamily="18" charset="0"/>
-              </a:rPr>
-              <a:t>Copenhagen remains the most expensive area. </a:t>
-            </a:r>
-          </a:p>
-          <a:p>
-            <a:r>
-              <a:rPr lang="en-US" dirty="0">
-                <a:latin typeface="Times New Roman" panose="02020603050405020304" pitchFamily="18" charset="0"/>
-                <a:cs typeface="Times New Roman" panose="02020603050405020304" pitchFamily="18" charset="0"/>
-              </a:rPr>
-              <a:t>Newer properties command higher prices. </a:t>
-            </a:r>
-          </a:p>
-          <a:p>
-            <a:r>
-              <a:rPr lang="en-US" dirty="0">
-                <a:latin typeface="Times New Roman" panose="02020603050405020304" pitchFamily="18" charset="0"/>
-                <a:cs typeface="Times New Roman" panose="02020603050405020304" pitchFamily="18" charset="0"/>
-              </a:rPr>
-              <a:t>Negotiation outcomes differ across regions. </a:t>
-            </a:r>
-          </a:p>
-          <a:p>
-            <a:r>
-              <a:rPr lang="en-US" dirty="0">
-                <a:latin typeface="Times New Roman" panose="02020603050405020304" pitchFamily="18" charset="0"/>
-                <a:cs typeface="Times New Roman" panose="02020603050405020304" pitchFamily="18" charset="0"/>
-              </a:rPr>
-              <a:t>Construction decade affects valuation. </a:t>
-            </a:r>
-          </a:p>
-          <a:p>
-            <a:r>
-              <a:rPr lang="en-US" dirty="0">
-                <a:latin typeface="Times New Roman" panose="02020603050405020304" pitchFamily="18" charset="0"/>
-                <a:cs typeface="Times New Roman" panose="02020603050405020304" pitchFamily="18" charset="0"/>
-              </a:rPr>
-              <a:t>Exploratory Data Analysis successfully identified market trends.</a:t>
-            </a:r>
+              <a:rPr lang="en-US" b="1" dirty="0">
+                <a:latin typeface="Times New Roman" panose="02020603050405020304" pitchFamily="18" charset="0"/>
+                <a:cs typeface="Times New Roman" panose="02020603050405020304" pitchFamily="18" charset="0"/>
+              </a:rPr>
+              <a:t>Findings</a:t>
+            </a:r>
+          </a:p>
+          <a:p>
+            <a:r>
+              <a:rPr lang="en-US" dirty="0">
+                <a:latin typeface="Times New Roman" panose="02020603050405020304" pitchFamily="18" charset="0"/>
+                <a:cs typeface="Times New Roman" panose="02020603050405020304" pitchFamily="18" charset="0"/>
+              </a:rPr>
+              <a:t>Newer properties generally have higher average prices. </a:t>
+            </a:r>
+          </a:p>
+          <a:p>
+            <a:r>
+              <a:rPr lang="en-US" dirty="0">
+                <a:latin typeface="Times New Roman" panose="02020603050405020304" pitchFamily="18" charset="0"/>
+                <a:cs typeface="Times New Roman" panose="02020603050405020304" pitchFamily="18" charset="0"/>
+              </a:rPr>
+              <a:t>Housing prices decrease as buildings age. </a:t>
+            </a:r>
+          </a:p>
+          <a:p>
+            <a:r>
+              <a:rPr lang="en-US" dirty="0">
+                <a:latin typeface="Times New Roman" panose="02020603050405020304" pitchFamily="18" charset="0"/>
+                <a:cs typeface="Times New Roman" panose="02020603050405020304" pitchFamily="18" charset="0"/>
+              </a:rPr>
+              <a:t>Some older historic properties remain valuable. </a:t>
+            </a:r>
+          </a:p>
+          <a:p>
+            <a:r>
+              <a:rPr lang="en-US" dirty="0">
+                <a:latin typeface="Times New Roman" panose="02020603050405020304" pitchFamily="18" charset="0"/>
+                <a:cs typeface="Times New Roman" panose="02020603050405020304" pitchFamily="18" charset="0"/>
+              </a:rPr>
+              <a:t>Construction decade influences market value. </a:t>
+            </a:r>
+          </a:p>
+          <a:p>
+            <a:r>
+              <a:rPr lang="en-US" b="1" dirty="0">
+                <a:latin typeface="Times New Roman" panose="02020603050405020304" pitchFamily="18" charset="0"/>
+                <a:cs typeface="Times New Roman" panose="02020603050405020304" pitchFamily="18" charset="0"/>
+              </a:rPr>
+              <a:t>Conclusion</a:t>
+            </a:r>
+          </a:p>
+          <a:p>
+            <a:r>
+              <a:rPr lang="en-US" dirty="0">
+                <a:latin typeface="Times New Roman" panose="02020603050405020304" pitchFamily="18" charset="0"/>
+                <a:cs typeface="Times New Roman" panose="02020603050405020304" pitchFamily="18" charset="0"/>
+              </a:rPr>
+              <a:t>Property age and construction period significantly affect housing prices.</a:t>
+            </a:r>
+          </a:p>
+          <a:p>
+            <a:endParaRPr lang="en-US" dirty="0">
+              <a:latin typeface="Times New Roman" panose="02020603050405020304" pitchFamily="18" charset="0"/>
+              <a:cs typeface="Times New Roman" panose="02020603050405020304" pitchFamily="18" charset="0"/>
+            </a:endParaRPr>
           </a:p>
         </p:txBody>
       </p:sp>
     </p:spTree>
     <p:extLst>
       <p:ext uri="{BB962C8B-B14F-4D97-AF65-F5344CB8AC3E}">
-        <p14:creationId xmlns:p14="http://schemas.microsoft.com/office/powerpoint/2010/main" val="1939795852"/>
+        <p14:creationId xmlns:p14="http://schemas.microsoft.com/office/powerpoint/2010/main" val="2301407379"/>
       </p:ext>
     </p:extLst>
   </p:cSld>
@@ -11738,7 +11666,7 @@
           <p:cNvPr id="2" name="Title 1">
             <a:extLst>
               <a:ext uri="{FF2B5EF4-FFF2-40B4-BE49-F238E27FC236}">
-                <a16:creationId xmlns:a16="http://schemas.microsoft.com/office/drawing/2014/main" id="{E4DAD861-1E97-9592-A23D-5CCD9B138240}"/>
+                <a16:creationId xmlns:a16="http://schemas.microsoft.com/office/drawing/2014/main" id="{49B8C627-F9E0-B3AF-A77F-431DECBB3933}"/>
               </a:ext>
             </a:extLst>
           </p:cNvPr>
@@ -11751,17 +11679,15 @@
         </p:nvSpPr>
         <p:spPr/>
         <p:txBody>
-          <a:bodyPr>
-            <a:normAutofit/>
-          </a:bodyPr>
-          <a:lstStyle/>
-          <a:p>
-            <a:r>
-              <a:rPr lang="en-US" dirty="0">
-                <a:latin typeface="Times New Roman" panose="02020603050405020304" pitchFamily="18" charset="0"/>
-                <a:cs typeface="Times New Roman" panose="02020603050405020304" pitchFamily="18" charset="0"/>
-              </a:rPr>
-              <a:t>LIMITATIONS</a:t>
+          <a:bodyPr/>
+          <a:lstStyle/>
+          <a:p>
+            <a:r>
+              <a:rPr lang="en-US" dirty="0">
+                <a:latin typeface="Times New Roman" panose="02020603050405020304" pitchFamily="18" charset="0"/>
+                <a:cs typeface="Times New Roman" panose="02020603050405020304" pitchFamily="18" charset="0"/>
+              </a:rPr>
+              <a:t>KEY FINDINGS</a:t>
             </a:r>
           </a:p>
         </p:txBody>
@@ -11771,7 +11697,7 @@
           <p:cNvPr id="3" name="Content Placeholder 2">
             <a:extLst>
               <a:ext uri="{FF2B5EF4-FFF2-40B4-BE49-F238E27FC236}">
-                <a16:creationId xmlns:a16="http://schemas.microsoft.com/office/drawing/2014/main" id="{4E1D73CC-BF44-61B6-B995-F8A10CA4B5C5}"/>
+                <a16:creationId xmlns:a16="http://schemas.microsoft.com/office/drawing/2014/main" id="{FA7FCB0A-BC28-1D67-1F91-F79CAB5784E5}"/>
               </a:ext>
             </a:extLst>
           </p:cNvPr>
@@ -11784,65 +11710,88 @@
         </p:nvSpPr>
         <p:spPr/>
         <p:txBody>
-          <a:bodyPr/>
-          <a:lstStyle/>
-          <a:p>
-            <a:r>
-              <a:rPr lang="en-US" dirty="0">
-                <a:latin typeface="Times New Roman" panose="02020603050405020304" pitchFamily="18" charset="0"/>
-                <a:cs typeface="Times New Roman" panose="02020603050405020304" pitchFamily="18" charset="0"/>
-              </a:rPr>
-              <a:t>Dataset limited to available variables. </a:t>
-            </a:r>
-          </a:p>
-          <a:p>
-            <a:r>
-              <a:rPr lang="en-US" dirty="0">
-                <a:latin typeface="Times New Roman" panose="02020603050405020304" pitchFamily="18" charset="0"/>
-                <a:cs typeface="Times New Roman" panose="02020603050405020304" pitchFamily="18" charset="0"/>
-              </a:rPr>
-              <a:t>Inflation was not considered. </a:t>
-            </a:r>
-          </a:p>
-          <a:p>
-            <a:r>
-              <a:rPr lang="en-US" dirty="0">
-                <a:latin typeface="Times New Roman" panose="02020603050405020304" pitchFamily="18" charset="0"/>
-                <a:cs typeface="Times New Roman" panose="02020603050405020304" pitchFamily="18" charset="0"/>
-              </a:rPr>
-              <a:t>Interest rates were excluded. </a:t>
-            </a:r>
-          </a:p>
-          <a:p>
-            <a:r>
-              <a:rPr lang="en-US" dirty="0">
-                <a:latin typeface="Times New Roman" panose="02020603050405020304" pitchFamily="18" charset="0"/>
-                <a:cs typeface="Times New Roman" panose="02020603050405020304" pitchFamily="18" charset="0"/>
-              </a:rPr>
-              <a:t>Economic indicators were unavailable. </a:t>
-            </a:r>
-          </a:p>
-          <a:p>
-            <a:r>
-              <a:rPr lang="en-US" dirty="0">
-                <a:latin typeface="Times New Roman" panose="02020603050405020304" pitchFamily="18" charset="0"/>
-                <a:cs typeface="Times New Roman" panose="02020603050405020304" pitchFamily="18" charset="0"/>
-              </a:rPr>
-              <a:t>Results are limited to the study period.</a:t>
-            </a:r>
-          </a:p>
-          <a:p>
-            <a:endParaRPr lang="en-US" dirty="0">
-              <a:latin typeface="Times New Roman" panose="02020603050405020304" pitchFamily="18" charset="0"/>
-              <a:cs typeface="Times New Roman" panose="02020603050405020304" pitchFamily="18" charset="0"/>
-            </a:endParaRPr>
+          <a:bodyPr>
+            <a:normAutofit fontScale="92500" lnSpcReduction="20000"/>
+          </a:bodyPr>
+          <a:lstStyle/>
+          <a:p>
+            <a:r>
+              <a:rPr lang="en-US" dirty="0">
+                <a:latin typeface="Times New Roman" panose="02020603050405020304" pitchFamily="18" charset="0"/>
+                <a:cs typeface="Times New Roman" panose="02020603050405020304" pitchFamily="18" charset="0"/>
+              </a:rPr>
+              <a:t>Region strongly influences housing prices. </a:t>
+            </a:r>
+          </a:p>
+          <a:p>
+            <a:r>
+              <a:rPr lang="en-US" dirty="0">
+                <a:latin typeface="Times New Roman" panose="02020603050405020304" pitchFamily="18" charset="0"/>
+                <a:cs typeface="Times New Roman" panose="02020603050405020304" pitchFamily="18" charset="0"/>
+              </a:rPr>
+              <a:t>Property size positively affects purchase price. </a:t>
+            </a:r>
+          </a:p>
+          <a:p>
+            <a:r>
+              <a:rPr lang="en-US" dirty="0">
+                <a:latin typeface="Times New Roman" panose="02020603050405020304" pitchFamily="18" charset="0"/>
+                <a:cs typeface="Times New Roman" panose="02020603050405020304" pitchFamily="18" charset="0"/>
+              </a:rPr>
+              <a:t>Villas are generally more expensive. </a:t>
+            </a:r>
+          </a:p>
+          <a:p>
+            <a:r>
+              <a:rPr lang="en-US" dirty="0">
+                <a:latin typeface="Times New Roman" panose="02020603050405020304" pitchFamily="18" charset="0"/>
+                <a:cs typeface="Times New Roman" panose="02020603050405020304" pitchFamily="18" charset="0"/>
+              </a:rPr>
+              <a:t>Copenhagen remains the most expensive area. </a:t>
+            </a:r>
+          </a:p>
+          <a:p>
+            <a:r>
+              <a:rPr lang="en-US" dirty="0">
+                <a:latin typeface="Times New Roman" panose="02020603050405020304" pitchFamily="18" charset="0"/>
+                <a:cs typeface="Times New Roman" panose="02020603050405020304" pitchFamily="18" charset="0"/>
+              </a:rPr>
+              <a:t>Newer properties command higher prices. </a:t>
+            </a:r>
+          </a:p>
+          <a:p>
+            <a:r>
+              <a:rPr lang="en-US" dirty="0">
+                <a:latin typeface="Times New Roman" panose="02020603050405020304" pitchFamily="18" charset="0"/>
+                <a:cs typeface="Times New Roman" panose="02020603050405020304" pitchFamily="18" charset="0"/>
+              </a:rPr>
+              <a:t>Negotiation outcomes differ across regions. </a:t>
+            </a:r>
+          </a:p>
+          <a:p>
+            <a:r>
+              <a:rPr lang="en-US" dirty="0">
+                <a:latin typeface="Times New Roman" panose="02020603050405020304" pitchFamily="18" charset="0"/>
+                <a:cs typeface="Times New Roman" panose="02020603050405020304" pitchFamily="18" charset="0"/>
+              </a:rPr>
+              <a:t>Construction decade affects valuation. </a:t>
+            </a:r>
+          </a:p>
+          <a:p>
+            <a:r>
+              <a:rPr lang="en-US" dirty="0">
+                <a:latin typeface="Times New Roman" panose="02020603050405020304" pitchFamily="18" charset="0"/>
+                <a:cs typeface="Times New Roman" panose="02020603050405020304" pitchFamily="18" charset="0"/>
+              </a:rPr>
+              <a:t>Exploratory Data Analysis successfully identified market trends.</a:t>
+            </a:r>
           </a:p>
         </p:txBody>
       </p:sp>
     </p:spTree>
     <p:extLst>
       <p:ext uri="{BB962C8B-B14F-4D97-AF65-F5344CB8AC3E}">
-        <p14:creationId xmlns:p14="http://schemas.microsoft.com/office/powerpoint/2010/main" val="3458179084"/>
+        <p14:creationId xmlns:p14="http://schemas.microsoft.com/office/powerpoint/2010/main" val="1939795852"/>
       </p:ext>
     </p:extLst>
   </p:cSld>
@@ -11874,7 +11823,7 @@
           <p:cNvPr id="2" name="Title 1">
             <a:extLst>
               <a:ext uri="{FF2B5EF4-FFF2-40B4-BE49-F238E27FC236}">
-                <a16:creationId xmlns:a16="http://schemas.microsoft.com/office/drawing/2014/main" id="{42002C5A-3DC9-9DAC-FF90-0AD8DAC5FA8C}"/>
+                <a16:creationId xmlns:a16="http://schemas.microsoft.com/office/drawing/2014/main" id="{E4DAD861-1E97-9592-A23D-5CCD9B138240}"/>
               </a:ext>
             </a:extLst>
           </p:cNvPr>
@@ -11897,7 +11846,7 @@
                 <a:latin typeface="Times New Roman" panose="02020603050405020304" pitchFamily="18" charset="0"/>
                 <a:cs typeface="Times New Roman" panose="02020603050405020304" pitchFamily="18" charset="0"/>
               </a:rPr>
-              <a:t>CONCLUSION</a:t>
+              <a:t>LIMITATIONS</a:t>
             </a:r>
           </a:p>
         </p:txBody>
@@ -11907,7 +11856,7 @@
           <p:cNvPr id="3" name="Content Placeholder 2">
             <a:extLst>
               <a:ext uri="{FF2B5EF4-FFF2-40B4-BE49-F238E27FC236}">
-                <a16:creationId xmlns:a16="http://schemas.microsoft.com/office/drawing/2014/main" id="{D5030854-253C-D3A1-5987-74173A4BC1FB}"/>
+                <a16:creationId xmlns:a16="http://schemas.microsoft.com/office/drawing/2014/main" id="{4E1D73CC-BF44-61B6-B995-F8A10CA4B5C5}"/>
               </a:ext>
             </a:extLst>
           </p:cNvPr>
@@ -11928,33 +11877,57 @@
                 <a:latin typeface="Times New Roman" panose="02020603050405020304" pitchFamily="18" charset="0"/>
                 <a:cs typeface="Times New Roman" panose="02020603050405020304" pitchFamily="18" charset="0"/>
               </a:rPr>
-              <a:t>This study successfully applied Exploratory Data Analysis techniques to investigate the Danish housing market. </a:t>
-            </a:r>
-          </a:p>
-          <a:p>
-            <a:r>
-              <a:rPr lang="en-US" dirty="0">
-                <a:latin typeface="Times New Roman" panose="02020603050405020304" pitchFamily="18" charset="0"/>
-                <a:cs typeface="Times New Roman" panose="02020603050405020304" pitchFamily="18" charset="0"/>
-              </a:rPr>
-              <a:t>The analysis revealed that housing prices are influenced by region, property type, property size, negotiation outcomes, property age, and construction decade. </a:t>
-            </a:r>
-          </a:p>
-          <a:p>
-            <a:r>
-              <a:rPr lang="en-US" dirty="0">
-                <a:latin typeface="Times New Roman" panose="02020603050405020304" pitchFamily="18" charset="0"/>
-                <a:cs typeface="Times New Roman" panose="02020603050405020304" pitchFamily="18" charset="0"/>
-              </a:rPr>
-              <a:t>The visualizations and statistical summaries provided meaningful insights that can support informed decision-making for buyers, investors, real estate professionals, and policymakers.</a:t>
-            </a:r>
+              <a:t>Dataset limited to available variables. </a:t>
+            </a:r>
+          </a:p>
+          <a:p>
+            <a:r>
+              <a:rPr lang="en-US" dirty="0">
+                <a:latin typeface="Times New Roman" panose="02020603050405020304" pitchFamily="18" charset="0"/>
+                <a:cs typeface="Times New Roman" panose="02020603050405020304" pitchFamily="18" charset="0"/>
+              </a:rPr>
+              <a:t>Inflation was not considered. </a:t>
+            </a:r>
+          </a:p>
+          <a:p>
+            <a:r>
+              <a:rPr lang="en-US" dirty="0">
+                <a:latin typeface="Times New Roman" panose="02020603050405020304" pitchFamily="18" charset="0"/>
+                <a:cs typeface="Times New Roman" panose="02020603050405020304" pitchFamily="18" charset="0"/>
+              </a:rPr>
+              <a:t>Interest rates were excluded. </a:t>
+            </a:r>
+          </a:p>
+          <a:p>
+            <a:r>
+              <a:rPr lang="en-US" dirty="0">
+                <a:latin typeface="Times New Roman" panose="02020603050405020304" pitchFamily="18" charset="0"/>
+                <a:cs typeface="Times New Roman" panose="02020603050405020304" pitchFamily="18" charset="0"/>
+              </a:rPr>
+              <a:t>Economic indicators were unavailable. </a:t>
+            </a:r>
+          </a:p>
+          <a:p>
+            <a:r>
+              <a:rPr lang="en-US" dirty="0">
+                <a:latin typeface="Times New Roman" panose="02020603050405020304" pitchFamily="18" charset="0"/>
+                <a:cs typeface="Times New Roman" panose="02020603050405020304" pitchFamily="18" charset="0"/>
+              </a:rPr>
+              <a:t>Results are limited to the study period.</a:t>
+            </a:r>
+          </a:p>
+          <a:p>
+            <a:endParaRPr lang="en-US" dirty="0">
+              <a:latin typeface="Times New Roman" panose="02020603050405020304" pitchFamily="18" charset="0"/>
+              <a:cs typeface="Times New Roman" panose="02020603050405020304" pitchFamily="18" charset="0"/>
+            </a:endParaRPr>
           </a:p>
         </p:txBody>
       </p:sp>
     </p:spTree>
     <p:extLst>
       <p:ext uri="{BB962C8B-B14F-4D97-AF65-F5344CB8AC3E}">
-        <p14:creationId xmlns:p14="http://schemas.microsoft.com/office/powerpoint/2010/main" val="3962263951"/>
+        <p14:creationId xmlns:p14="http://schemas.microsoft.com/office/powerpoint/2010/main" val="3458179084"/>
       </p:ext>
     </p:extLst>
   </p:cSld>
@@ -11986,7 +11959,7 @@
           <p:cNvPr id="2" name="Title 1">
             <a:extLst>
               <a:ext uri="{FF2B5EF4-FFF2-40B4-BE49-F238E27FC236}">
-                <a16:creationId xmlns:a16="http://schemas.microsoft.com/office/drawing/2014/main" id="{0153CDDF-CD35-BCEF-E5AC-58ABF48908A6}"/>
+                <a16:creationId xmlns:a16="http://schemas.microsoft.com/office/drawing/2014/main" id="{42002C5A-3DC9-9DAC-FF90-0AD8DAC5FA8C}"/>
               </a:ext>
             </a:extLst>
           </p:cNvPr>
@@ -11999,15 +11972,17 @@
         </p:nvSpPr>
         <p:spPr/>
         <p:txBody>
-          <a:bodyPr/>
-          <a:lstStyle/>
-          <a:p>
-            <a:r>
-              <a:rPr lang="en-US" dirty="0">
-                <a:latin typeface="Times New Roman" panose="02020603050405020304" pitchFamily="18" charset="0"/>
-                <a:cs typeface="Times New Roman" panose="02020603050405020304" pitchFamily="18" charset="0"/>
-              </a:rPr>
-              <a:t>RECOMMENDATIONS</a:t>
+          <a:bodyPr>
+            <a:normAutofit/>
+          </a:bodyPr>
+          <a:lstStyle/>
+          <a:p>
+            <a:r>
+              <a:rPr lang="en-US" dirty="0">
+                <a:latin typeface="Times New Roman" panose="02020603050405020304" pitchFamily="18" charset="0"/>
+                <a:cs typeface="Times New Roman" panose="02020603050405020304" pitchFamily="18" charset="0"/>
+              </a:rPr>
+              <a:t>CONCLUSION</a:t>
             </a:r>
           </a:p>
         </p:txBody>
@@ -12017,7 +11992,7 @@
           <p:cNvPr id="3" name="Content Placeholder 2">
             <a:extLst>
               <a:ext uri="{FF2B5EF4-FFF2-40B4-BE49-F238E27FC236}">
-                <a16:creationId xmlns:a16="http://schemas.microsoft.com/office/drawing/2014/main" id="{5426E9DE-4F84-7CEA-06F4-D269D52A0A4D}"/>
+                <a16:creationId xmlns:a16="http://schemas.microsoft.com/office/drawing/2014/main" id="{D5030854-253C-D3A1-5987-74173A4BC1FB}"/>
               </a:ext>
             </a:extLst>
           </p:cNvPr>
@@ -12030,102 +12005,41 @@
         </p:nvSpPr>
         <p:spPr/>
         <p:txBody>
-          <a:bodyPr>
-            <a:normAutofit/>
-          </a:bodyPr>
-          <a:lstStyle/>
-          <a:p>
-            <a:r>
-              <a:rPr lang="en-US" b="1" dirty="0">
-                <a:latin typeface="Times New Roman" panose="02020603050405020304" pitchFamily="18" charset="0"/>
-                <a:cs typeface="Times New Roman" panose="02020603050405020304" pitchFamily="18" charset="0"/>
-              </a:rPr>
-              <a:t>Buyers: </a:t>
-            </a:r>
-            <a:r>
-              <a:rPr lang="en-US" dirty="0">
-                <a:latin typeface="Times New Roman" panose="02020603050405020304" pitchFamily="18" charset="0"/>
-                <a:cs typeface="Times New Roman" panose="02020603050405020304" pitchFamily="18" charset="0"/>
-              </a:rPr>
-              <a:t>Consider older houses for affordability.</a:t>
-            </a:r>
-          </a:p>
-          <a:p>
-            <a:r>
-              <a:rPr lang="en-US" b="1" dirty="0">
-                <a:latin typeface="Times New Roman" panose="02020603050405020304" pitchFamily="18" charset="0"/>
-                <a:cs typeface="Times New Roman" panose="02020603050405020304" pitchFamily="18" charset="0"/>
-              </a:rPr>
-              <a:t>Investors: </a:t>
-            </a:r>
-            <a:r>
-              <a:rPr lang="en-US" dirty="0">
-                <a:latin typeface="Times New Roman" panose="02020603050405020304" pitchFamily="18" charset="0"/>
-                <a:cs typeface="Times New Roman" panose="02020603050405020304" pitchFamily="18" charset="0"/>
-              </a:rPr>
-              <a:t>Focus on high-growth regions.</a:t>
-            </a:r>
-          </a:p>
-          <a:p>
-            <a:r>
-              <a:rPr lang="en-US" b="1" dirty="0">
-                <a:latin typeface="Times New Roman" panose="02020603050405020304" pitchFamily="18" charset="0"/>
-                <a:cs typeface="Times New Roman" panose="02020603050405020304" pitchFamily="18" charset="0"/>
-              </a:rPr>
-              <a:t>Government: </a:t>
-            </a:r>
-            <a:r>
-              <a:rPr lang="en-US" dirty="0">
-                <a:latin typeface="Times New Roman" panose="02020603050405020304" pitchFamily="18" charset="0"/>
-                <a:cs typeface="Times New Roman" panose="02020603050405020304" pitchFamily="18" charset="0"/>
-              </a:rPr>
-              <a:t>Promote balanced regional development.</a:t>
-            </a:r>
-          </a:p>
-          <a:p>
-            <a:r>
-              <a:rPr lang="en-US" b="1" dirty="0">
-                <a:latin typeface="Times New Roman" panose="02020603050405020304" pitchFamily="18" charset="0"/>
-                <a:cs typeface="Times New Roman" panose="02020603050405020304" pitchFamily="18" charset="0"/>
-              </a:rPr>
-              <a:t>Real Estate Agencies: </a:t>
-            </a:r>
-            <a:r>
-              <a:rPr lang="en-US" dirty="0">
-                <a:latin typeface="Times New Roman" panose="02020603050405020304" pitchFamily="18" charset="0"/>
-                <a:cs typeface="Times New Roman" panose="02020603050405020304" pitchFamily="18" charset="0"/>
-              </a:rPr>
-              <a:t>Use market insights for pricing strategies.</a:t>
-            </a:r>
-          </a:p>
-          <a:p>
-            <a:r>
-              <a:rPr lang="en-US" b="1" dirty="0">
-                <a:latin typeface="Times New Roman" panose="02020603050405020304" pitchFamily="18" charset="0"/>
-                <a:cs typeface="Times New Roman" panose="02020603050405020304" pitchFamily="18" charset="0"/>
-              </a:rPr>
-              <a:t>Future Researchers: </a:t>
-            </a:r>
-            <a:r>
-              <a:rPr lang="en-US" dirty="0">
-                <a:latin typeface="Times New Roman" panose="02020603050405020304" pitchFamily="18" charset="0"/>
-                <a:cs typeface="Times New Roman" panose="02020603050405020304" pitchFamily="18" charset="0"/>
-              </a:rPr>
-              <a:t>Develop machine learning models for price prediction.</a:t>
-            </a:r>
-          </a:p>
-          <a:p>
-            <a:endParaRPr lang="en-US" dirty="0">
-              <a:latin typeface="Times New Roman" panose="02020603050405020304" pitchFamily="18" charset="0"/>
-              <a:cs typeface="Times New Roman" panose="02020603050405020304" pitchFamily="18" charset="0"/>
-            </a:endParaRPr>
+          <a:bodyPr/>
+          <a:lstStyle/>
+          <a:p>
+            <a:r>
+              <a:rPr lang="en-US" dirty="0">
+                <a:latin typeface="Times New Roman" panose="02020603050405020304" pitchFamily="18" charset="0"/>
+                <a:cs typeface="Times New Roman" panose="02020603050405020304" pitchFamily="18" charset="0"/>
+              </a:rPr>
+              <a:t>This study successfully applied Exploratory Data Analysis techniques to investigate the Danish housing market. </a:t>
+            </a:r>
+          </a:p>
+          <a:p>
+            <a:r>
+              <a:rPr lang="en-US" dirty="0">
+                <a:latin typeface="Times New Roman" panose="02020603050405020304" pitchFamily="18" charset="0"/>
+                <a:cs typeface="Times New Roman" panose="02020603050405020304" pitchFamily="18" charset="0"/>
+              </a:rPr>
+              <a:t>The analysis revealed that housing prices are influenced by region, property type, property size, negotiation outcomes, property age, and construction decade. </a:t>
+            </a:r>
+          </a:p>
+          <a:p>
+            <a:r>
+              <a:rPr lang="en-US" dirty="0">
+                <a:latin typeface="Times New Roman" panose="02020603050405020304" pitchFamily="18" charset="0"/>
+                <a:cs typeface="Times New Roman" panose="02020603050405020304" pitchFamily="18" charset="0"/>
+              </a:rPr>
+              <a:t>The visualizations and statistical summaries provided meaningful insights that can support informed decision-making for buyers, investors, real estate professionals, and policymakers.</a:t>
+            </a:r>
           </a:p>
         </p:txBody>
       </p:sp>
     </p:spTree>
     <p:extLst>
       <p:ext uri="{BB962C8B-B14F-4D97-AF65-F5344CB8AC3E}">
-        <p14:creationId xmlns:p14="http://schemas.microsoft.com/office/powerpoint/2010/main" val="3113668641"/>
+        <p14:creationId xmlns:p14="http://schemas.microsoft.com/office/powerpoint/2010/main" val="3962263951"/>
       </p:ext>
     </p:extLst>
   </p:cSld>
@@ -12157,7 +12071,7 @@
           <p:cNvPr id="2" name="Title 1">
             <a:extLst>
               <a:ext uri="{FF2B5EF4-FFF2-40B4-BE49-F238E27FC236}">
-                <a16:creationId xmlns:a16="http://schemas.microsoft.com/office/drawing/2014/main" id="{53955069-17C8-9C91-2F57-B1B1C742DC84}"/>
+                <a16:creationId xmlns:a16="http://schemas.microsoft.com/office/drawing/2014/main" id="{0153CDDF-CD35-BCEF-E5AC-58ABF48908A6}"/>
               </a:ext>
             </a:extLst>
           </p:cNvPr>
@@ -12178,7 +12092,7 @@
                 <a:latin typeface="Times New Roman" panose="02020603050405020304" pitchFamily="18" charset="0"/>
                 <a:cs typeface="Times New Roman" panose="02020603050405020304" pitchFamily="18" charset="0"/>
               </a:rPr>
-              <a:t>References</a:t>
+              <a:t>RECOMMENDATIONS</a:t>
             </a:r>
           </a:p>
         </p:txBody>
@@ -12188,7 +12102,7 @@
           <p:cNvPr id="3" name="Content Placeholder 2">
             <a:extLst>
               <a:ext uri="{FF2B5EF4-FFF2-40B4-BE49-F238E27FC236}">
-                <a16:creationId xmlns:a16="http://schemas.microsoft.com/office/drawing/2014/main" id="{01ED2D77-1CD6-1CD3-F1D2-AAAAD64FE283}"/>
+                <a16:creationId xmlns:a16="http://schemas.microsoft.com/office/drawing/2014/main" id="{5426E9DE-4F84-7CEA-06F4-D269D52A0A4D}"/>
               </a:ext>
             </a:extLst>
           </p:cNvPr>
@@ -12202,136 +12116,87 @@
         <p:spPr/>
         <p:txBody>
           <a:bodyPr>
-            <a:normAutofit fontScale="92500" lnSpcReduction="20000"/>
+            <a:normAutofit/>
           </a:bodyPr>
           <a:lstStyle/>
           <a:p>
             <a:r>
-              <a:rPr lang="en-US" dirty="0">
-                <a:latin typeface="Times New Roman" panose="02020603050405020304" pitchFamily="18" charset="0"/>
-                <a:cs typeface="Times New Roman" panose="02020603050405020304" pitchFamily="18" charset="0"/>
-              </a:rPr>
-              <a:t>Rosen, S. (1974). Hedonic prices and implicit markets: Product differentiation in pure competition. </a:t>
-            </a:r>
-            <a:r>
-              <a:rPr lang="en-US" i="1" dirty="0">
-                <a:latin typeface="Times New Roman" panose="02020603050405020304" pitchFamily="18" charset="0"/>
-                <a:cs typeface="Times New Roman" panose="02020603050405020304" pitchFamily="18" charset="0"/>
-              </a:rPr>
-              <a:t>Journal of Political Economy, 82</a:t>
-            </a:r>
-            <a:r>
-              <a:rPr lang="en-US" dirty="0">
-                <a:latin typeface="Times New Roman" panose="02020603050405020304" pitchFamily="18" charset="0"/>
-                <a:cs typeface="Times New Roman" panose="02020603050405020304" pitchFamily="18" charset="0"/>
-              </a:rPr>
-              <a:t>(1), 34–55.</a:t>
-            </a:r>
-          </a:p>
-          <a:p>
-            <a:r>
-              <a:rPr lang="en-US" dirty="0">
-                <a:latin typeface="Times New Roman" panose="02020603050405020304" pitchFamily="18" charset="0"/>
-                <a:cs typeface="Times New Roman" panose="02020603050405020304" pitchFamily="18" charset="0"/>
-              </a:rPr>
-              <a:t>Tukey, J. W. (1977). </a:t>
-            </a:r>
-            <a:r>
-              <a:rPr lang="en-US" i="1" dirty="0">
-                <a:latin typeface="Times New Roman" panose="02020603050405020304" pitchFamily="18" charset="0"/>
-                <a:cs typeface="Times New Roman" panose="02020603050405020304" pitchFamily="18" charset="0"/>
-              </a:rPr>
-              <a:t>Exploratory Data Analysis</a:t>
-            </a:r>
-            <a:r>
-              <a:rPr lang="en-US" dirty="0">
-                <a:latin typeface="Times New Roman" panose="02020603050405020304" pitchFamily="18" charset="0"/>
-                <a:cs typeface="Times New Roman" panose="02020603050405020304" pitchFamily="18" charset="0"/>
-              </a:rPr>
-              <a:t>. Addison-Wesley.</a:t>
-            </a:r>
-          </a:p>
-          <a:p>
-            <a:r>
-              <a:rPr lang="en-US" dirty="0">
-                <a:latin typeface="Times New Roman" panose="02020603050405020304" pitchFamily="18" charset="0"/>
-                <a:cs typeface="Times New Roman" panose="02020603050405020304" pitchFamily="18" charset="0"/>
-              </a:rPr>
-              <a:t>James, G., Witten, D., Hastie, T., &amp; </a:t>
-            </a:r>
-            <a:r>
-              <a:rPr lang="en-US" dirty="0" err="1">
-                <a:latin typeface="Times New Roman" panose="02020603050405020304" pitchFamily="18" charset="0"/>
-                <a:cs typeface="Times New Roman" panose="02020603050405020304" pitchFamily="18" charset="0"/>
-              </a:rPr>
-              <a:t>Tibshirani</a:t>
-            </a:r>
-            <a:r>
-              <a:rPr lang="en-US" dirty="0">
-                <a:latin typeface="Times New Roman" panose="02020603050405020304" pitchFamily="18" charset="0"/>
-                <a:cs typeface="Times New Roman" panose="02020603050405020304" pitchFamily="18" charset="0"/>
-              </a:rPr>
-              <a:t>, R. (2021). </a:t>
-            </a:r>
-            <a:r>
-              <a:rPr lang="en-US" i="1" dirty="0">
-                <a:latin typeface="Times New Roman" panose="02020603050405020304" pitchFamily="18" charset="0"/>
-                <a:cs typeface="Times New Roman" panose="02020603050405020304" pitchFamily="18" charset="0"/>
-              </a:rPr>
-              <a:t>An Introduction to Statistical Learning</a:t>
-            </a:r>
-            <a:r>
-              <a:rPr lang="en-US" dirty="0">
-                <a:latin typeface="Times New Roman" panose="02020603050405020304" pitchFamily="18" charset="0"/>
-                <a:cs typeface="Times New Roman" panose="02020603050405020304" pitchFamily="18" charset="0"/>
-              </a:rPr>
-              <a:t> (2nd ed.). Springer.</a:t>
-            </a:r>
-          </a:p>
-          <a:p>
-            <a:r>
-              <a:rPr lang="en-US" dirty="0">
-                <a:latin typeface="Times New Roman" panose="02020603050405020304" pitchFamily="18" charset="0"/>
-                <a:cs typeface="Times New Roman" panose="02020603050405020304" pitchFamily="18" charset="0"/>
-              </a:rPr>
-              <a:t>Han, J., Kamber, M., &amp; Pei, J. (2012). </a:t>
-            </a:r>
-            <a:r>
-              <a:rPr lang="en-US" i="1" dirty="0">
-                <a:latin typeface="Times New Roman" panose="02020603050405020304" pitchFamily="18" charset="0"/>
-                <a:cs typeface="Times New Roman" panose="02020603050405020304" pitchFamily="18" charset="0"/>
-              </a:rPr>
-              <a:t>Data Mining: Concepts and Techniques</a:t>
-            </a:r>
-            <a:r>
-              <a:rPr lang="en-US" dirty="0">
-                <a:latin typeface="Times New Roman" panose="02020603050405020304" pitchFamily="18" charset="0"/>
-                <a:cs typeface="Times New Roman" panose="02020603050405020304" pitchFamily="18" charset="0"/>
-              </a:rPr>
-              <a:t> (3rd ed.). Morgan Kaufmann.</a:t>
-            </a:r>
-          </a:p>
-          <a:p>
-            <a:r>
-              <a:rPr lang="en-US" dirty="0">
-                <a:latin typeface="Times New Roman" panose="02020603050405020304" pitchFamily="18" charset="0"/>
-                <a:cs typeface="Times New Roman" panose="02020603050405020304" pitchFamily="18" charset="0"/>
-              </a:rPr>
-              <a:t>Hair, J. F., Black, W. C., Babin, B. J., &amp; Anderson, R. E. (2019). </a:t>
-            </a:r>
-            <a:r>
-              <a:rPr lang="en-US" i="1" dirty="0">
-                <a:latin typeface="Times New Roman" panose="02020603050405020304" pitchFamily="18" charset="0"/>
-                <a:cs typeface="Times New Roman" panose="02020603050405020304" pitchFamily="18" charset="0"/>
-              </a:rPr>
-              <a:t>Multivariate Data Analysis</a:t>
-            </a:r>
-            <a:r>
-              <a:rPr lang="en-US" dirty="0">
-                <a:latin typeface="Times New Roman" panose="02020603050405020304" pitchFamily="18" charset="0"/>
-                <a:cs typeface="Times New Roman" panose="02020603050405020304" pitchFamily="18" charset="0"/>
-              </a:rPr>
-              <a:t> (8th ed.). Cengage Learning.</a:t>
+              <a:rPr lang="en-US" b="1" dirty="0">
+                <a:latin typeface="Times New Roman" panose="02020603050405020304" pitchFamily="18" charset="0"/>
+                <a:cs typeface="Times New Roman" panose="02020603050405020304" pitchFamily="18" charset="0"/>
+              </a:rPr>
+              <a:t>Buyers: </a:t>
+            </a:r>
+            <a:r>
+              <a:rPr lang="en-US" dirty="0">
+                <a:latin typeface="Times New Roman" panose="02020603050405020304" pitchFamily="18" charset="0"/>
+                <a:cs typeface="Times New Roman" panose="02020603050405020304" pitchFamily="18" charset="0"/>
+              </a:rPr>
+              <a:t>Consider older houses for affordability.</a:t>
+            </a:r>
+          </a:p>
+          <a:p>
+            <a:r>
+              <a:rPr lang="en-US" b="1" dirty="0">
+                <a:latin typeface="Times New Roman" panose="02020603050405020304" pitchFamily="18" charset="0"/>
+                <a:cs typeface="Times New Roman" panose="02020603050405020304" pitchFamily="18" charset="0"/>
+              </a:rPr>
+              <a:t>Investors: </a:t>
+            </a:r>
+            <a:r>
+              <a:rPr lang="en-US" dirty="0">
+                <a:latin typeface="Times New Roman" panose="02020603050405020304" pitchFamily="18" charset="0"/>
+                <a:cs typeface="Times New Roman" panose="02020603050405020304" pitchFamily="18" charset="0"/>
+              </a:rPr>
+              <a:t>Focus on high-growth regions.</a:t>
+            </a:r>
+          </a:p>
+          <a:p>
+            <a:r>
+              <a:rPr lang="en-US" b="1" dirty="0">
+                <a:latin typeface="Times New Roman" panose="02020603050405020304" pitchFamily="18" charset="0"/>
+                <a:cs typeface="Times New Roman" panose="02020603050405020304" pitchFamily="18" charset="0"/>
+              </a:rPr>
+              <a:t>Government: </a:t>
+            </a:r>
+            <a:r>
+              <a:rPr lang="en-US" dirty="0">
+                <a:latin typeface="Times New Roman" panose="02020603050405020304" pitchFamily="18" charset="0"/>
+                <a:cs typeface="Times New Roman" panose="02020603050405020304" pitchFamily="18" charset="0"/>
+              </a:rPr>
+              <a:t>Promote balanced regional development.</a:t>
+            </a:r>
+          </a:p>
+          <a:p>
+            <a:r>
+              <a:rPr lang="en-US" b="1" dirty="0">
+                <a:latin typeface="Times New Roman" panose="02020603050405020304" pitchFamily="18" charset="0"/>
+                <a:cs typeface="Times New Roman" panose="02020603050405020304" pitchFamily="18" charset="0"/>
+              </a:rPr>
+              <a:t>Real Estate Agencies: </a:t>
+            </a:r>
+            <a:r>
+              <a:rPr lang="en-US" dirty="0">
+                <a:latin typeface="Times New Roman" panose="02020603050405020304" pitchFamily="18" charset="0"/>
+                <a:cs typeface="Times New Roman" panose="02020603050405020304" pitchFamily="18" charset="0"/>
+              </a:rPr>
+              <a:t>Use market insights for pricing strategies.</a:t>
+            </a:r>
+          </a:p>
+          <a:p>
+            <a:r>
+              <a:rPr lang="en-US" b="1" dirty="0">
+                <a:latin typeface="Times New Roman" panose="02020603050405020304" pitchFamily="18" charset="0"/>
+                <a:cs typeface="Times New Roman" panose="02020603050405020304" pitchFamily="18" charset="0"/>
+              </a:rPr>
+              <a:t>Future Researchers: </a:t>
+            </a:r>
+            <a:r>
+              <a:rPr lang="en-US" dirty="0">
+                <a:latin typeface="Times New Roman" panose="02020603050405020304" pitchFamily="18" charset="0"/>
+                <a:cs typeface="Times New Roman" panose="02020603050405020304" pitchFamily="18" charset="0"/>
+              </a:rPr>
+              <a:t>Develop machine learning models for price prediction.</a:t>
             </a:r>
           </a:p>
           <a:p>
@@ -12345,7 +12210,7 @@
     </p:spTree>
     <p:extLst>
       <p:ext uri="{BB962C8B-B14F-4D97-AF65-F5344CB8AC3E}">
-        <p14:creationId xmlns:p14="http://schemas.microsoft.com/office/powerpoint/2010/main" val="4091250870"/>
+        <p14:creationId xmlns:p14="http://schemas.microsoft.com/office/powerpoint/2010/main" val="3113668641"/>
       </p:ext>
     </p:extLst>
   </p:cSld>
@@ -12377,6 +12242,220 @@
           <p:cNvPr id="2" name="Title 1">
             <a:extLst>
               <a:ext uri="{FF2B5EF4-FFF2-40B4-BE49-F238E27FC236}">
+                <a16:creationId xmlns:a16="http://schemas.microsoft.com/office/drawing/2014/main" id="{53955069-17C8-9C91-2F57-B1B1C742DC84}"/>
+              </a:ext>
+            </a:extLst>
+          </p:cNvPr>
+          <p:cNvSpPr>
+            <a:spLocks noGrp="1"/>
+          </p:cNvSpPr>
+          <p:nvPr>
+            <p:ph type="title"/>
+          </p:nvPr>
+        </p:nvSpPr>
+        <p:spPr/>
+        <p:txBody>
+          <a:bodyPr/>
+          <a:lstStyle/>
+          <a:p>
+            <a:r>
+              <a:rPr lang="en-US" dirty="0">
+                <a:latin typeface="Times New Roman" panose="02020603050405020304" pitchFamily="18" charset="0"/>
+                <a:cs typeface="Times New Roman" panose="02020603050405020304" pitchFamily="18" charset="0"/>
+              </a:rPr>
+              <a:t>References</a:t>
+            </a:r>
+          </a:p>
+        </p:txBody>
+      </p:sp>
+      <p:sp>
+        <p:nvSpPr>
+          <p:cNvPr id="3" name="Content Placeholder 2">
+            <a:extLst>
+              <a:ext uri="{FF2B5EF4-FFF2-40B4-BE49-F238E27FC236}">
+                <a16:creationId xmlns:a16="http://schemas.microsoft.com/office/drawing/2014/main" id="{01ED2D77-1CD6-1CD3-F1D2-AAAAD64FE283}"/>
+              </a:ext>
+            </a:extLst>
+          </p:cNvPr>
+          <p:cNvSpPr>
+            <a:spLocks noGrp="1"/>
+          </p:cNvSpPr>
+          <p:nvPr>
+            <p:ph idx="1"/>
+          </p:nvPr>
+        </p:nvSpPr>
+        <p:spPr/>
+        <p:txBody>
+          <a:bodyPr>
+            <a:normAutofit fontScale="92500" lnSpcReduction="20000"/>
+          </a:bodyPr>
+          <a:lstStyle/>
+          <a:p>
+            <a:r>
+              <a:rPr lang="en-US" dirty="0">
+                <a:latin typeface="Times New Roman" panose="02020603050405020304" pitchFamily="18" charset="0"/>
+                <a:cs typeface="Times New Roman" panose="02020603050405020304" pitchFamily="18" charset="0"/>
+              </a:rPr>
+              <a:t>Hair, J. F., Black, W. C., Babin, B. J., &amp; Anderson, R. E. (2019). </a:t>
+            </a:r>
+            <a:r>
+              <a:rPr lang="en-US" i="1" dirty="0">
+                <a:latin typeface="Times New Roman" panose="02020603050405020304" pitchFamily="18" charset="0"/>
+                <a:cs typeface="Times New Roman" panose="02020603050405020304" pitchFamily="18" charset="0"/>
+              </a:rPr>
+              <a:t>Multivariate Data Analysis</a:t>
+            </a:r>
+            <a:r>
+              <a:rPr lang="en-US" dirty="0">
+                <a:latin typeface="Times New Roman" panose="02020603050405020304" pitchFamily="18" charset="0"/>
+                <a:cs typeface="Times New Roman" panose="02020603050405020304" pitchFamily="18" charset="0"/>
+              </a:rPr>
+              <a:t> (8th ed.). Cengage Learning.</a:t>
+            </a:r>
+          </a:p>
+          <a:p>
+            <a:r>
+              <a:rPr lang="en-US" dirty="0">
+                <a:latin typeface="Times New Roman" panose="02020603050405020304" pitchFamily="18" charset="0"/>
+                <a:cs typeface="Times New Roman" panose="02020603050405020304" pitchFamily="18" charset="0"/>
+              </a:rPr>
+              <a:t>Han, J., Kamber, M., &amp; Pei, J. (2012). </a:t>
+            </a:r>
+            <a:r>
+              <a:rPr lang="en-US" i="1" dirty="0">
+                <a:latin typeface="Times New Roman" panose="02020603050405020304" pitchFamily="18" charset="0"/>
+                <a:cs typeface="Times New Roman" panose="02020603050405020304" pitchFamily="18" charset="0"/>
+              </a:rPr>
+              <a:t>Data Mining: Concepts and Techniques</a:t>
+            </a:r>
+            <a:r>
+              <a:rPr lang="en-US" dirty="0">
+                <a:latin typeface="Times New Roman" panose="02020603050405020304" pitchFamily="18" charset="0"/>
+                <a:cs typeface="Times New Roman" panose="02020603050405020304" pitchFamily="18" charset="0"/>
+              </a:rPr>
+              <a:t> (3rd ed.). Morgan Kaufmann.</a:t>
+            </a:r>
+          </a:p>
+          <a:p>
+            <a:r>
+              <a:rPr lang="en-US" dirty="0">
+                <a:latin typeface="Times New Roman" panose="02020603050405020304" pitchFamily="18" charset="0"/>
+                <a:cs typeface="Times New Roman" panose="02020603050405020304" pitchFamily="18" charset="0"/>
+              </a:rPr>
+              <a:t>James, G., Witten, D., Hastie, T., &amp; </a:t>
+            </a:r>
+            <a:r>
+              <a:rPr lang="en-US" dirty="0" err="1">
+                <a:latin typeface="Times New Roman" panose="02020603050405020304" pitchFamily="18" charset="0"/>
+                <a:cs typeface="Times New Roman" panose="02020603050405020304" pitchFamily="18" charset="0"/>
+              </a:rPr>
+              <a:t>Tibshirani</a:t>
+            </a:r>
+            <a:r>
+              <a:rPr lang="en-US" dirty="0">
+                <a:latin typeface="Times New Roman" panose="02020603050405020304" pitchFamily="18" charset="0"/>
+                <a:cs typeface="Times New Roman" panose="02020603050405020304" pitchFamily="18" charset="0"/>
+              </a:rPr>
+              <a:t>, R. (2021). </a:t>
+            </a:r>
+            <a:r>
+              <a:rPr lang="en-US" i="1" dirty="0">
+                <a:latin typeface="Times New Roman" panose="02020603050405020304" pitchFamily="18" charset="0"/>
+                <a:cs typeface="Times New Roman" panose="02020603050405020304" pitchFamily="18" charset="0"/>
+              </a:rPr>
+              <a:t>An Introduction to Statistical Learning</a:t>
+            </a:r>
+            <a:r>
+              <a:rPr lang="en-US" dirty="0">
+                <a:latin typeface="Times New Roman" panose="02020603050405020304" pitchFamily="18" charset="0"/>
+                <a:cs typeface="Times New Roman" panose="02020603050405020304" pitchFamily="18" charset="0"/>
+              </a:rPr>
+              <a:t> (2nd ed.). Springer.</a:t>
+            </a:r>
+          </a:p>
+          <a:p>
+            <a:r>
+              <a:rPr lang="en-US" dirty="0">
+                <a:latin typeface="Times New Roman" panose="02020603050405020304" pitchFamily="18" charset="0"/>
+                <a:cs typeface="Times New Roman" panose="02020603050405020304" pitchFamily="18" charset="0"/>
+              </a:rPr>
+              <a:t>Tukey, J. W. (1977). </a:t>
+            </a:r>
+            <a:r>
+              <a:rPr lang="en-US" i="1" dirty="0">
+                <a:latin typeface="Times New Roman" panose="02020603050405020304" pitchFamily="18" charset="0"/>
+                <a:cs typeface="Times New Roman" panose="02020603050405020304" pitchFamily="18" charset="0"/>
+              </a:rPr>
+              <a:t>Exploratory Data Analysis</a:t>
+            </a:r>
+            <a:r>
+              <a:rPr lang="en-US" dirty="0">
+                <a:latin typeface="Times New Roman" panose="02020603050405020304" pitchFamily="18" charset="0"/>
+                <a:cs typeface="Times New Roman" panose="02020603050405020304" pitchFamily="18" charset="0"/>
+              </a:rPr>
+              <a:t>. Addison-Wesley.</a:t>
+            </a:r>
+          </a:p>
+          <a:p>
+            <a:r>
+              <a:rPr lang="en-US" dirty="0">
+                <a:latin typeface="Times New Roman" panose="02020603050405020304" pitchFamily="18" charset="0"/>
+                <a:cs typeface="Times New Roman" panose="02020603050405020304" pitchFamily="18" charset="0"/>
+              </a:rPr>
+              <a:t>Rosen, S. (1974). Hedonic prices and implicit markets: Product differentiation in pure competition. </a:t>
+            </a:r>
+            <a:r>
+              <a:rPr lang="en-US" i="1" dirty="0">
+                <a:latin typeface="Times New Roman" panose="02020603050405020304" pitchFamily="18" charset="0"/>
+                <a:cs typeface="Times New Roman" panose="02020603050405020304" pitchFamily="18" charset="0"/>
+              </a:rPr>
+              <a:t>Journal of Political Economy, 82</a:t>
+            </a:r>
+            <a:r>
+              <a:rPr lang="en-US" dirty="0">
+                <a:latin typeface="Times New Roman" panose="02020603050405020304" pitchFamily="18" charset="0"/>
+                <a:cs typeface="Times New Roman" panose="02020603050405020304" pitchFamily="18" charset="0"/>
+              </a:rPr>
+              <a:t>(1), 34–55.</a:t>
+            </a:r>
+          </a:p>
+        </p:txBody>
+      </p:sp>
+    </p:spTree>
+    <p:extLst>
+      <p:ext uri="{BB962C8B-B14F-4D97-AF65-F5344CB8AC3E}">
+        <p14:creationId xmlns:p14="http://schemas.microsoft.com/office/powerpoint/2010/main" val="4091250870"/>
+      </p:ext>
+    </p:extLst>
+  </p:cSld>
+  <p:clrMapOvr>
+    <a:masterClrMapping/>
+  </p:clrMapOvr>
+</p:sld>
+</file>
+
+<file path=ppt/slides/slide59.xml><?xml version="1.0" encoding="utf-8"?>
+<p:sld xmlns:a="http://schemas.openxmlformats.org/drawingml/2006/main" xmlns:r="http://schemas.openxmlformats.org/officeDocument/2006/relationships" xmlns:p="http://schemas.openxmlformats.org/presentationml/2006/main">
+  <p:cSld>
+    <p:spTree>
+      <p:nvGrpSpPr>
+        <p:cNvPr id="1" name=""/>
+        <p:cNvGrpSpPr/>
+        <p:nvPr/>
+      </p:nvGrpSpPr>
+      <p:grpSpPr>
+        <a:xfrm>
+          <a:off x="0" y="0"/>
+          <a:ext cx="0" cy="0"/>
+          <a:chOff x="0" y="0"/>
+          <a:chExt cx="0" cy="0"/>
+        </a:xfrm>
+      </p:grpSpPr>
+      <p:sp>
+        <p:nvSpPr>
+          <p:cNvPr id="2" name="Title 1">
+            <a:extLst>
+              <a:ext uri="{FF2B5EF4-FFF2-40B4-BE49-F238E27FC236}">
                 <a16:creationId xmlns:a16="http://schemas.microsoft.com/office/drawing/2014/main" id="{8408E528-42A0-2B13-602D-B311A1F00F7F}"/>
               </a:ext>
             </a:extLst>
@@ -12446,24 +12525,19 @@
                 <a:latin typeface="Times New Roman" panose="02020603050405020304" pitchFamily="18" charset="0"/>
                 <a:cs typeface="Times New Roman" panose="02020603050405020304" pitchFamily="18" charset="0"/>
               </a:rPr>
-              <a:t>Thank you for your attention. </a:t>
-            </a:r>
-          </a:p>
-          <a:p>
-            <a:pPr marL="0" indent="0" algn="ctr">
-              <a:buNone/>
-            </a:pPr>
-            <a:r>
-              <a:rPr lang="en-US" dirty="0">
-                <a:latin typeface="Times New Roman" panose="02020603050405020304" pitchFamily="18" charset="0"/>
-                <a:cs typeface="Times New Roman" panose="02020603050405020304" pitchFamily="18" charset="0"/>
-              </a:rPr>
-              <a:t>I welcome your questions and observations.</a:t>
-            </a:r>
-          </a:p>
-          <a:p>
-            <a:pPr algn="ctr"/>
-            <a:endParaRPr lang="en-US" dirty="0"/>
+              <a:t>Thank you for your </a:t>
+            </a:r>
+            <a:r>
+              <a:rPr lang="en-US">
+                <a:latin typeface="Times New Roman" panose="02020603050405020304" pitchFamily="18" charset="0"/>
+                <a:cs typeface="Times New Roman" panose="02020603050405020304" pitchFamily="18" charset="0"/>
+              </a:rPr>
+              <a:t>attention.</a:t>
+            </a:r>
+            <a:endParaRPr lang="en-US" dirty="0">
+              <a:latin typeface="Times New Roman" panose="02020603050405020304" pitchFamily="18" charset="0"/>
+              <a:cs typeface="Times New Roman" panose="02020603050405020304" pitchFamily="18" charset="0"/>
+            </a:endParaRPr>
           </a:p>
         </p:txBody>
       </p:sp>
@@ -12523,7 +12597,7 @@
                 <a:latin typeface="Times New Roman" panose="02020603050405020304" pitchFamily="18" charset="0"/>
                 <a:cs typeface="Times New Roman" panose="02020603050405020304" pitchFamily="18" charset="0"/>
               </a:rPr>
-              <a:t>Aim</a:t>
+              <a:t>Aim of the Study</a:t>
             </a:r>
           </a:p>
         </p:txBody>
@@ -12550,12 +12624,18 @@
           <a:lstStyle/>
           <a:p>
             <a:r>
-              <a:rPr lang="en-US" dirty="0"/>
-              <a:t>To perform an Exploratory Data Analysis of the Danish Housing Market.</a:t>
-            </a:r>
-          </a:p>
-          <a:p>
-            <a:endParaRPr lang="en-US" dirty="0"/>
+              <a:rPr lang="en-US" dirty="0">
+                <a:latin typeface="Times New Roman" panose="02020603050405020304" pitchFamily="18" charset="0"/>
+                <a:cs typeface="Times New Roman" panose="02020603050405020304" pitchFamily="18" charset="0"/>
+              </a:rPr>
+              <a:t>The aim of the study is to perform an Exploratory Data Analysis of the Danish Housing Market.</a:t>
+            </a:r>
+          </a:p>
+          <a:p>
+            <a:endParaRPr lang="en-US" dirty="0">
+              <a:latin typeface="Times New Roman" panose="02020603050405020304" pitchFamily="18" charset="0"/>
+              <a:cs typeface="Times New Roman" panose="02020603050405020304" pitchFamily="18" charset="0"/>
+            </a:endParaRPr>
           </a:p>
         </p:txBody>
       </p:sp>
@@ -12648,61 +12728,61 @@
                 <a:latin typeface="Times New Roman" panose="02020603050405020304" pitchFamily="18" charset="0"/>
                 <a:cs typeface="Times New Roman" panose="02020603050405020304" pitchFamily="18" charset="0"/>
               </a:rPr>
-              <a:t>Clean and prepare the dataset. </a:t>
-            </a:r>
-          </a:p>
-          <a:p>
-            <a:r>
-              <a:rPr lang="en-US" dirty="0">
-                <a:latin typeface="Times New Roman" panose="02020603050405020304" pitchFamily="18" charset="0"/>
-                <a:cs typeface="Times New Roman" panose="02020603050405020304" pitchFamily="18" charset="0"/>
-              </a:rPr>
-              <a:t>Identify missing values and outliers. </a:t>
-            </a:r>
-          </a:p>
-          <a:p>
-            <a:r>
-              <a:rPr lang="en-US" dirty="0">
-                <a:latin typeface="Times New Roman" panose="02020603050405020304" pitchFamily="18" charset="0"/>
-                <a:cs typeface="Times New Roman" panose="02020603050405020304" pitchFamily="18" charset="0"/>
-              </a:rPr>
-              <a:t>Analyze housing prices across regions. </a:t>
-            </a:r>
-          </a:p>
-          <a:p>
-            <a:r>
-              <a:rPr lang="en-US" dirty="0">
-                <a:latin typeface="Times New Roman" panose="02020603050405020304" pitchFamily="18" charset="0"/>
-                <a:cs typeface="Times New Roman" panose="02020603050405020304" pitchFamily="18" charset="0"/>
-              </a:rPr>
-              <a:t>Compare different property types. </a:t>
-            </a:r>
-          </a:p>
-          <a:p>
-            <a:r>
-              <a:rPr lang="en-US" dirty="0">
-                <a:latin typeface="Times New Roman" panose="02020603050405020304" pitchFamily="18" charset="0"/>
-                <a:cs typeface="Times New Roman" panose="02020603050405020304" pitchFamily="18" charset="0"/>
-              </a:rPr>
-              <a:t>Investigate negotiation outcomes. </a:t>
-            </a:r>
-          </a:p>
-          <a:p>
-            <a:r>
-              <a:rPr lang="en-US" dirty="0">
-                <a:latin typeface="Times New Roman" panose="02020603050405020304" pitchFamily="18" charset="0"/>
-                <a:cs typeface="Times New Roman" panose="02020603050405020304" pitchFamily="18" charset="0"/>
-              </a:rPr>
-              <a:t>Study the effect of property age. </a:t>
-            </a:r>
-          </a:p>
-          <a:p>
-            <a:r>
-              <a:rPr lang="en-US" dirty="0">
-                <a:latin typeface="Times New Roman" panose="02020603050405020304" pitchFamily="18" charset="0"/>
-                <a:cs typeface="Times New Roman" panose="02020603050405020304" pitchFamily="18" charset="0"/>
-              </a:rPr>
-              <a:t>Examine housing price trends using visualization techniques.</a:t>
+              <a:t>To clean and prepare the dataset. </a:t>
+            </a:r>
+          </a:p>
+          <a:p>
+            <a:r>
+              <a:rPr lang="en-US" dirty="0">
+                <a:latin typeface="Times New Roman" panose="02020603050405020304" pitchFamily="18" charset="0"/>
+                <a:cs typeface="Times New Roman" panose="02020603050405020304" pitchFamily="18" charset="0"/>
+              </a:rPr>
+              <a:t>To identify missing values and outliers. </a:t>
+            </a:r>
+          </a:p>
+          <a:p>
+            <a:r>
+              <a:rPr lang="en-US" dirty="0">
+                <a:latin typeface="Times New Roman" panose="02020603050405020304" pitchFamily="18" charset="0"/>
+                <a:cs typeface="Times New Roman" panose="02020603050405020304" pitchFamily="18" charset="0"/>
+              </a:rPr>
+              <a:t>To analyze housing prices across regions. </a:t>
+            </a:r>
+          </a:p>
+          <a:p>
+            <a:r>
+              <a:rPr lang="en-US" dirty="0">
+                <a:latin typeface="Times New Roman" panose="02020603050405020304" pitchFamily="18" charset="0"/>
+                <a:cs typeface="Times New Roman" panose="02020603050405020304" pitchFamily="18" charset="0"/>
+              </a:rPr>
+              <a:t>To compare different property types. </a:t>
+            </a:r>
+          </a:p>
+          <a:p>
+            <a:r>
+              <a:rPr lang="en-US" dirty="0">
+                <a:latin typeface="Times New Roman" panose="02020603050405020304" pitchFamily="18" charset="0"/>
+                <a:cs typeface="Times New Roman" panose="02020603050405020304" pitchFamily="18" charset="0"/>
+              </a:rPr>
+              <a:t>To investigate negotiation outcomes. </a:t>
+            </a:r>
+          </a:p>
+          <a:p>
+            <a:r>
+              <a:rPr lang="en-US" dirty="0">
+                <a:latin typeface="Times New Roman" panose="02020603050405020304" pitchFamily="18" charset="0"/>
+                <a:cs typeface="Times New Roman" panose="02020603050405020304" pitchFamily="18" charset="0"/>
+              </a:rPr>
+              <a:t>To study the effect of property age. </a:t>
+            </a:r>
+          </a:p>
+          <a:p>
+            <a:r>
+              <a:rPr lang="en-US" dirty="0">
+                <a:latin typeface="Times New Roman" panose="02020603050405020304" pitchFamily="18" charset="0"/>
+                <a:cs typeface="Times New Roman" panose="02020603050405020304" pitchFamily="18" charset="0"/>
+              </a:rPr>
+              <a:t>To examine housing price trends using visualization techniques.</a:t>
             </a:r>
           </a:p>
         </p:txBody>
